--- a/output/wordlabs-reveal-3day.pptx
+++ b/output/wordlabs-reveal-3day.pptx
@@ -4240,7 +4240,7 @@
                 <a:ea typeface="Calibri" pitchFamily="34" charset="-122"/>
                 <a:cs typeface="Calibri" pitchFamily="34" charset="-120"/>
               </a:rPr>
-              <a:t>"uncover or show something hidden"</a:t>
+              <a:t>"to uncover or show hidden"</a:t>
             </a:r>
             <a:endParaRPr lang="en-US" sz="2200" dirty="0"/>
           </a:p>
@@ -5288,7 +5288,7 @@
                 <a:ea typeface="Calibri" pitchFamily="34" charset="-122"/>
                 <a:cs typeface="Calibri" pitchFamily="34" charset="-120"/>
               </a:rPr>
-              <a:t>Word Labs  •  wordlabs.app  •  Root: 'reveal' = uncover or show something hidden</a:t>
+              <a:t>Word Labs  •  wordlabs.app  •  Root: 'reveal' = to uncover or show hidden</a:t>
             </a:r>
             <a:endParaRPr lang="en-US" sz="800" dirty="0"/>
           </a:p>
@@ -5928,7 +5928,7 @@
                 <a:ea typeface="Calibri" pitchFamily="34" charset="-122"/>
                 <a:cs typeface="Calibri" pitchFamily="34" charset="-120"/>
               </a:rPr>
-              <a:t>Word Labs  •  wordlabs.app  •  Root: 'reveal' = uncover or show something hidden</a:t>
+              <a:t>Word Labs  •  wordlabs.app  •  Root: 'reveal' = to uncover or show hidden</a:t>
             </a:r>
             <a:endParaRPr lang="en-US" sz="800" dirty="0"/>
           </a:p>
@@ -6040,7 +6040,7 @@
                 <a:ea typeface="Calibri" pitchFamily="34" charset="-122"/>
                 <a:cs typeface="Calibri" pitchFamily="34" charset="-120"/>
               </a:rPr>
-              <a:t>The scientist was </a:t>
+              <a:t>The detective was </a:t>
             </a:r>
             <a:pPr algn="l" indent="0" marL="0">
               <a:buNone/>
@@ -6071,7 +6071,7 @@
                 <a:ea typeface="Calibri" pitchFamily="34" charset="-122"/>
                 <a:cs typeface="Calibri" pitchFamily="34" charset="-120"/>
               </a:rPr>
-              <a:t> her results, but some facts remained </a:t>
+              <a:t> the clues carefully, and her </a:t>
             </a:r>
             <a:pPr algn="l" indent="0" marL="0">
               <a:buNone/>
@@ -6088,7 +6088,7 @@
                 <a:ea typeface="Calibri" pitchFamily="34" charset="-122"/>
                 <a:cs typeface="Calibri" pitchFamily="34" charset="-120"/>
               </a:rPr>
-              <a:t>unrevealed</a:t>
+              <a:t>revelation</a:t>
             </a:r>
             <a:pPr algn="l" indent="0" marL="0">
               <a:buNone/>
@@ -6102,7 +6102,7 @@
                 <a:ea typeface="Calibri" pitchFamily="34" charset="-122"/>
                 <a:cs typeface="Calibri" pitchFamily="34" charset="-120"/>
               </a:rPr>
-              <a:t> until the next day.</a:t>
+              <a:t> shocked everyone in the room.</a:t>
             </a:r>
             <a:endParaRPr lang="en-US" sz="1800" dirty="0"/>
           </a:p>
@@ -6385,7 +6385,7 @@
                 <a:ea typeface="Trebuchet MS" pitchFamily="34" charset="-122"/>
                 <a:cs typeface="Trebuchet MS" pitchFamily="34" charset="-120"/>
               </a:rPr>
-              <a:t>unrevealed</a:t>
+              <a:t>revelation</a:t>
             </a:r>
             <a:endParaRPr lang="en-US" sz="1400" dirty="0"/>
           </a:p>
@@ -6716,7 +6716,7 @@
                 <a:ea typeface="Calibri" pitchFamily="34" charset="-122"/>
                 <a:cs typeface="Calibri" pitchFamily="34" charset="-120"/>
               </a:rPr>
-              <a:t>Word Labs  •  wordlabs.app  •  Root: 'reveal' = uncover or show something hidden</a:t>
+              <a:t>Word Labs  •  wordlabs.app  •  Root: 'reveal' = to uncover or show hidden</a:t>
             </a:r>
             <a:endParaRPr lang="en-US" sz="800" dirty="0"/>
           </a:p>
@@ -7543,7 +7543,7 @@
                 <a:ea typeface="Calibri" pitchFamily="34" charset="-122"/>
                 <a:cs typeface="Calibri" pitchFamily="34" charset="-120"/>
               </a:rPr>
-              <a:t>Word Labs  •  wordlabs.app  •  Root: 'reveal' = uncover or show something hidden</a:t>
+              <a:t>Word Labs  •  wordlabs.app  •  Root: 'reveal' = to uncover or show hidden</a:t>
             </a:r>
             <a:endParaRPr lang="en-US" sz="800" dirty="0"/>
           </a:p>
@@ -7860,7 +7860,7 @@
                 <a:ea typeface="Calibri" pitchFamily="34" charset="-122"/>
                 <a:cs typeface="Calibri" pitchFamily="34" charset="-120"/>
               </a:rPr>
-              <a:t>uncover or show something hidden</a:t>
+              <a:t>to uncover or show hidden</a:t>
             </a:r>
             <a:endParaRPr lang="en-US" sz="850" dirty="0"/>
           </a:p>
@@ -7972,7 +7972,7 @@
                 <a:ea typeface="Calibri" pitchFamily="34" charset="-122"/>
                 <a:cs typeface="Calibri" pitchFamily="34" charset="-120"/>
               </a:rPr>
-              <a:t>ongoing action (present participle)</a:t>
+              <a:t>action happening now</a:t>
             </a:r>
             <a:endParaRPr lang="en-US" sz="850" dirty="0"/>
           </a:p>
@@ -8528,7 +8528,7 @@
                 <a:ea typeface="Calibri" pitchFamily="34" charset="-122"/>
                 <a:cs typeface="Calibri" pitchFamily="34" charset="-120"/>
               </a:rPr>
-              <a:t>Word Labs  •  wordlabs.app  •  Root: 'reveal' = uncover or show something hidden</a:t>
+              <a:t>Word Labs  •  wordlabs.app  •  Root: 'reveal' = to uncover or show hidden</a:t>
             </a:r>
             <a:endParaRPr lang="en-US" sz="800" dirty="0"/>
           </a:p>
@@ -8845,7 +8845,7 @@
                 <a:ea typeface="Calibri" pitchFamily="34" charset="-122"/>
                 <a:cs typeface="Calibri" pitchFamily="34" charset="-120"/>
               </a:rPr>
-              <a:t>uncover or show something hidden</a:t>
+              <a:t>to uncover or show hidden</a:t>
             </a:r>
             <a:endParaRPr lang="en-US" sz="850" dirty="0"/>
           </a:p>
@@ -8957,7 +8957,7 @@
                 <a:ea typeface="Calibri" pitchFamily="34" charset="-122"/>
                 <a:cs typeface="Calibri" pitchFamily="34" charset="-120"/>
               </a:rPr>
-              <a:t>ongoing action (present participle)</a:t>
+              <a:t>action happening now</a:t>
             </a:r>
             <a:endParaRPr lang="en-US" sz="850" dirty="0"/>
           </a:p>
@@ -9750,7 +9750,7 @@
                 <a:ea typeface="Calibri" pitchFamily="34" charset="-122"/>
                 <a:cs typeface="Calibri" pitchFamily="34" charset="-120"/>
               </a:rPr>
-              <a:t>Word Labs  •  wordlabs.app  •  Root: 'reveal' = uncover or show something hidden</a:t>
+              <a:t>Word Labs  •  wordlabs.app  •  Root: 'reveal' = to uncover or show hidden</a:t>
             </a:r>
             <a:endParaRPr lang="en-US" sz="800" dirty="0"/>
           </a:p>
@@ -10067,7 +10067,7 @@
                 <a:ea typeface="Calibri" pitchFamily="34" charset="-122"/>
                 <a:cs typeface="Calibri" pitchFamily="34" charset="-120"/>
               </a:rPr>
-              <a:t>uncover or show something hidden</a:t>
+              <a:t>to uncover or show hidden</a:t>
             </a:r>
             <a:endParaRPr lang="en-US" sz="850" dirty="0"/>
           </a:p>
@@ -10179,7 +10179,7 @@
                 <a:ea typeface="Calibri" pitchFamily="34" charset="-122"/>
                 <a:cs typeface="Calibri" pitchFamily="34" charset="-120"/>
               </a:rPr>
-              <a:t>ongoing action (present participle)</a:t>
+              <a:t>action happening now</a:t>
             </a:r>
             <a:endParaRPr lang="en-US" sz="850" dirty="0"/>
           </a:p>
@@ -10655,7 +10655,7 @@
         </p:nvSpPr>
         <p:spPr>
           <a:xfrm>
-            <a:off x="2254649" y="4169664"/>
+            <a:off x="2124837" y="4169664"/>
             <a:ext cx="685800" cy="475488"/>
           </a:xfrm>
           <a:prstGeom prst="rect">
@@ -10682,7 +10682,7 @@
         </p:nvSpPr>
         <p:spPr>
           <a:xfrm>
-            <a:off x="2254649" y="4169664"/>
+            <a:off x="2124837" y="4169664"/>
             <a:ext cx="685800" cy="475488"/>
           </a:xfrm>
           <a:prstGeom prst="rect">
@@ -10721,7 +10721,7 @@
         </p:nvSpPr>
         <p:spPr>
           <a:xfrm>
-            <a:off x="3293146" y="4169664"/>
+            <a:off x="3033522" y="4169664"/>
             <a:ext cx="685800" cy="475488"/>
           </a:xfrm>
           <a:prstGeom prst="rect">
@@ -10748,7 +10748,7 @@
         </p:nvSpPr>
         <p:spPr>
           <a:xfrm>
-            <a:off x="3293146" y="4169664"/>
+            <a:off x="3033522" y="4169664"/>
             <a:ext cx="685800" cy="475488"/>
           </a:xfrm>
           <a:prstGeom prst="rect">
@@ -10787,7 +10787,7 @@
         </p:nvSpPr>
         <p:spPr>
           <a:xfrm>
-            <a:off x="4331643" y="4169664"/>
+            <a:off x="3942207" y="4169664"/>
             <a:ext cx="685800" cy="475488"/>
           </a:xfrm>
           <a:prstGeom prst="rect">
@@ -10814,7 +10814,7 @@
         </p:nvSpPr>
         <p:spPr>
           <a:xfrm>
-            <a:off x="4331643" y="4169664"/>
+            <a:off x="3942207" y="4169664"/>
             <a:ext cx="685800" cy="475488"/>
           </a:xfrm>
           <a:prstGeom prst="rect">
@@ -10853,7 +10853,7 @@
         </p:nvSpPr>
         <p:spPr>
           <a:xfrm>
-            <a:off x="5370141" y="4169664"/>
+            <a:off x="4850892" y="4169664"/>
             <a:ext cx="685800" cy="475488"/>
           </a:xfrm>
           <a:prstGeom prst="rect">
@@ -10880,7 +10880,7 @@
         </p:nvSpPr>
         <p:spPr>
           <a:xfrm>
-            <a:off x="5370141" y="4169664"/>
+            <a:off x="4850892" y="4169664"/>
             <a:ext cx="685800" cy="475488"/>
           </a:xfrm>
           <a:prstGeom prst="rect">
@@ -10905,7 +10905,7 @@
                 <a:ea typeface="Trebuchet MS" pitchFamily="34" charset="-122"/>
                 <a:cs typeface="Trebuchet MS" pitchFamily="34" charset="-120"/>
               </a:rPr>
-              <a:t>eal</a:t>
+              <a:t>ea</a:t>
             </a:r>
             <a:endParaRPr lang="en-US" sz="900" dirty="0"/>
           </a:p>
@@ -10919,7 +10919,7 @@
         </p:nvSpPr>
         <p:spPr>
           <a:xfrm>
-            <a:off x="6408638" y="4169664"/>
+            <a:off x="5759577" y="4169664"/>
             <a:ext cx="685800" cy="475488"/>
           </a:xfrm>
           <a:prstGeom prst="rect">
@@ -10946,7 +10946,7 @@
         </p:nvSpPr>
         <p:spPr>
           <a:xfrm>
-            <a:off x="6408638" y="4169664"/>
+            <a:off x="5759577" y="4169664"/>
             <a:ext cx="685800" cy="475488"/>
           </a:xfrm>
           <a:prstGeom prst="rect">
@@ -10971,7 +10971,7 @@
                 <a:ea typeface="Trebuchet MS" pitchFamily="34" charset="-122"/>
                 <a:cs typeface="Trebuchet MS" pitchFamily="34" charset="-120"/>
               </a:rPr>
-              <a:t>i</a:t>
+              <a:t>l</a:t>
             </a:r>
             <a:endParaRPr lang="en-US" sz="900" dirty="0"/>
           </a:p>
@@ -10985,7 +10985,7 @@
         </p:nvSpPr>
         <p:spPr>
           <a:xfrm>
-            <a:off x="7447135" y="4169664"/>
+            <a:off x="6668262" y="4169664"/>
             <a:ext cx="685800" cy="475488"/>
           </a:xfrm>
           <a:prstGeom prst="rect">
@@ -11012,7 +11012,73 @@
         </p:nvSpPr>
         <p:spPr>
           <a:xfrm>
-            <a:off x="7447135" y="4169664"/>
+            <a:off x="6668262" y="4169664"/>
+            <a:ext cx="685800" cy="475488"/>
+          </a:xfrm>
+          <a:prstGeom prst="rect">
+            <a:avLst/>
+          </a:prstGeom>
+          <a:noFill/>
+          <a:ln/>
+        </p:spPr>
+        <p:txBody>
+          <a:bodyPr wrap="square" lIns="0" tIns="0" rIns="0" bIns="0" rtlCol="0" anchor="ctr"/>
+          <a:lstStyle/>
+          <a:p>
+            <a:pPr algn="ctr" indent="0" marL="0">
+              <a:buNone/>
+            </a:pPr>
+            <a:r>
+              <a:rPr lang="en-US" sz="900" b="1" dirty="0">
+                <a:solidFill>
+                  <a:srgbClr val="9D174D"/>
+                </a:solidFill>
+                <a:latin typeface="Trebuchet MS" pitchFamily="34" charset="0"/>
+                <a:ea typeface="Trebuchet MS" pitchFamily="34" charset="-122"/>
+                <a:cs typeface="Trebuchet MS" pitchFamily="34" charset="-120"/>
+              </a:rPr>
+              <a:t>i</a:t>
+            </a:r>
+            <a:endParaRPr lang="en-US" sz="900" dirty="0"/>
+          </a:p>
+        </p:txBody>
+      </p:sp>
+      <p:sp>
+        <p:nvSpPr>
+          <p:cNvPr id="48" name="Shape 46"/>
+          <p:cNvSpPr/>
+          <p:nvPr/>
+        </p:nvSpPr>
+        <p:spPr>
+          <a:xfrm>
+            <a:off x="7576947" y="4169664"/>
+            <a:ext cx="685800" cy="475488"/>
+          </a:xfrm>
+          <a:prstGeom prst="rect">
+            <a:avLst>
+              <a:gd name="adj" fmla="val 7692"/>
+            </a:avLst>
+          </a:prstGeom>
+          <a:solidFill>
+            <a:srgbClr val="FFFFFF"/>
+          </a:solidFill>
+          <a:ln w="12700">
+            <a:solidFill>
+              <a:srgbClr val="DB2777"/>
+            </a:solidFill>
+            <a:prstDash val="solid"/>
+          </a:ln>
+        </p:spPr>
+      </p:sp>
+      <p:sp>
+        <p:nvSpPr>
+          <p:cNvPr id="49" name="Text 47"/>
+          <p:cNvSpPr/>
+          <p:nvPr/>
+        </p:nvSpPr>
+        <p:spPr>
+          <a:xfrm>
+            <a:off x="7576947" y="4169664"/>
             <a:ext cx="685800" cy="475488"/>
           </a:xfrm>
           <a:prstGeom prst="rect">
@@ -11329,7 +11395,7 @@
                 <a:ea typeface="Calibri" pitchFamily="34" charset="-122"/>
                 <a:cs typeface="Calibri" pitchFamily="34" charset="-120"/>
               </a:rPr>
-              <a:t>Word Labs  •  wordlabs.app  •  Root: 'reveal' = uncover or show something hidden</a:t>
+              <a:t>Word Labs  •  wordlabs.app  •  Root: 'reveal' = to uncover or show hidden</a:t>
             </a:r>
             <a:endParaRPr lang="en-US" sz="800" dirty="0"/>
           </a:p>
@@ -11468,7 +11534,7 @@
                 <a:ea typeface="Trebuchet MS" pitchFamily="34" charset="-122"/>
                 <a:cs typeface="Trebuchet MS" pitchFamily="34" charset="-120"/>
               </a:rPr>
-              <a:t>unrevealed</a:t>
+              <a:t>revelation</a:t>
             </a:r>
             <a:endParaRPr lang="en-US" sz="2800" dirty="0"/>
           </a:p>
@@ -12156,7 +12222,7 @@
                 <a:ea typeface="Calibri" pitchFamily="34" charset="-122"/>
                 <a:cs typeface="Calibri" pitchFamily="34" charset="-120"/>
               </a:rPr>
-              <a:t>Word Labs  •  wordlabs.app  •  Root: 'reveal' = uncover or show something hidden</a:t>
+              <a:t>Word Labs  •  wordlabs.app  •  Root: 'reveal' = to uncover or show hidden</a:t>
             </a:r>
             <a:endParaRPr lang="en-US" sz="800" dirty="0"/>
           </a:p>
@@ -12295,7 +12361,7 @@
                 <a:ea typeface="Trebuchet MS" pitchFamily="34" charset="-122"/>
                 <a:cs typeface="Trebuchet MS" pitchFamily="34" charset="-120"/>
               </a:rPr>
-              <a:t>unrevealed</a:t>
+              <a:t>revelation</a:t>
             </a:r>
             <a:endParaRPr lang="en-US" sz="2800" dirty="0"/>
           </a:p>
@@ -12375,7 +12441,7 @@
         </p:nvSpPr>
         <p:spPr>
           <a:xfrm>
-            <a:off x="2221992" y="2258568"/>
+            <a:off x="2938272" y="2258568"/>
             <a:ext cx="1828800" cy="292608"/>
           </a:xfrm>
           <a:prstGeom prst="rect">
@@ -12384,11 +12450,11 @@
             </a:avLst>
           </a:prstGeom>
           <a:solidFill>
-            <a:srgbClr val="DDD6FE"/>
+            <a:srgbClr val="CCFBF1"/>
           </a:solidFill>
           <a:ln w="19050">
             <a:solidFill>
-              <a:srgbClr val="7C3AED"/>
+              <a:srgbClr val="0D9488"/>
             </a:solidFill>
             <a:prstDash val="solid"/>
           </a:ln>
@@ -12409,7 +12475,7 @@
         </p:nvSpPr>
         <p:spPr>
           <a:xfrm>
-            <a:off x="2221992" y="2258568"/>
+            <a:off x="2938272" y="2258568"/>
             <a:ext cx="1828800" cy="292608"/>
           </a:xfrm>
           <a:prstGeom prst="rect">
@@ -12428,13 +12494,13 @@
             <a:r>
               <a:rPr lang="en-US" sz="1300" b="1" dirty="0">
                 <a:solidFill>
-                  <a:srgbClr val="4C1D95"/>
+                  <a:srgbClr val="0F766E"/>
                 </a:solidFill>
                 <a:latin typeface="Trebuchet MS" pitchFamily="34" charset="0"/>
                 <a:ea typeface="Trebuchet MS" pitchFamily="34" charset="-122"/>
                 <a:cs typeface="Trebuchet MS" pitchFamily="34" charset="-120"/>
               </a:rPr>
-              <a:t>un</a:t>
+              <a:t>reveal</a:t>
             </a:r>
             <a:endParaRPr lang="en-US" sz="1300" dirty="0"/>
           </a:p>
@@ -12448,7 +12514,7 @@
         </p:nvSpPr>
         <p:spPr>
           <a:xfrm>
-            <a:off x="2221992" y="2569464"/>
+            <a:off x="2938272" y="2569464"/>
             <a:ext cx="1828800" cy="201168"/>
           </a:xfrm>
           <a:prstGeom prst="rect">
@@ -12473,7 +12539,7 @@
                 <a:ea typeface="Calibri" pitchFamily="34" charset="-122"/>
                 <a:cs typeface="Calibri" pitchFamily="34" charset="-120"/>
               </a:rPr>
-              <a:t>not</a:t>
+              <a:t>to uncover or show hidden</a:t>
             </a:r>
             <a:endParaRPr lang="en-US" sz="850" dirty="0"/>
           </a:p>
@@ -12481,13 +12547,52 @@
       </p:sp>
       <p:sp>
         <p:nvSpPr>
-          <p:cNvPr id="19" name="Shape 17"/>
-          <p:cNvSpPr/>
-          <p:nvPr/>
-        </p:nvSpPr>
-        <p:spPr>
-          <a:xfrm>
-            <a:off x="4370832" y="2258568"/>
+          <p:cNvPr id="19" name="Text 17"/>
+          <p:cNvSpPr/>
+          <p:nvPr/>
+        </p:nvSpPr>
+        <p:spPr>
+          <a:xfrm>
+            <a:off x="2938272" y="2752344"/>
+            <a:ext cx="1828800" cy="182880"/>
+          </a:xfrm>
+          <a:prstGeom prst="rect">
+            <a:avLst/>
+          </a:prstGeom>
+          <a:noFill/>
+          <a:ln/>
+        </p:spPr>
+        <p:txBody>
+          <a:bodyPr wrap="square" lIns="0" tIns="0" rIns="0" bIns="0" rtlCol="0" anchor="t"/>
+          <a:lstStyle/>
+          <a:p>
+            <a:pPr algn="ctr" indent="0" marL="0">
+              <a:buNone/>
+            </a:pPr>
+            <a:r>
+              <a:rPr lang="en-US" sz="700" i="1" dirty="0">
+                <a:solidFill>
+                  <a:srgbClr val="94A3B8"/>
+                </a:solidFill>
+                <a:latin typeface="Calibri" pitchFamily="34" charset="0"/>
+                <a:ea typeface="Calibri" pitchFamily="34" charset="-122"/>
+                <a:cs typeface="Calibri" pitchFamily="34" charset="-120"/>
+              </a:rPr>
+              <a:t>'reveal' shortens to 'revel' before '-ation'</a:t>
+            </a:r>
+            <a:endParaRPr lang="en-US" sz="700" dirty="0"/>
+          </a:p>
+        </p:txBody>
+      </p:sp>
+      <p:sp>
+        <p:nvSpPr>
+          <p:cNvPr id="20" name="Shape 18"/>
+          <p:cNvSpPr/>
+          <p:nvPr/>
+        </p:nvSpPr>
+        <p:spPr>
+          <a:xfrm>
+            <a:off x="5803392" y="2258568"/>
             <a:ext cx="1828800" cy="292608"/>
           </a:xfrm>
           <a:prstGeom prst="rect">
@@ -12496,11 +12601,11 @@
             </a:avLst>
           </a:prstGeom>
           <a:solidFill>
-            <a:srgbClr val="CCFBF1"/>
+            <a:srgbClr val="FCE7F3"/>
           </a:solidFill>
           <a:ln w="19050">
             <a:solidFill>
-              <a:srgbClr val="0D9488"/>
+              <a:srgbClr val="DB2777"/>
             </a:solidFill>
             <a:prstDash val="solid"/>
           </a:ln>
@@ -12515,13 +12620,13 @@
       </p:sp>
       <p:sp>
         <p:nvSpPr>
-          <p:cNvPr id="20" name="Text 18"/>
-          <p:cNvSpPr/>
-          <p:nvPr/>
-        </p:nvSpPr>
-        <p:spPr>
-          <a:xfrm>
-            <a:off x="4370832" y="2258568"/>
+          <p:cNvPr id="21" name="Text 19"/>
+          <p:cNvSpPr/>
+          <p:nvPr/>
+        </p:nvSpPr>
+        <p:spPr>
+          <a:xfrm>
+            <a:off x="5803392" y="2258568"/>
             <a:ext cx="1828800" cy="292608"/>
           </a:xfrm>
           <a:prstGeom prst="rect">
@@ -12540,13 +12645,13 @@
             <a:r>
               <a:rPr lang="en-US" sz="1300" b="1" dirty="0">
                 <a:solidFill>
-                  <a:srgbClr val="0F766E"/>
+                  <a:srgbClr val="9D174D"/>
                 </a:solidFill>
                 <a:latin typeface="Trebuchet MS" pitchFamily="34" charset="0"/>
                 <a:ea typeface="Trebuchet MS" pitchFamily="34" charset="-122"/>
                 <a:cs typeface="Trebuchet MS" pitchFamily="34" charset="-120"/>
               </a:rPr>
-              <a:t>reveal</a:t>
+              <a:t>ation</a:t>
             </a:r>
             <a:endParaRPr lang="en-US" sz="1300" dirty="0"/>
           </a:p>
@@ -12554,13 +12659,13 @@
       </p:sp>
       <p:sp>
         <p:nvSpPr>
-          <p:cNvPr id="21" name="Text 19"/>
-          <p:cNvSpPr/>
-          <p:nvPr/>
-        </p:nvSpPr>
-        <p:spPr>
-          <a:xfrm>
-            <a:off x="4370832" y="2569464"/>
+          <p:cNvPr id="22" name="Text 20"/>
+          <p:cNvSpPr/>
+          <p:nvPr/>
+        </p:nvSpPr>
+        <p:spPr>
+          <a:xfrm>
+            <a:off x="5803392" y="2569464"/>
             <a:ext cx="1828800" cy="201168"/>
           </a:xfrm>
           <a:prstGeom prst="rect">
@@ -12585,7 +12690,7 @@
                 <a:ea typeface="Calibri" pitchFamily="34" charset="-122"/>
                 <a:cs typeface="Calibri" pitchFamily="34" charset="-120"/>
               </a:rPr>
-              <a:t>uncover or show something hidden</a:t>
+              <a:t>act or result of</a:t>
             </a:r>
             <a:endParaRPr lang="en-US" sz="850" dirty="0"/>
           </a:p>
@@ -12593,130 +12698,189 @@
       </p:sp>
       <p:sp>
         <p:nvSpPr>
-          <p:cNvPr id="22" name="Shape 20"/>
-          <p:cNvSpPr/>
-          <p:nvPr/>
-        </p:nvSpPr>
-        <p:spPr>
-          <a:xfrm>
-            <a:off x="6519672" y="2258568"/>
-            <a:ext cx="1828800" cy="292608"/>
+          <p:cNvPr id="23" name="Text 21"/>
+          <p:cNvSpPr/>
+          <p:nvPr/>
+        </p:nvSpPr>
+        <p:spPr>
+          <a:xfrm>
+            <a:off x="5803392" y="2752344"/>
+            <a:ext cx="1828800" cy="182880"/>
+          </a:xfrm>
+          <a:prstGeom prst="rect">
+            <a:avLst/>
+          </a:prstGeom>
+          <a:noFill/>
+          <a:ln/>
+        </p:spPr>
+        <p:txBody>
+          <a:bodyPr wrap="square" lIns="0" tIns="0" rIns="0" bIns="0" rtlCol="0" anchor="t"/>
+          <a:lstStyle/>
+          <a:p>
+            <a:pPr algn="ctr" indent="0" marL="0">
+              <a:buNone/>
+            </a:pPr>
+            <a:r>
+              <a:rPr lang="en-US" sz="700" i="1" dirty="0">
+                <a:solidFill>
+                  <a:srgbClr val="94A3B8"/>
+                </a:solidFill>
+                <a:latin typeface="Calibri" pitchFamily="34" charset="0"/>
+                <a:ea typeface="Calibri" pitchFamily="34" charset="-122"/>
+                <a:cs typeface="Calibri" pitchFamily="34" charset="-120"/>
+              </a:rPr>
+              <a:t>'e' dropped before vowel suffix</a:t>
+            </a:r>
+            <a:endParaRPr lang="en-US" sz="700" dirty="0"/>
+          </a:p>
+        </p:txBody>
+      </p:sp>
+      <p:sp>
+        <p:nvSpPr>
+          <p:cNvPr id="24" name="Shape 22"/>
+          <p:cNvSpPr/>
+          <p:nvPr/>
+        </p:nvSpPr>
+        <p:spPr>
+          <a:xfrm>
+            <a:off x="365760" y="3273552"/>
+            <a:ext cx="1371600" cy="658368"/>
           </a:xfrm>
           <a:prstGeom prst="rect">
             <a:avLst>
-              <a:gd name="adj" fmla="val 25000"/>
+              <a:gd name="adj" fmla="val 8333"/>
             </a:avLst>
           </a:prstGeom>
           <a:solidFill>
-            <a:srgbClr val="FCE7F3"/>
-          </a:solidFill>
-          <a:ln w="19050">
-            <a:solidFill>
-              <a:srgbClr val="DB2777"/>
-            </a:solidFill>
-            <a:prstDash val="solid"/>
-          </a:ln>
-          <a:effectLst>
-            <a:outerShdw sx="100000" sy="100000" kx="0" ky="0" algn="bl" rotWithShape="0" blurRad="101600" dist="38100" dir="8100000">
-              <a:srgbClr val="000000">
-                <a:alpha val="12000"/>
-              </a:srgbClr>
-            </a:outerShdw>
-          </a:effectLst>
-        </p:spPr>
-      </p:sp>
-      <p:sp>
-        <p:nvSpPr>
-          <p:cNvPr id="23" name="Text 21"/>
-          <p:cNvSpPr/>
-          <p:nvPr/>
-        </p:nvSpPr>
-        <p:spPr>
-          <a:xfrm>
-            <a:off x="6519672" y="2258568"/>
-            <a:ext cx="1828800" cy="292608"/>
-          </a:xfrm>
-          <a:prstGeom prst="rect">
-            <a:avLst/>
-          </a:prstGeom>
-          <a:noFill/>
-          <a:ln/>
-        </p:spPr>
-        <p:txBody>
-          <a:bodyPr wrap="square" lIns="0" tIns="0" rIns="0" bIns="0" rtlCol="0" anchor="ctr"/>
-          <a:lstStyle/>
-          <a:p>
-            <a:pPr algn="ctr" indent="0" marL="0">
-              <a:buNone/>
-            </a:pPr>
-            <a:r>
-              <a:rPr lang="en-US" sz="1300" b="1" dirty="0">
-                <a:solidFill>
-                  <a:srgbClr val="9D174D"/>
+            <a:srgbClr val="E2E8F0"/>
+          </a:solidFill>
+          <a:ln w="12700">
+            <a:solidFill>
+              <a:srgbClr val="E2E8F0"/>
+            </a:solidFill>
+            <a:prstDash val="solid"/>
+          </a:ln>
+        </p:spPr>
+      </p:sp>
+      <p:sp>
+        <p:nvSpPr>
+          <p:cNvPr id="25" name="Text 23"/>
+          <p:cNvSpPr/>
+          <p:nvPr/>
+        </p:nvSpPr>
+        <p:spPr>
+          <a:xfrm>
+            <a:off x="365760" y="3273552"/>
+            <a:ext cx="1371600" cy="658368"/>
+          </a:xfrm>
+          <a:prstGeom prst="rect">
+            <a:avLst/>
+          </a:prstGeom>
+          <a:noFill/>
+          <a:ln/>
+        </p:spPr>
+        <p:txBody>
+          <a:bodyPr wrap="square" lIns="0" tIns="0" rIns="0" bIns="0" rtlCol="0" anchor="ctr"/>
+          <a:lstStyle/>
+          <a:p>
+            <a:pPr algn="ctr" indent="0" marL="0">
+              <a:buNone/>
+            </a:pPr>
+            <a:r>
+              <a:rPr lang="en-US" sz="1100" b="1" dirty="0">
+                <a:solidFill>
+                  <a:srgbClr val="475569"/>
                 </a:solidFill>
                 <a:latin typeface="Trebuchet MS" pitchFamily="34" charset="0"/>
                 <a:ea typeface="Trebuchet MS" pitchFamily="34" charset="-122"/>
                 <a:cs typeface="Trebuchet MS" pitchFamily="34" charset="-120"/>
               </a:rPr>
-              <a:t>ed</a:t>
-            </a:r>
-            <a:endParaRPr lang="en-US" sz="1300" dirty="0"/>
-          </a:p>
-        </p:txBody>
-      </p:sp>
-      <p:sp>
-        <p:nvSpPr>
-          <p:cNvPr id="24" name="Text 22"/>
-          <p:cNvSpPr/>
-          <p:nvPr/>
-        </p:nvSpPr>
-        <p:spPr>
-          <a:xfrm>
-            <a:off x="6519672" y="2569464"/>
-            <a:ext cx="1828800" cy="201168"/>
-          </a:xfrm>
-          <a:prstGeom prst="rect">
-            <a:avLst/>
-          </a:prstGeom>
-          <a:noFill/>
-          <a:ln/>
-        </p:spPr>
-        <p:txBody>
-          <a:bodyPr wrap="square" lIns="0" tIns="0" rIns="0" bIns="0" rtlCol="0" anchor="t"/>
-          <a:lstStyle/>
-          <a:p>
-            <a:pPr algn="ctr" indent="0" marL="0">
-              <a:buNone/>
-            </a:pPr>
-            <a:r>
-              <a:rPr lang="en-US" sz="850" dirty="0">
-                <a:solidFill>
-                  <a:srgbClr val="475569"/>
+              <a:t>Syllables</a:t>
+            </a:r>
+            <a:endParaRPr lang="en-US" sz="1100" dirty="0"/>
+          </a:p>
+        </p:txBody>
+      </p:sp>
+      <p:sp>
+        <p:nvSpPr>
+          <p:cNvPr id="26" name="Shape 24"/>
+          <p:cNvSpPr/>
+          <p:nvPr/>
+        </p:nvSpPr>
+        <p:spPr>
+          <a:xfrm>
+            <a:off x="1874520" y="3273552"/>
+            <a:ext cx="6903720" cy="658368"/>
+          </a:xfrm>
+          <a:prstGeom prst="rect">
+            <a:avLst>
+              <a:gd name="adj" fmla="val 8333"/>
+            </a:avLst>
+          </a:prstGeom>
+          <a:solidFill>
+            <a:srgbClr val="F8FAFC"/>
+          </a:solidFill>
+          <a:ln w="12700">
+            <a:solidFill>
+              <a:srgbClr val="E2E8F0"/>
+            </a:solidFill>
+            <a:prstDash val="dash"/>
+          </a:ln>
+        </p:spPr>
+      </p:sp>
+      <p:sp>
+        <p:nvSpPr>
+          <p:cNvPr id="27" name="Text 25"/>
+          <p:cNvSpPr/>
+          <p:nvPr/>
+        </p:nvSpPr>
+        <p:spPr>
+          <a:xfrm>
+            <a:off x="1874520" y="3273552"/>
+            <a:ext cx="6903720" cy="658368"/>
+          </a:xfrm>
+          <a:prstGeom prst="rect">
+            <a:avLst/>
+          </a:prstGeom>
+          <a:noFill/>
+          <a:ln/>
+        </p:spPr>
+        <p:txBody>
+          <a:bodyPr wrap="square" rtlCol="0" anchor="ctr"/>
+          <a:lstStyle/>
+          <a:p>
+            <a:pPr algn="ctr" indent="0" marL="0">
+              <a:buNone/>
+            </a:pPr>
+            <a:r>
+              <a:rPr lang="en-US" sz="1100" i="1" dirty="0">
+                <a:solidFill>
+                  <a:srgbClr val="CBD5E1"/>
                 </a:solidFill>
                 <a:latin typeface="Calibri" pitchFamily="34" charset="0"/>
                 <a:ea typeface="Calibri" pitchFamily="34" charset="-122"/>
                 <a:cs typeface="Calibri" pitchFamily="34" charset="-120"/>
               </a:rPr>
-              <a:t>past tense or completed action</a:t>
-            </a:r>
-            <a:endParaRPr lang="en-US" sz="850" dirty="0"/>
-          </a:p>
-        </p:txBody>
-      </p:sp>
-      <p:sp>
-        <p:nvSpPr>
-          <p:cNvPr id="25" name="Shape 23"/>
-          <p:cNvSpPr/>
-          <p:nvPr/>
-        </p:nvSpPr>
-        <p:spPr>
-          <a:xfrm>
-            <a:off x="365760" y="3273552"/>
-            <a:ext cx="1371600" cy="658368"/>
+              <a:t>Write here...</a:t>
+            </a:r>
+            <a:endParaRPr lang="en-US" sz="1100" dirty="0"/>
+          </a:p>
+        </p:txBody>
+      </p:sp>
+      <p:sp>
+        <p:nvSpPr>
+          <p:cNvPr id="28" name="Shape 26"/>
+          <p:cNvSpPr/>
+          <p:nvPr/>
+        </p:nvSpPr>
+        <p:spPr>
+          <a:xfrm>
+            <a:off x="365760" y="4096512"/>
+            <a:ext cx="1371600" cy="804672"/>
           </a:xfrm>
           <a:prstGeom prst="rect">
             <a:avLst>
-              <a:gd name="adj" fmla="val 8333"/>
+              <a:gd name="adj" fmla="val 6818"/>
             </a:avLst>
           </a:prstGeom>
           <a:solidFill>
@@ -12732,14 +12896,14 @@
       </p:sp>
       <p:sp>
         <p:nvSpPr>
-          <p:cNvPr id="26" name="Text 24"/>
-          <p:cNvSpPr/>
-          <p:nvPr/>
-        </p:nvSpPr>
-        <p:spPr>
-          <a:xfrm>
-            <a:off x="365760" y="3273552"/>
-            <a:ext cx="1371600" cy="658368"/>
+          <p:cNvPr id="29" name="Text 27"/>
+          <p:cNvSpPr/>
+          <p:nvPr/>
+        </p:nvSpPr>
+        <p:spPr>
+          <a:xfrm>
+            <a:off x="365760" y="4096512"/>
+            <a:ext cx="1371600" cy="804672"/>
           </a:xfrm>
           <a:prstGeom prst="rect">
             <a:avLst/>
@@ -12763,7 +12927,7 @@
                 <a:ea typeface="Trebuchet MS" pitchFamily="34" charset="-122"/>
                 <a:cs typeface="Trebuchet MS" pitchFamily="34" charset="-120"/>
               </a:rPr>
-              <a:t>Syllables</a:t>
+              <a:t>Phonemes</a:t>
             </a:r>
             <a:endParaRPr lang="en-US" sz="1100" dirty="0"/>
           </a:p>
@@ -12771,80 +12935,14 @@
       </p:sp>
       <p:sp>
         <p:nvSpPr>
-          <p:cNvPr id="27" name="Shape 25"/>
-          <p:cNvSpPr/>
-          <p:nvPr/>
-        </p:nvSpPr>
-        <p:spPr>
-          <a:xfrm>
-            <a:off x="1874520" y="3273552"/>
-            <a:ext cx="6903720" cy="658368"/>
-          </a:xfrm>
-          <a:prstGeom prst="rect">
-            <a:avLst>
-              <a:gd name="adj" fmla="val 8333"/>
-            </a:avLst>
-          </a:prstGeom>
-          <a:solidFill>
-            <a:srgbClr val="F8FAFC"/>
-          </a:solidFill>
-          <a:ln w="12700">
-            <a:solidFill>
-              <a:srgbClr val="E2E8F0"/>
-            </a:solidFill>
-            <a:prstDash val="dash"/>
-          </a:ln>
-        </p:spPr>
-      </p:sp>
-      <p:sp>
-        <p:nvSpPr>
-          <p:cNvPr id="28" name="Text 26"/>
-          <p:cNvSpPr/>
-          <p:nvPr/>
-        </p:nvSpPr>
-        <p:spPr>
-          <a:xfrm>
-            <a:off x="1874520" y="3273552"/>
-            <a:ext cx="6903720" cy="658368"/>
-          </a:xfrm>
-          <a:prstGeom prst="rect">
-            <a:avLst/>
-          </a:prstGeom>
-          <a:noFill/>
-          <a:ln/>
-        </p:spPr>
-        <p:txBody>
-          <a:bodyPr wrap="square" rtlCol="0" anchor="ctr"/>
-          <a:lstStyle/>
-          <a:p>
-            <a:pPr algn="ctr" indent="0" marL="0">
-              <a:buNone/>
-            </a:pPr>
-            <a:r>
-              <a:rPr lang="en-US" sz="1100" i="1" dirty="0">
-                <a:solidFill>
-                  <a:srgbClr val="CBD5E1"/>
-                </a:solidFill>
-                <a:latin typeface="Calibri" pitchFamily="34" charset="0"/>
-                <a:ea typeface="Calibri" pitchFamily="34" charset="-122"/>
-                <a:cs typeface="Calibri" pitchFamily="34" charset="-120"/>
-              </a:rPr>
-              <a:t>Write here...</a:t>
-            </a:r>
-            <a:endParaRPr lang="en-US" sz="1100" dirty="0"/>
-          </a:p>
-        </p:txBody>
-      </p:sp>
-      <p:sp>
-        <p:nvSpPr>
-          <p:cNvPr id="29" name="Shape 27"/>
-          <p:cNvSpPr/>
-          <p:nvPr/>
-        </p:nvSpPr>
-        <p:spPr>
-          <a:xfrm>
-            <a:off x="365760" y="4096512"/>
-            <a:ext cx="1371600" cy="804672"/>
+          <p:cNvPr id="30" name="Shape 28"/>
+          <p:cNvSpPr/>
+          <p:nvPr/>
+        </p:nvSpPr>
+        <p:spPr>
+          <a:xfrm>
+            <a:off x="1874520" y="4096512"/>
+            <a:ext cx="6903720" cy="804672"/>
           </a:xfrm>
           <a:prstGeom prst="rect">
             <a:avLst>
@@ -12852,85 +12950,19 @@
             </a:avLst>
           </a:prstGeom>
           <a:solidFill>
-            <a:srgbClr val="E2E8F0"/>
+            <a:srgbClr val="F8FAFC"/>
           </a:solidFill>
           <a:ln w="12700">
             <a:solidFill>
               <a:srgbClr val="E2E8F0"/>
             </a:solidFill>
-            <a:prstDash val="solid"/>
-          </a:ln>
-        </p:spPr>
-      </p:sp>
-      <p:sp>
-        <p:nvSpPr>
-          <p:cNvPr id="30" name="Text 28"/>
-          <p:cNvSpPr/>
-          <p:nvPr/>
-        </p:nvSpPr>
-        <p:spPr>
-          <a:xfrm>
-            <a:off x="365760" y="4096512"/>
-            <a:ext cx="1371600" cy="804672"/>
-          </a:xfrm>
-          <a:prstGeom prst="rect">
-            <a:avLst/>
-          </a:prstGeom>
-          <a:noFill/>
-          <a:ln/>
-        </p:spPr>
-        <p:txBody>
-          <a:bodyPr wrap="square" lIns="0" tIns="0" rIns="0" bIns="0" rtlCol="0" anchor="ctr"/>
-          <a:lstStyle/>
-          <a:p>
-            <a:pPr algn="ctr" indent="0" marL="0">
-              <a:buNone/>
-            </a:pPr>
-            <a:r>
-              <a:rPr lang="en-US" sz="1100" b="1" dirty="0">
-                <a:solidFill>
-                  <a:srgbClr val="475569"/>
-                </a:solidFill>
-                <a:latin typeface="Trebuchet MS" pitchFamily="34" charset="0"/>
-                <a:ea typeface="Trebuchet MS" pitchFamily="34" charset="-122"/>
-                <a:cs typeface="Trebuchet MS" pitchFamily="34" charset="-120"/>
-              </a:rPr>
-              <a:t>Phonemes</a:t>
-            </a:r>
-            <a:endParaRPr lang="en-US" sz="1100" dirty="0"/>
-          </a:p>
-        </p:txBody>
-      </p:sp>
-      <p:sp>
-        <p:nvSpPr>
-          <p:cNvPr id="31" name="Shape 29"/>
-          <p:cNvSpPr/>
-          <p:nvPr/>
-        </p:nvSpPr>
-        <p:spPr>
-          <a:xfrm>
-            <a:off x="1874520" y="4096512"/>
-            <a:ext cx="6903720" cy="804672"/>
-          </a:xfrm>
-          <a:prstGeom prst="rect">
-            <a:avLst>
-              <a:gd name="adj" fmla="val 6818"/>
-            </a:avLst>
-          </a:prstGeom>
-          <a:solidFill>
-            <a:srgbClr val="F8FAFC"/>
-          </a:solidFill>
-          <a:ln w="12700">
-            <a:solidFill>
-              <a:srgbClr val="E2E8F0"/>
-            </a:solidFill>
             <a:prstDash val="dash"/>
           </a:ln>
         </p:spPr>
       </p:sp>
       <p:sp>
         <p:nvSpPr>
-          <p:cNvPr id="32" name="Text 30"/>
+          <p:cNvPr id="31" name="Text 29"/>
           <p:cNvSpPr/>
           <p:nvPr/>
         </p:nvSpPr>
@@ -13253,7 +13285,7 @@
                 <a:ea typeface="Calibri" pitchFamily="34" charset="-122"/>
                 <a:cs typeface="Calibri" pitchFamily="34" charset="-120"/>
               </a:rPr>
-              <a:t>Word Labs  •  wordlabs.app  •  Root: 'reveal' = uncover or show something hidden</a:t>
+              <a:t>Word Labs  •  wordlabs.app  •  Root: 'reveal' = to uncover or show hidden</a:t>
             </a:r>
             <a:endParaRPr lang="en-US" sz="800" dirty="0"/>
           </a:p>
@@ -13392,7 +13424,7 @@
                 <a:ea typeface="Trebuchet MS" pitchFamily="34" charset="-122"/>
                 <a:cs typeface="Trebuchet MS" pitchFamily="34" charset="-120"/>
               </a:rPr>
-              <a:t>unrevealed</a:t>
+              <a:t>revelation</a:t>
             </a:r>
             <a:endParaRPr lang="en-US" sz="2800" dirty="0"/>
           </a:p>
@@ -13472,7 +13504,7 @@
         </p:nvSpPr>
         <p:spPr>
           <a:xfrm>
-            <a:off x="2221992" y="2258568"/>
+            <a:off x="2938272" y="2258568"/>
             <a:ext cx="1828800" cy="292608"/>
           </a:xfrm>
           <a:prstGeom prst="rect">
@@ -13481,11 +13513,11 @@
             </a:avLst>
           </a:prstGeom>
           <a:solidFill>
-            <a:srgbClr val="DDD6FE"/>
+            <a:srgbClr val="CCFBF1"/>
           </a:solidFill>
           <a:ln w="19050">
             <a:solidFill>
-              <a:srgbClr val="7C3AED"/>
+              <a:srgbClr val="0D9488"/>
             </a:solidFill>
             <a:prstDash val="solid"/>
           </a:ln>
@@ -13506,7 +13538,7 @@
         </p:nvSpPr>
         <p:spPr>
           <a:xfrm>
-            <a:off x="2221992" y="2258568"/>
+            <a:off x="2938272" y="2258568"/>
             <a:ext cx="1828800" cy="292608"/>
           </a:xfrm>
           <a:prstGeom prst="rect">
@@ -13525,13 +13557,13 @@
             <a:r>
               <a:rPr lang="en-US" sz="1300" b="1" dirty="0">
                 <a:solidFill>
-                  <a:srgbClr val="4C1D95"/>
+                  <a:srgbClr val="0F766E"/>
                 </a:solidFill>
                 <a:latin typeface="Trebuchet MS" pitchFamily="34" charset="0"/>
                 <a:ea typeface="Trebuchet MS" pitchFamily="34" charset="-122"/>
                 <a:cs typeface="Trebuchet MS" pitchFamily="34" charset="-120"/>
               </a:rPr>
-              <a:t>un</a:t>
+              <a:t>reveal</a:t>
             </a:r>
             <a:endParaRPr lang="en-US" sz="1300" dirty="0"/>
           </a:p>
@@ -13545,7 +13577,7 @@
         </p:nvSpPr>
         <p:spPr>
           <a:xfrm>
-            <a:off x="2221992" y="2569464"/>
+            <a:off x="2938272" y="2569464"/>
             <a:ext cx="1828800" cy="201168"/>
           </a:xfrm>
           <a:prstGeom prst="rect">
@@ -13570,7 +13602,7 @@
                 <a:ea typeface="Calibri" pitchFamily="34" charset="-122"/>
                 <a:cs typeface="Calibri" pitchFamily="34" charset="-120"/>
               </a:rPr>
-              <a:t>not</a:t>
+              <a:t>to uncover or show hidden</a:t>
             </a:r>
             <a:endParaRPr lang="en-US" sz="850" dirty="0"/>
           </a:p>
@@ -13578,13 +13610,52 @@
       </p:sp>
       <p:sp>
         <p:nvSpPr>
-          <p:cNvPr id="19" name="Shape 17"/>
-          <p:cNvSpPr/>
-          <p:nvPr/>
-        </p:nvSpPr>
-        <p:spPr>
-          <a:xfrm>
-            <a:off x="4370832" y="2258568"/>
+          <p:cNvPr id="19" name="Text 17"/>
+          <p:cNvSpPr/>
+          <p:nvPr/>
+        </p:nvSpPr>
+        <p:spPr>
+          <a:xfrm>
+            <a:off x="2938272" y="2752344"/>
+            <a:ext cx="1828800" cy="182880"/>
+          </a:xfrm>
+          <a:prstGeom prst="rect">
+            <a:avLst/>
+          </a:prstGeom>
+          <a:noFill/>
+          <a:ln/>
+        </p:spPr>
+        <p:txBody>
+          <a:bodyPr wrap="square" lIns="0" tIns="0" rIns="0" bIns="0" rtlCol="0" anchor="t"/>
+          <a:lstStyle/>
+          <a:p>
+            <a:pPr algn="ctr" indent="0" marL="0">
+              <a:buNone/>
+            </a:pPr>
+            <a:r>
+              <a:rPr lang="en-US" sz="700" i="1" dirty="0">
+                <a:solidFill>
+                  <a:srgbClr val="94A3B8"/>
+                </a:solidFill>
+                <a:latin typeface="Calibri" pitchFamily="34" charset="0"/>
+                <a:ea typeface="Calibri" pitchFamily="34" charset="-122"/>
+                <a:cs typeface="Calibri" pitchFamily="34" charset="-120"/>
+              </a:rPr>
+              <a:t>'reveal' shortens to 'revel' before '-ation'</a:t>
+            </a:r>
+            <a:endParaRPr lang="en-US" sz="700" dirty="0"/>
+          </a:p>
+        </p:txBody>
+      </p:sp>
+      <p:sp>
+        <p:nvSpPr>
+          <p:cNvPr id="20" name="Shape 18"/>
+          <p:cNvSpPr/>
+          <p:nvPr/>
+        </p:nvSpPr>
+        <p:spPr>
+          <a:xfrm>
+            <a:off x="5803392" y="2258568"/>
             <a:ext cx="1828800" cy="292608"/>
           </a:xfrm>
           <a:prstGeom prst="rect">
@@ -13593,11 +13664,11 @@
             </a:avLst>
           </a:prstGeom>
           <a:solidFill>
-            <a:srgbClr val="CCFBF1"/>
+            <a:srgbClr val="FCE7F3"/>
           </a:solidFill>
           <a:ln w="19050">
             <a:solidFill>
-              <a:srgbClr val="0D9488"/>
+              <a:srgbClr val="DB2777"/>
             </a:solidFill>
             <a:prstDash val="solid"/>
           </a:ln>
@@ -13612,13 +13683,13 @@
       </p:sp>
       <p:sp>
         <p:nvSpPr>
-          <p:cNvPr id="20" name="Text 18"/>
-          <p:cNvSpPr/>
-          <p:nvPr/>
-        </p:nvSpPr>
-        <p:spPr>
-          <a:xfrm>
-            <a:off x="4370832" y="2258568"/>
+          <p:cNvPr id="21" name="Text 19"/>
+          <p:cNvSpPr/>
+          <p:nvPr/>
+        </p:nvSpPr>
+        <p:spPr>
+          <a:xfrm>
+            <a:off x="5803392" y="2258568"/>
             <a:ext cx="1828800" cy="292608"/>
           </a:xfrm>
           <a:prstGeom prst="rect">
@@ -13637,13 +13708,13 @@
             <a:r>
               <a:rPr lang="en-US" sz="1300" b="1" dirty="0">
                 <a:solidFill>
-                  <a:srgbClr val="0F766E"/>
+                  <a:srgbClr val="9D174D"/>
                 </a:solidFill>
                 <a:latin typeface="Trebuchet MS" pitchFamily="34" charset="0"/>
                 <a:ea typeface="Trebuchet MS" pitchFamily="34" charset="-122"/>
                 <a:cs typeface="Trebuchet MS" pitchFamily="34" charset="-120"/>
               </a:rPr>
-              <a:t>reveal</a:t>
+              <a:t>ation</a:t>
             </a:r>
             <a:endParaRPr lang="en-US" sz="1300" dirty="0"/>
           </a:p>
@@ -13651,13 +13722,13 @@
       </p:sp>
       <p:sp>
         <p:nvSpPr>
-          <p:cNvPr id="21" name="Text 19"/>
-          <p:cNvSpPr/>
-          <p:nvPr/>
-        </p:nvSpPr>
-        <p:spPr>
-          <a:xfrm>
-            <a:off x="4370832" y="2569464"/>
+          <p:cNvPr id="22" name="Text 20"/>
+          <p:cNvSpPr/>
+          <p:nvPr/>
+        </p:nvSpPr>
+        <p:spPr>
+          <a:xfrm>
+            <a:off x="5803392" y="2569464"/>
             <a:ext cx="1828800" cy="201168"/>
           </a:xfrm>
           <a:prstGeom prst="rect">
@@ -13682,7 +13753,7 @@
                 <a:ea typeface="Calibri" pitchFamily="34" charset="-122"/>
                 <a:cs typeface="Calibri" pitchFamily="34" charset="-120"/>
               </a:rPr>
-              <a:t>uncover or show something hidden</a:t>
+              <a:t>act or result of</a:t>
             </a:r>
             <a:endParaRPr lang="en-US" sz="850" dirty="0"/>
           </a:p>
@@ -13690,126 +13761,119 @@
       </p:sp>
       <p:sp>
         <p:nvSpPr>
-          <p:cNvPr id="22" name="Shape 20"/>
-          <p:cNvSpPr/>
-          <p:nvPr/>
-        </p:nvSpPr>
-        <p:spPr>
-          <a:xfrm>
-            <a:off x="6519672" y="2258568"/>
-            <a:ext cx="1828800" cy="292608"/>
+          <p:cNvPr id="23" name="Text 21"/>
+          <p:cNvSpPr/>
+          <p:nvPr/>
+        </p:nvSpPr>
+        <p:spPr>
+          <a:xfrm>
+            <a:off x="5803392" y="2752344"/>
+            <a:ext cx="1828800" cy="182880"/>
+          </a:xfrm>
+          <a:prstGeom prst="rect">
+            <a:avLst/>
+          </a:prstGeom>
+          <a:noFill/>
+          <a:ln/>
+        </p:spPr>
+        <p:txBody>
+          <a:bodyPr wrap="square" lIns="0" tIns="0" rIns="0" bIns="0" rtlCol="0" anchor="t"/>
+          <a:lstStyle/>
+          <a:p>
+            <a:pPr algn="ctr" indent="0" marL="0">
+              <a:buNone/>
+            </a:pPr>
+            <a:r>
+              <a:rPr lang="en-US" sz="700" i="1" dirty="0">
+                <a:solidFill>
+                  <a:srgbClr val="94A3B8"/>
+                </a:solidFill>
+                <a:latin typeface="Calibri" pitchFamily="34" charset="0"/>
+                <a:ea typeface="Calibri" pitchFamily="34" charset="-122"/>
+                <a:cs typeface="Calibri" pitchFamily="34" charset="-120"/>
+              </a:rPr>
+              <a:t>'e' dropped before vowel suffix</a:t>
+            </a:r>
+            <a:endParaRPr lang="en-US" sz="700" dirty="0"/>
+          </a:p>
+        </p:txBody>
+      </p:sp>
+      <p:sp>
+        <p:nvSpPr>
+          <p:cNvPr id="24" name="Shape 22"/>
+          <p:cNvSpPr/>
+          <p:nvPr/>
+        </p:nvSpPr>
+        <p:spPr>
+          <a:xfrm>
+            <a:off x="365760" y="3273552"/>
+            <a:ext cx="1371600" cy="658368"/>
           </a:xfrm>
           <a:prstGeom prst="rect">
             <a:avLst>
-              <a:gd name="adj" fmla="val 25000"/>
+              <a:gd name="adj" fmla="val 8333"/>
             </a:avLst>
           </a:prstGeom>
           <a:solidFill>
-            <a:srgbClr val="FCE7F3"/>
-          </a:solidFill>
-          <a:ln w="19050">
-            <a:solidFill>
-              <a:srgbClr val="DB2777"/>
-            </a:solidFill>
-            <a:prstDash val="solid"/>
-          </a:ln>
-          <a:effectLst>
-            <a:outerShdw sx="100000" sy="100000" kx="0" ky="0" algn="bl" rotWithShape="0" blurRad="101600" dist="38100" dir="8100000">
-              <a:srgbClr val="000000">
-                <a:alpha val="12000"/>
-              </a:srgbClr>
-            </a:outerShdw>
-          </a:effectLst>
-        </p:spPr>
-      </p:sp>
-      <p:sp>
-        <p:nvSpPr>
-          <p:cNvPr id="23" name="Text 21"/>
-          <p:cNvSpPr/>
-          <p:nvPr/>
-        </p:nvSpPr>
-        <p:spPr>
-          <a:xfrm>
-            <a:off x="6519672" y="2258568"/>
-            <a:ext cx="1828800" cy="292608"/>
-          </a:xfrm>
-          <a:prstGeom prst="rect">
-            <a:avLst/>
-          </a:prstGeom>
-          <a:noFill/>
-          <a:ln/>
-        </p:spPr>
-        <p:txBody>
-          <a:bodyPr wrap="square" lIns="0" tIns="0" rIns="0" bIns="0" rtlCol="0" anchor="ctr"/>
-          <a:lstStyle/>
-          <a:p>
-            <a:pPr algn="ctr" indent="0" marL="0">
-              <a:buNone/>
-            </a:pPr>
-            <a:r>
-              <a:rPr lang="en-US" sz="1300" b="1" dirty="0">
-                <a:solidFill>
-                  <a:srgbClr val="9D174D"/>
+            <a:srgbClr val="E2E8F0"/>
+          </a:solidFill>
+          <a:ln w="12700">
+            <a:solidFill>
+              <a:srgbClr val="E2E8F0"/>
+            </a:solidFill>
+            <a:prstDash val="solid"/>
+          </a:ln>
+        </p:spPr>
+      </p:sp>
+      <p:sp>
+        <p:nvSpPr>
+          <p:cNvPr id="25" name="Text 23"/>
+          <p:cNvSpPr/>
+          <p:nvPr/>
+        </p:nvSpPr>
+        <p:spPr>
+          <a:xfrm>
+            <a:off x="365760" y="3273552"/>
+            <a:ext cx="1371600" cy="658368"/>
+          </a:xfrm>
+          <a:prstGeom prst="rect">
+            <a:avLst/>
+          </a:prstGeom>
+          <a:noFill/>
+          <a:ln/>
+        </p:spPr>
+        <p:txBody>
+          <a:bodyPr wrap="square" lIns="0" tIns="0" rIns="0" bIns="0" rtlCol="0" anchor="ctr"/>
+          <a:lstStyle/>
+          <a:p>
+            <a:pPr algn="ctr" indent="0" marL="0">
+              <a:buNone/>
+            </a:pPr>
+            <a:r>
+              <a:rPr lang="en-US" sz="1100" b="1" dirty="0">
+                <a:solidFill>
+                  <a:srgbClr val="475569"/>
                 </a:solidFill>
                 <a:latin typeface="Trebuchet MS" pitchFamily="34" charset="0"/>
                 <a:ea typeface="Trebuchet MS" pitchFamily="34" charset="-122"/>
                 <a:cs typeface="Trebuchet MS" pitchFamily="34" charset="-120"/>
               </a:rPr>
-              <a:t>ed</a:t>
-            </a:r>
-            <a:endParaRPr lang="en-US" sz="1300" dirty="0"/>
-          </a:p>
-        </p:txBody>
-      </p:sp>
-      <p:sp>
-        <p:nvSpPr>
-          <p:cNvPr id="24" name="Text 22"/>
-          <p:cNvSpPr/>
-          <p:nvPr/>
-        </p:nvSpPr>
-        <p:spPr>
-          <a:xfrm>
-            <a:off x="6519672" y="2569464"/>
-            <a:ext cx="1828800" cy="201168"/>
-          </a:xfrm>
-          <a:prstGeom prst="rect">
-            <a:avLst/>
-          </a:prstGeom>
-          <a:noFill/>
-          <a:ln/>
-        </p:spPr>
-        <p:txBody>
-          <a:bodyPr wrap="square" lIns="0" tIns="0" rIns="0" bIns="0" rtlCol="0" anchor="t"/>
-          <a:lstStyle/>
-          <a:p>
-            <a:pPr algn="ctr" indent="0" marL="0">
-              <a:buNone/>
-            </a:pPr>
-            <a:r>
-              <a:rPr lang="en-US" sz="850" dirty="0">
-                <a:solidFill>
-                  <a:srgbClr val="475569"/>
-                </a:solidFill>
-                <a:latin typeface="Calibri" pitchFamily="34" charset="0"/>
-                <a:ea typeface="Calibri" pitchFamily="34" charset="-122"/>
-                <a:cs typeface="Calibri" pitchFamily="34" charset="-120"/>
-              </a:rPr>
-              <a:t>past tense or completed action</a:t>
-            </a:r>
-            <a:endParaRPr lang="en-US" sz="850" dirty="0"/>
-          </a:p>
-        </p:txBody>
-      </p:sp>
-      <p:sp>
-        <p:nvSpPr>
-          <p:cNvPr id="25" name="Shape 23"/>
-          <p:cNvSpPr/>
-          <p:nvPr/>
-        </p:nvSpPr>
-        <p:spPr>
-          <a:xfrm>
-            <a:off x="365760" y="3273552"/>
-            <a:ext cx="1371600" cy="658368"/>
+              <a:t>Syllables</a:t>
+            </a:r>
+            <a:endParaRPr lang="en-US" sz="1100" dirty="0"/>
+          </a:p>
+        </p:txBody>
+      </p:sp>
+      <p:sp>
+        <p:nvSpPr>
+          <p:cNvPr id="26" name="Shape 24"/>
+          <p:cNvSpPr/>
+          <p:nvPr/>
+        </p:nvSpPr>
+        <p:spPr>
+          <a:xfrm>
+            <a:off x="1874520" y="3273552"/>
+            <a:ext cx="6903720" cy="658368"/>
           </a:xfrm>
           <a:prstGeom prst="rect">
             <a:avLst>
@@ -13817,92 +13881,131 @@
             </a:avLst>
           </a:prstGeom>
           <a:solidFill>
-            <a:srgbClr val="E2E8F0"/>
-          </a:solidFill>
-          <a:ln w="12700">
-            <a:solidFill>
-              <a:srgbClr val="E2E8F0"/>
-            </a:solidFill>
-            <a:prstDash val="solid"/>
-          </a:ln>
-        </p:spPr>
-      </p:sp>
-      <p:sp>
-        <p:nvSpPr>
-          <p:cNvPr id="26" name="Text 24"/>
-          <p:cNvSpPr/>
-          <p:nvPr/>
-        </p:nvSpPr>
-        <p:spPr>
-          <a:xfrm>
-            <a:off x="365760" y="3273552"/>
-            <a:ext cx="1371600" cy="658368"/>
-          </a:xfrm>
-          <a:prstGeom prst="rect">
-            <a:avLst/>
-          </a:prstGeom>
-          <a:noFill/>
-          <a:ln/>
-        </p:spPr>
-        <p:txBody>
-          <a:bodyPr wrap="square" lIns="0" tIns="0" rIns="0" bIns="0" rtlCol="0" anchor="ctr"/>
-          <a:lstStyle/>
-          <a:p>
-            <a:pPr algn="ctr" indent="0" marL="0">
-              <a:buNone/>
-            </a:pPr>
-            <a:r>
-              <a:rPr lang="en-US" sz="1100" b="1" dirty="0">
-                <a:solidFill>
-                  <a:srgbClr val="475569"/>
+            <a:srgbClr val="CCFBF1"/>
+          </a:solidFill>
+          <a:ln w="12700">
+            <a:solidFill>
+              <a:srgbClr val="0D9488"/>
+            </a:solidFill>
+            <a:prstDash val="solid"/>
+          </a:ln>
+        </p:spPr>
+      </p:sp>
+      <p:sp>
+        <p:nvSpPr>
+          <p:cNvPr id="27" name="Shape 25"/>
+          <p:cNvSpPr/>
+          <p:nvPr/>
+        </p:nvSpPr>
+        <p:spPr>
+          <a:xfrm>
+            <a:off x="1975104" y="3364992"/>
+            <a:ext cx="1554480" cy="475488"/>
+          </a:xfrm>
+          <a:prstGeom prst="rect">
+            <a:avLst>
+              <a:gd name="adj" fmla="val 9615"/>
+            </a:avLst>
+          </a:prstGeom>
+          <a:solidFill>
+            <a:srgbClr val="FFFFFF"/>
+          </a:solidFill>
+          <a:ln w="12700">
+            <a:solidFill>
+              <a:srgbClr val="0D9488"/>
+            </a:solidFill>
+            <a:prstDash val="solid"/>
+          </a:ln>
+        </p:spPr>
+      </p:sp>
+      <p:sp>
+        <p:nvSpPr>
+          <p:cNvPr id="28" name="Text 26"/>
+          <p:cNvSpPr/>
+          <p:nvPr/>
+        </p:nvSpPr>
+        <p:spPr>
+          <a:xfrm>
+            <a:off x="1975104" y="3364992"/>
+            <a:ext cx="1554480" cy="475488"/>
+          </a:xfrm>
+          <a:prstGeom prst="rect">
+            <a:avLst/>
+          </a:prstGeom>
+          <a:noFill/>
+          <a:ln/>
+        </p:spPr>
+        <p:txBody>
+          <a:bodyPr wrap="square" lIns="0" tIns="0" rIns="0" bIns="0" rtlCol="0" anchor="ctr"/>
+          <a:lstStyle/>
+          <a:p>
+            <a:pPr algn="ctr" indent="0" marL="0">
+              <a:buNone/>
+            </a:pPr>
+            <a:r>
+              <a:rPr lang="en-US" sz="1400" b="1" dirty="0">
+                <a:solidFill>
+                  <a:srgbClr val="0D9488"/>
                 </a:solidFill>
                 <a:latin typeface="Trebuchet MS" pitchFamily="34" charset="0"/>
                 <a:ea typeface="Trebuchet MS" pitchFamily="34" charset="-122"/>
                 <a:cs typeface="Trebuchet MS" pitchFamily="34" charset="-120"/>
               </a:rPr>
-              <a:t>Syllables</a:t>
-            </a:r>
-            <a:endParaRPr lang="en-US" sz="1100" dirty="0"/>
-          </a:p>
-        </p:txBody>
-      </p:sp>
-      <p:sp>
-        <p:nvSpPr>
-          <p:cNvPr id="27" name="Shape 25"/>
-          <p:cNvSpPr/>
-          <p:nvPr/>
-        </p:nvSpPr>
-        <p:spPr>
-          <a:xfrm>
-            <a:off x="1874520" y="3273552"/>
-            <a:ext cx="6903720" cy="658368"/>
-          </a:xfrm>
-          <a:prstGeom prst="rect">
-            <a:avLst>
-              <a:gd name="adj" fmla="val 8333"/>
-            </a:avLst>
-          </a:prstGeom>
-          <a:solidFill>
-            <a:srgbClr val="CCFBF1"/>
-          </a:solidFill>
-          <a:ln w="12700">
-            <a:solidFill>
-              <a:srgbClr val="0D9488"/>
-            </a:solidFill>
-            <a:prstDash val="solid"/>
-          </a:ln>
-        </p:spPr>
-      </p:sp>
-      <p:sp>
-        <p:nvSpPr>
-          <p:cNvPr id="28" name="Shape 26"/>
-          <p:cNvSpPr/>
-          <p:nvPr/>
-        </p:nvSpPr>
-        <p:spPr>
-          <a:xfrm>
-            <a:off x="2313432" y="3364992"/>
-            <a:ext cx="1645920" cy="475488"/>
+              <a:t>rev</a:t>
+            </a:r>
+            <a:endParaRPr lang="en-US" sz="1400" dirty="0"/>
+          </a:p>
+        </p:txBody>
+      </p:sp>
+      <p:sp>
+        <p:nvSpPr>
+          <p:cNvPr id="29" name="Text 27"/>
+          <p:cNvSpPr/>
+          <p:nvPr/>
+        </p:nvSpPr>
+        <p:spPr>
+          <a:xfrm>
+            <a:off x="3529584" y="3364992"/>
+            <a:ext cx="73152" cy="475488"/>
+          </a:xfrm>
+          <a:prstGeom prst="rect">
+            <a:avLst/>
+          </a:prstGeom>
+          <a:noFill/>
+          <a:ln/>
+        </p:spPr>
+        <p:txBody>
+          <a:bodyPr wrap="square" lIns="0" tIns="0" rIns="0" bIns="0" rtlCol="0" anchor="ctr"/>
+          <a:lstStyle/>
+          <a:p>
+            <a:pPr algn="ctr" indent="0" marL="0">
+              <a:buNone/>
+            </a:pPr>
+            <a:r>
+              <a:rPr lang="en-US" sz="1600" b="1" dirty="0">
+                <a:solidFill>
+                  <a:srgbClr val="0D9488"/>
+                </a:solidFill>
+                <a:latin typeface="Trebuchet MS" pitchFamily="34" charset="0"/>
+                <a:ea typeface="Trebuchet MS" pitchFamily="34" charset="-122"/>
+                <a:cs typeface="Trebuchet MS" pitchFamily="34" charset="-120"/>
+              </a:rPr>
+              <a:t>·</a:t>
+            </a:r>
+            <a:endParaRPr lang="en-US" sz="1600" dirty="0"/>
+          </a:p>
+        </p:txBody>
+      </p:sp>
+      <p:sp>
+        <p:nvSpPr>
+          <p:cNvPr id="30" name="Shape 28"/>
+          <p:cNvSpPr/>
+          <p:nvPr/>
+        </p:nvSpPr>
+        <p:spPr>
+          <a:xfrm>
+            <a:off x="3602736" y="3364992"/>
+            <a:ext cx="1554480" cy="475488"/>
           </a:xfrm>
           <a:prstGeom prst="rect">
             <a:avLst>
@@ -13922,14 +14025,14 @@
       </p:sp>
       <p:sp>
         <p:nvSpPr>
-          <p:cNvPr id="29" name="Text 27"/>
-          <p:cNvSpPr/>
-          <p:nvPr/>
-        </p:nvSpPr>
-        <p:spPr>
-          <a:xfrm>
-            <a:off x="2313432" y="3364992"/>
-            <a:ext cx="1645920" cy="475488"/>
+          <p:cNvPr id="31" name="Text 29"/>
+          <p:cNvSpPr/>
+          <p:nvPr/>
+        </p:nvSpPr>
+        <p:spPr>
+          <a:xfrm>
+            <a:off x="3602736" y="3364992"/>
+            <a:ext cx="1554480" cy="475488"/>
           </a:xfrm>
           <a:prstGeom prst="rect">
             <a:avLst/>
@@ -13953,7 +14056,7 @@
                 <a:ea typeface="Trebuchet MS" pitchFamily="34" charset="-122"/>
                 <a:cs typeface="Trebuchet MS" pitchFamily="34" charset="-120"/>
               </a:rPr>
-              <a:t>un</a:t>
+              <a:t>e</a:t>
             </a:r>
             <a:endParaRPr lang="en-US" sz="1400" dirty="0"/>
           </a:p>
@@ -13961,14 +14064,14 @@
       </p:sp>
       <p:sp>
         <p:nvSpPr>
-          <p:cNvPr id="30" name="Text 28"/>
-          <p:cNvSpPr/>
-          <p:nvPr/>
-        </p:nvSpPr>
-        <p:spPr>
-          <a:xfrm>
-            <a:off x="3959352" y="3364992"/>
-            <a:ext cx="411480" cy="475488"/>
+          <p:cNvPr id="32" name="Text 30"/>
+          <p:cNvSpPr/>
+          <p:nvPr/>
+        </p:nvSpPr>
+        <p:spPr>
+          <a:xfrm>
+            <a:off x="5157216" y="3364992"/>
+            <a:ext cx="73152" cy="475488"/>
           </a:xfrm>
           <a:prstGeom prst="rect">
             <a:avLst/>
@@ -14000,14 +14103,14 @@
       </p:sp>
       <p:sp>
         <p:nvSpPr>
-          <p:cNvPr id="31" name="Shape 29"/>
-          <p:cNvSpPr/>
-          <p:nvPr/>
-        </p:nvSpPr>
-        <p:spPr>
-          <a:xfrm>
-            <a:off x="4370832" y="3364992"/>
-            <a:ext cx="1645920" cy="475488"/>
+          <p:cNvPr id="33" name="Shape 31"/>
+          <p:cNvSpPr/>
+          <p:nvPr/>
+        </p:nvSpPr>
+        <p:spPr>
+          <a:xfrm>
+            <a:off x="5230368" y="3364992"/>
+            <a:ext cx="1554480" cy="475488"/>
           </a:xfrm>
           <a:prstGeom prst="rect">
             <a:avLst>
@@ -14027,14 +14130,14 @@
       </p:sp>
       <p:sp>
         <p:nvSpPr>
-          <p:cNvPr id="32" name="Text 30"/>
-          <p:cNvSpPr/>
-          <p:nvPr/>
-        </p:nvSpPr>
-        <p:spPr>
-          <a:xfrm>
-            <a:off x="4370832" y="3364992"/>
-            <a:ext cx="1645920" cy="475488"/>
+          <p:cNvPr id="34" name="Text 32"/>
+          <p:cNvSpPr/>
+          <p:nvPr/>
+        </p:nvSpPr>
+        <p:spPr>
+          <a:xfrm>
+            <a:off x="5230368" y="3364992"/>
+            <a:ext cx="1554480" cy="475488"/>
           </a:xfrm>
           <a:prstGeom prst="rect">
             <a:avLst/>
@@ -14058,7 +14161,7 @@
                 <a:ea typeface="Trebuchet MS" pitchFamily="34" charset="-122"/>
                 <a:cs typeface="Trebuchet MS" pitchFamily="34" charset="-120"/>
               </a:rPr>
-              <a:t>re</a:t>
+              <a:t>la</a:t>
             </a:r>
             <a:endParaRPr lang="en-US" sz="1400" dirty="0"/>
           </a:p>
@@ -14066,14 +14169,14 @@
       </p:sp>
       <p:sp>
         <p:nvSpPr>
-          <p:cNvPr id="33" name="Text 31"/>
-          <p:cNvSpPr/>
-          <p:nvPr/>
-        </p:nvSpPr>
-        <p:spPr>
-          <a:xfrm>
-            <a:off x="6016752" y="3364992"/>
-            <a:ext cx="411480" cy="475488"/>
+          <p:cNvPr id="35" name="Text 33"/>
+          <p:cNvSpPr/>
+          <p:nvPr/>
+        </p:nvSpPr>
+        <p:spPr>
+          <a:xfrm>
+            <a:off x="6784848" y="3364992"/>
+            <a:ext cx="73152" cy="475488"/>
           </a:xfrm>
           <a:prstGeom prst="rect">
             <a:avLst/>
@@ -14105,14 +14208,14 @@
       </p:sp>
       <p:sp>
         <p:nvSpPr>
-          <p:cNvPr id="34" name="Shape 32"/>
-          <p:cNvSpPr/>
-          <p:nvPr/>
-        </p:nvSpPr>
-        <p:spPr>
-          <a:xfrm>
-            <a:off x="6428232" y="3364992"/>
-            <a:ext cx="1645920" cy="475488"/>
+          <p:cNvPr id="36" name="Shape 34"/>
+          <p:cNvSpPr/>
+          <p:nvPr/>
+        </p:nvSpPr>
+        <p:spPr>
+          <a:xfrm>
+            <a:off x="6858000" y="3364992"/>
+            <a:ext cx="1554480" cy="475488"/>
           </a:xfrm>
           <a:prstGeom prst="rect">
             <a:avLst>
@@ -14132,14 +14235,14 @@
       </p:sp>
       <p:sp>
         <p:nvSpPr>
-          <p:cNvPr id="35" name="Text 33"/>
-          <p:cNvSpPr/>
-          <p:nvPr/>
-        </p:nvSpPr>
-        <p:spPr>
-          <a:xfrm>
-            <a:off x="6428232" y="3364992"/>
-            <a:ext cx="1645920" cy="475488"/>
+          <p:cNvPr id="37" name="Text 35"/>
+          <p:cNvSpPr/>
+          <p:nvPr/>
+        </p:nvSpPr>
+        <p:spPr>
+          <a:xfrm>
+            <a:off x="6858000" y="3364992"/>
+            <a:ext cx="1554480" cy="475488"/>
           </a:xfrm>
           <a:prstGeom prst="rect">
             <a:avLst/>
@@ -14163,7 +14266,7 @@
                 <a:ea typeface="Trebuchet MS" pitchFamily="34" charset="-122"/>
                 <a:cs typeface="Trebuchet MS" pitchFamily="34" charset="-120"/>
               </a:rPr>
-              <a:t>vealed</a:t>
+              <a:t>tion</a:t>
             </a:r>
             <a:endParaRPr lang="en-US" sz="1400" dirty="0"/>
           </a:p>
@@ -14171,7 +14274,7 @@
       </p:sp>
       <p:sp>
         <p:nvSpPr>
-          <p:cNvPr id="36" name="Shape 34"/>
+          <p:cNvPr id="38" name="Shape 36"/>
           <p:cNvSpPr/>
           <p:nvPr/>
         </p:nvSpPr>
@@ -14198,7 +14301,7 @@
       </p:sp>
       <p:sp>
         <p:nvSpPr>
-          <p:cNvPr id="37" name="Text 35"/>
+          <p:cNvPr id="39" name="Text 37"/>
           <p:cNvSpPr/>
           <p:nvPr/>
         </p:nvSpPr>
@@ -14237,7 +14340,7 @@
       </p:sp>
       <p:sp>
         <p:nvSpPr>
-          <p:cNvPr id="38" name="Shape 36"/>
+          <p:cNvPr id="40" name="Shape 38"/>
           <p:cNvSpPr/>
           <p:nvPr/>
         </p:nvSpPr>
@@ -14264,7 +14367,7 @@
       </p:sp>
       <p:sp>
         <p:nvSpPr>
-          <p:cNvPr id="39" name="Text 37"/>
+          <p:cNvPr id="41" name="Text 39"/>
           <p:cNvSpPr/>
           <p:nvPr/>
         </p:nvSpPr>
@@ -14496,7 +14599,7 @@
                 <a:ea typeface="Calibri" pitchFamily="34" charset="-122"/>
                 <a:cs typeface="Calibri" pitchFamily="34" charset="-120"/>
               </a:rPr>
-              <a:t>Root 'reveal' — uncover or show something hidden</a:t>
+              <a:t>Root 'reveal' — to uncover or show hidden</a:t>
             </a:r>
             <a:endParaRPr lang="en-US" sz="1600" dirty="0"/>
           </a:p>
@@ -14852,7 +14955,7 @@
                 <a:ea typeface="Calibri" pitchFamily="34" charset="-122"/>
                 <a:cs typeface="Calibri" pitchFamily="34" charset="-120"/>
               </a:rPr>
-              <a:t>Word Labs  •  wordlabs.app  •  Root: 'reveal' = uncover or show something hidden</a:t>
+              <a:t>Word Labs  •  wordlabs.app  •  Root: 'reveal' = to uncover or show hidden</a:t>
             </a:r>
             <a:endParaRPr lang="en-US" sz="800" dirty="0"/>
           </a:p>
@@ -14991,7 +15094,7 @@
                 <a:ea typeface="Trebuchet MS" pitchFamily="34" charset="-122"/>
                 <a:cs typeface="Trebuchet MS" pitchFamily="34" charset="-120"/>
               </a:rPr>
-              <a:t>unrevealed</a:t>
+              <a:t>revelation</a:t>
             </a:r>
             <a:endParaRPr lang="en-US" sz="2800" dirty="0"/>
           </a:p>
@@ -15071,7 +15174,7 @@
         </p:nvSpPr>
         <p:spPr>
           <a:xfrm>
-            <a:off x="2221992" y="2258568"/>
+            <a:off x="2938272" y="2258568"/>
             <a:ext cx="1828800" cy="292608"/>
           </a:xfrm>
           <a:prstGeom prst="rect">
@@ -15080,11 +15183,11 @@
             </a:avLst>
           </a:prstGeom>
           <a:solidFill>
-            <a:srgbClr val="DDD6FE"/>
+            <a:srgbClr val="CCFBF1"/>
           </a:solidFill>
           <a:ln w="19050">
             <a:solidFill>
-              <a:srgbClr val="7C3AED"/>
+              <a:srgbClr val="0D9488"/>
             </a:solidFill>
             <a:prstDash val="solid"/>
           </a:ln>
@@ -15105,7 +15208,7 @@
         </p:nvSpPr>
         <p:spPr>
           <a:xfrm>
-            <a:off x="2221992" y="2258568"/>
+            <a:off x="2938272" y="2258568"/>
             <a:ext cx="1828800" cy="292608"/>
           </a:xfrm>
           <a:prstGeom prst="rect">
@@ -15124,13 +15227,13 @@
             <a:r>
               <a:rPr lang="en-US" sz="1300" b="1" dirty="0">
                 <a:solidFill>
-                  <a:srgbClr val="4C1D95"/>
+                  <a:srgbClr val="0F766E"/>
                 </a:solidFill>
                 <a:latin typeface="Trebuchet MS" pitchFamily="34" charset="0"/>
                 <a:ea typeface="Trebuchet MS" pitchFamily="34" charset="-122"/>
                 <a:cs typeface="Trebuchet MS" pitchFamily="34" charset="-120"/>
               </a:rPr>
-              <a:t>un</a:t>
+              <a:t>reveal</a:t>
             </a:r>
             <a:endParaRPr lang="en-US" sz="1300" dirty="0"/>
           </a:p>
@@ -15144,7 +15247,7 @@
         </p:nvSpPr>
         <p:spPr>
           <a:xfrm>
-            <a:off x="2221992" y="2569464"/>
+            <a:off x="2938272" y="2569464"/>
             <a:ext cx="1828800" cy="201168"/>
           </a:xfrm>
           <a:prstGeom prst="rect">
@@ -15169,7 +15272,7 @@
                 <a:ea typeface="Calibri" pitchFamily="34" charset="-122"/>
                 <a:cs typeface="Calibri" pitchFamily="34" charset="-120"/>
               </a:rPr>
-              <a:t>not</a:t>
+              <a:t>to uncover or show hidden</a:t>
             </a:r>
             <a:endParaRPr lang="en-US" sz="850" dirty="0"/>
           </a:p>
@@ -15177,13 +15280,52 @@
       </p:sp>
       <p:sp>
         <p:nvSpPr>
-          <p:cNvPr id="19" name="Shape 17"/>
-          <p:cNvSpPr/>
-          <p:nvPr/>
-        </p:nvSpPr>
-        <p:spPr>
-          <a:xfrm>
-            <a:off x="4370832" y="2258568"/>
+          <p:cNvPr id="19" name="Text 17"/>
+          <p:cNvSpPr/>
+          <p:nvPr/>
+        </p:nvSpPr>
+        <p:spPr>
+          <a:xfrm>
+            <a:off x="2938272" y="2752344"/>
+            <a:ext cx="1828800" cy="182880"/>
+          </a:xfrm>
+          <a:prstGeom prst="rect">
+            <a:avLst/>
+          </a:prstGeom>
+          <a:noFill/>
+          <a:ln/>
+        </p:spPr>
+        <p:txBody>
+          <a:bodyPr wrap="square" lIns="0" tIns="0" rIns="0" bIns="0" rtlCol="0" anchor="t"/>
+          <a:lstStyle/>
+          <a:p>
+            <a:pPr algn="ctr" indent="0" marL="0">
+              <a:buNone/>
+            </a:pPr>
+            <a:r>
+              <a:rPr lang="en-US" sz="700" i="1" dirty="0">
+                <a:solidFill>
+                  <a:srgbClr val="94A3B8"/>
+                </a:solidFill>
+                <a:latin typeface="Calibri" pitchFamily="34" charset="0"/>
+                <a:ea typeface="Calibri" pitchFamily="34" charset="-122"/>
+                <a:cs typeface="Calibri" pitchFamily="34" charset="-120"/>
+              </a:rPr>
+              <a:t>'reveal' shortens to 'revel' before '-ation'</a:t>
+            </a:r>
+            <a:endParaRPr lang="en-US" sz="700" dirty="0"/>
+          </a:p>
+        </p:txBody>
+      </p:sp>
+      <p:sp>
+        <p:nvSpPr>
+          <p:cNvPr id="20" name="Shape 18"/>
+          <p:cNvSpPr/>
+          <p:nvPr/>
+        </p:nvSpPr>
+        <p:spPr>
+          <a:xfrm>
+            <a:off x="5803392" y="2258568"/>
             <a:ext cx="1828800" cy="292608"/>
           </a:xfrm>
           <a:prstGeom prst="rect">
@@ -15192,11 +15334,11 @@
             </a:avLst>
           </a:prstGeom>
           <a:solidFill>
-            <a:srgbClr val="CCFBF1"/>
+            <a:srgbClr val="FCE7F3"/>
           </a:solidFill>
           <a:ln w="19050">
             <a:solidFill>
-              <a:srgbClr val="0D9488"/>
+              <a:srgbClr val="DB2777"/>
             </a:solidFill>
             <a:prstDash val="solid"/>
           </a:ln>
@@ -15211,13 +15353,13 @@
       </p:sp>
       <p:sp>
         <p:nvSpPr>
-          <p:cNvPr id="20" name="Text 18"/>
-          <p:cNvSpPr/>
-          <p:nvPr/>
-        </p:nvSpPr>
-        <p:spPr>
-          <a:xfrm>
-            <a:off x="4370832" y="2258568"/>
+          <p:cNvPr id="21" name="Text 19"/>
+          <p:cNvSpPr/>
+          <p:nvPr/>
+        </p:nvSpPr>
+        <p:spPr>
+          <a:xfrm>
+            <a:off x="5803392" y="2258568"/>
             <a:ext cx="1828800" cy="292608"/>
           </a:xfrm>
           <a:prstGeom prst="rect">
@@ -15236,13 +15378,13 @@
             <a:r>
               <a:rPr lang="en-US" sz="1300" b="1" dirty="0">
                 <a:solidFill>
-                  <a:srgbClr val="0F766E"/>
+                  <a:srgbClr val="9D174D"/>
                 </a:solidFill>
                 <a:latin typeface="Trebuchet MS" pitchFamily="34" charset="0"/>
                 <a:ea typeface="Trebuchet MS" pitchFamily="34" charset="-122"/>
                 <a:cs typeface="Trebuchet MS" pitchFamily="34" charset="-120"/>
               </a:rPr>
-              <a:t>reveal</a:t>
+              <a:t>ation</a:t>
             </a:r>
             <a:endParaRPr lang="en-US" sz="1300" dirty="0"/>
           </a:p>
@@ -15250,13 +15392,13 @@
       </p:sp>
       <p:sp>
         <p:nvSpPr>
-          <p:cNvPr id="21" name="Text 19"/>
-          <p:cNvSpPr/>
-          <p:nvPr/>
-        </p:nvSpPr>
-        <p:spPr>
-          <a:xfrm>
-            <a:off x="4370832" y="2569464"/>
+          <p:cNvPr id="22" name="Text 20"/>
+          <p:cNvSpPr/>
+          <p:nvPr/>
+        </p:nvSpPr>
+        <p:spPr>
+          <a:xfrm>
+            <a:off x="5803392" y="2569464"/>
             <a:ext cx="1828800" cy="201168"/>
           </a:xfrm>
           <a:prstGeom prst="rect">
@@ -15281,7 +15423,7 @@
                 <a:ea typeface="Calibri" pitchFamily="34" charset="-122"/>
                 <a:cs typeface="Calibri" pitchFamily="34" charset="-120"/>
               </a:rPr>
-              <a:t>uncover or show something hidden</a:t>
+              <a:t>act or result of</a:t>
             </a:r>
             <a:endParaRPr lang="en-US" sz="850" dirty="0"/>
           </a:p>
@@ -15289,87 +15431,1082 @@
       </p:sp>
       <p:sp>
         <p:nvSpPr>
-          <p:cNvPr id="22" name="Shape 20"/>
-          <p:cNvSpPr/>
-          <p:nvPr/>
-        </p:nvSpPr>
-        <p:spPr>
-          <a:xfrm>
-            <a:off x="6519672" y="2258568"/>
-            <a:ext cx="1828800" cy="292608"/>
+          <p:cNvPr id="23" name="Text 21"/>
+          <p:cNvSpPr/>
+          <p:nvPr/>
+        </p:nvSpPr>
+        <p:spPr>
+          <a:xfrm>
+            <a:off x="5803392" y="2752344"/>
+            <a:ext cx="1828800" cy="182880"/>
+          </a:xfrm>
+          <a:prstGeom prst="rect">
+            <a:avLst/>
+          </a:prstGeom>
+          <a:noFill/>
+          <a:ln/>
+        </p:spPr>
+        <p:txBody>
+          <a:bodyPr wrap="square" lIns="0" tIns="0" rIns="0" bIns="0" rtlCol="0" anchor="t"/>
+          <a:lstStyle/>
+          <a:p>
+            <a:pPr algn="ctr" indent="0" marL="0">
+              <a:buNone/>
+            </a:pPr>
+            <a:r>
+              <a:rPr lang="en-US" sz="700" i="1" dirty="0">
+                <a:solidFill>
+                  <a:srgbClr val="94A3B8"/>
+                </a:solidFill>
+                <a:latin typeface="Calibri" pitchFamily="34" charset="0"/>
+                <a:ea typeface="Calibri" pitchFamily="34" charset="-122"/>
+                <a:cs typeface="Calibri" pitchFamily="34" charset="-120"/>
+              </a:rPr>
+              <a:t>'e' dropped before vowel suffix</a:t>
+            </a:r>
+            <a:endParaRPr lang="en-US" sz="700" dirty="0"/>
+          </a:p>
+        </p:txBody>
+      </p:sp>
+      <p:sp>
+        <p:nvSpPr>
+          <p:cNvPr id="24" name="Shape 22"/>
+          <p:cNvSpPr/>
+          <p:nvPr/>
+        </p:nvSpPr>
+        <p:spPr>
+          <a:xfrm>
+            <a:off x="365760" y="3273552"/>
+            <a:ext cx="1371600" cy="658368"/>
           </a:xfrm>
           <a:prstGeom prst="rect">
             <a:avLst>
-              <a:gd name="adj" fmla="val 25000"/>
+              <a:gd name="adj" fmla="val 8333"/>
             </a:avLst>
           </a:prstGeom>
           <a:solidFill>
-            <a:srgbClr val="FCE7F3"/>
-          </a:solidFill>
-          <a:ln w="19050">
-            <a:solidFill>
-              <a:srgbClr val="DB2777"/>
-            </a:solidFill>
-            <a:prstDash val="solid"/>
-          </a:ln>
-          <a:effectLst>
-            <a:outerShdw sx="100000" sy="100000" kx="0" ky="0" algn="bl" rotWithShape="0" blurRad="101600" dist="38100" dir="8100000">
-              <a:srgbClr val="000000">
-                <a:alpha val="12000"/>
-              </a:srgbClr>
-            </a:outerShdw>
-          </a:effectLst>
-        </p:spPr>
-      </p:sp>
-      <p:sp>
-        <p:nvSpPr>
-          <p:cNvPr id="23" name="Text 21"/>
-          <p:cNvSpPr/>
-          <p:nvPr/>
-        </p:nvSpPr>
-        <p:spPr>
-          <a:xfrm>
-            <a:off x="6519672" y="2258568"/>
-            <a:ext cx="1828800" cy="292608"/>
-          </a:xfrm>
-          <a:prstGeom prst="rect">
-            <a:avLst/>
-          </a:prstGeom>
-          <a:noFill/>
-          <a:ln/>
-        </p:spPr>
-        <p:txBody>
-          <a:bodyPr wrap="square" lIns="0" tIns="0" rIns="0" bIns="0" rtlCol="0" anchor="ctr"/>
-          <a:lstStyle/>
-          <a:p>
-            <a:pPr algn="ctr" indent="0" marL="0">
-              <a:buNone/>
-            </a:pPr>
-            <a:r>
-              <a:rPr lang="en-US" sz="1300" b="1" dirty="0">
-                <a:solidFill>
-                  <a:srgbClr val="9D174D"/>
+            <a:srgbClr val="E2E8F0"/>
+          </a:solidFill>
+          <a:ln w="12700">
+            <a:solidFill>
+              <a:srgbClr val="E2E8F0"/>
+            </a:solidFill>
+            <a:prstDash val="solid"/>
+          </a:ln>
+        </p:spPr>
+      </p:sp>
+      <p:sp>
+        <p:nvSpPr>
+          <p:cNvPr id="25" name="Text 23"/>
+          <p:cNvSpPr/>
+          <p:nvPr/>
+        </p:nvSpPr>
+        <p:spPr>
+          <a:xfrm>
+            <a:off x="365760" y="3273552"/>
+            <a:ext cx="1371600" cy="658368"/>
+          </a:xfrm>
+          <a:prstGeom prst="rect">
+            <a:avLst/>
+          </a:prstGeom>
+          <a:noFill/>
+          <a:ln/>
+        </p:spPr>
+        <p:txBody>
+          <a:bodyPr wrap="square" lIns="0" tIns="0" rIns="0" bIns="0" rtlCol="0" anchor="ctr"/>
+          <a:lstStyle/>
+          <a:p>
+            <a:pPr algn="ctr" indent="0" marL="0">
+              <a:buNone/>
+            </a:pPr>
+            <a:r>
+              <a:rPr lang="en-US" sz="1100" b="1" dirty="0">
+                <a:solidFill>
+                  <a:srgbClr val="475569"/>
                 </a:solidFill>
                 <a:latin typeface="Trebuchet MS" pitchFamily="34" charset="0"/>
                 <a:ea typeface="Trebuchet MS" pitchFamily="34" charset="-122"/>
                 <a:cs typeface="Trebuchet MS" pitchFamily="34" charset="-120"/>
               </a:rPr>
-              <a:t>ed</a:t>
-            </a:r>
-            <a:endParaRPr lang="en-US" sz="1300" dirty="0"/>
-          </a:p>
-        </p:txBody>
-      </p:sp>
-      <p:sp>
-        <p:nvSpPr>
-          <p:cNvPr id="24" name="Text 22"/>
-          <p:cNvSpPr/>
-          <p:nvPr/>
-        </p:nvSpPr>
-        <p:spPr>
-          <a:xfrm>
-            <a:off x="6519672" y="2569464"/>
-            <a:ext cx="1828800" cy="201168"/>
+              <a:t>Syllables</a:t>
+            </a:r>
+            <a:endParaRPr lang="en-US" sz="1100" dirty="0"/>
+          </a:p>
+        </p:txBody>
+      </p:sp>
+      <p:sp>
+        <p:nvSpPr>
+          <p:cNvPr id="26" name="Shape 24"/>
+          <p:cNvSpPr/>
+          <p:nvPr/>
+        </p:nvSpPr>
+        <p:spPr>
+          <a:xfrm>
+            <a:off x="1874520" y="3273552"/>
+            <a:ext cx="6903720" cy="658368"/>
+          </a:xfrm>
+          <a:prstGeom prst="rect">
+            <a:avLst>
+              <a:gd name="adj" fmla="val 8333"/>
+            </a:avLst>
+          </a:prstGeom>
+          <a:solidFill>
+            <a:srgbClr val="CCFBF1"/>
+          </a:solidFill>
+          <a:ln w="12700">
+            <a:solidFill>
+              <a:srgbClr val="0D9488"/>
+            </a:solidFill>
+            <a:prstDash val="solid"/>
+          </a:ln>
+        </p:spPr>
+      </p:sp>
+      <p:sp>
+        <p:nvSpPr>
+          <p:cNvPr id="27" name="Shape 25"/>
+          <p:cNvSpPr/>
+          <p:nvPr/>
+        </p:nvSpPr>
+        <p:spPr>
+          <a:xfrm>
+            <a:off x="1975104" y="3364992"/>
+            <a:ext cx="1554480" cy="475488"/>
+          </a:xfrm>
+          <a:prstGeom prst="rect">
+            <a:avLst>
+              <a:gd name="adj" fmla="val 9615"/>
+            </a:avLst>
+          </a:prstGeom>
+          <a:solidFill>
+            <a:srgbClr val="FFFFFF"/>
+          </a:solidFill>
+          <a:ln w="12700">
+            <a:solidFill>
+              <a:srgbClr val="0D9488"/>
+            </a:solidFill>
+            <a:prstDash val="solid"/>
+          </a:ln>
+        </p:spPr>
+      </p:sp>
+      <p:sp>
+        <p:nvSpPr>
+          <p:cNvPr id="28" name="Text 26"/>
+          <p:cNvSpPr/>
+          <p:nvPr/>
+        </p:nvSpPr>
+        <p:spPr>
+          <a:xfrm>
+            <a:off x="1975104" y="3364992"/>
+            <a:ext cx="1554480" cy="475488"/>
+          </a:xfrm>
+          <a:prstGeom prst="rect">
+            <a:avLst/>
+          </a:prstGeom>
+          <a:noFill/>
+          <a:ln/>
+        </p:spPr>
+        <p:txBody>
+          <a:bodyPr wrap="square" lIns="0" tIns="0" rIns="0" bIns="0" rtlCol="0" anchor="ctr"/>
+          <a:lstStyle/>
+          <a:p>
+            <a:pPr algn="ctr" indent="0" marL="0">
+              <a:buNone/>
+            </a:pPr>
+            <a:r>
+              <a:rPr lang="en-US" sz="1400" b="1" dirty="0">
+                <a:solidFill>
+                  <a:srgbClr val="0D9488"/>
+                </a:solidFill>
+                <a:latin typeface="Trebuchet MS" pitchFamily="34" charset="0"/>
+                <a:ea typeface="Trebuchet MS" pitchFamily="34" charset="-122"/>
+                <a:cs typeface="Trebuchet MS" pitchFamily="34" charset="-120"/>
+              </a:rPr>
+              <a:t>rev</a:t>
+            </a:r>
+            <a:endParaRPr lang="en-US" sz="1400" dirty="0"/>
+          </a:p>
+        </p:txBody>
+      </p:sp>
+      <p:sp>
+        <p:nvSpPr>
+          <p:cNvPr id="29" name="Text 27"/>
+          <p:cNvSpPr/>
+          <p:nvPr/>
+        </p:nvSpPr>
+        <p:spPr>
+          <a:xfrm>
+            <a:off x="3529584" y="3364992"/>
+            <a:ext cx="73152" cy="475488"/>
+          </a:xfrm>
+          <a:prstGeom prst="rect">
+            <a:avLst/>
+          </a:prstGeom>
+          <a:noFill/>
+          <a:ln/>
+        </p:spPr>
+        <p:txBody>
+          <a:bodyPr wrap="square" lIns="0" tIns="0" rIns="0" bIns="0" rtlCol="0" anchor="ctr"/>
+          <a:lstStyle/>
+          <a:p>
+            <a:pPr algn="ctr" indent="0" marL="0">
+              <a:buNone/>
+            </a:pPr>
+            <a:r>
+              <a:rPr lang="en-US" sz="1600" b="1" dirty="0">
+                <a:solidFill>
+                  <a:srgbClr val="0D9488"/>
+                </a:solidFill>
+                <a:latin typeface="Trebuchet MS" pitchFamily="34" charset="0"/>
+                <a:ea typeface="Trebuchet MS" pitchFamily="34" charset="-122"/>
+                <a:cs typeface="Trebuchet MS" pitchFamily="34" charset="-120"/>
+              </a:rPr>
+              <a:t>·</a:t>
+            </a:r>
+            <a:endParaRPr lang="en-US" sz="1600" dirty="0"/>
+          </a:p>
+        </p:txBody>
+      </p:sp>
+      <p:sp>
+        <p:nvSpPr>
+          <p:cNvPr id="30" name="Shape 28"/>
+          <p:cNvSpPr/>
+          <p:nvPr/>
+        </p:nvSpPr>
+        <p:spPr>
+          <a:xfrm>
+            <a:off x="3602736" y="3364992"/>
+            <a:ext cx="1554480" cy="475488"/>
+          </a:xfrm>
+          <a:prstGeom prst="rect">
+            <a:avLst>
+              <a:gd name="adj" fmla="val 9615"/>
+            </a:avLst>
+          </a:prstGeom>
+          <a:solidFill>
+            <a:srgbClr val="FFFFFF"/>
+          </a:solidFill>
+          <a:ln w="12700">
+            <a:solidFill>
+              <a:srgbClr val="0D9488"/>
+            </a:solidFill>
+            <a:prstDash val="solid"/>
+          </a:ln>
+        </p:spPr>
+      </p:sp>
+      <p:sp>
+        <p:nvSpPr>
+          <p:cNvPr id="31" name="Text 29"/>
+          <p:cNvSpPr/>
+          <p:nvPr/>
+        </p:nvSpPr>
+        <p:spPr>
+          <a:xfrm>
+            <a:off x="3602736" y="3364992"/>
+            <a:ext cx="1554480" cy="475488"/>
+          </a:xfrm>
+          <a:prstGeom prst="rect">
+            <a:avLst/>
+          </a:prstGeom>
+          <a:noFill/>
+          <a:ln/>
+        </p:spPr>
+        <p:txBody>
+          <a:bodyPr wrap="square" lIns="0" tIns="0" rIns="0" bIns="0" rtlCol="0" anchor="ctr"/>
+          <a:lstStyle/>
+          <a:p>
+            <a:pPr algn="ctr" indent="0" marL="0">
+              <a:buNone/>
+            </a:pPr>
+            <a:r>
+              <a:rPr lang="en-US" sz="1400" b="1" dirty="0">
+                <a:solidFill>
+                  <a:srgbClr val="0D9488"/>
+                </a:solidFill>
+                <a:latin typeface="Trebuchet MS" pitchFamily="34" charset="0"/>
+                <a:ea typeface="Trebuchet MS" pitchFamily="34" charset="-122"/>
+                <a:cs typeface="Trebuchet MS" pitchFamily="34" charset="-120"/>
+              </a:rPr>
+              <a:t>e</a:t>
+            </a:r>
+            <a:endParaRPr lang="en-US" sz="1400" dirty="0"/>
+          </a:p>
+        </p:txBody>
+      </p:sp>
+      <p:sp>
+        <p:nvSpPr>
+          <p:cNvPr id="32" name="Text 30"/>
+          <p:cNvSpPr/>
+          <p:nvPr/>
+        </p:nvSpPr>
+        <p:spPr>
+          <a:xfrm>
+            <a:off x="5157216" y="3364992"/>
+            <a:ext cx="73152" cy="475488"/>
+          </a:xfrm>
+          <a:prstGeom prst="rect">
+            <a:avLst/>
+          </a:prstGeom>
+          <a:noFill/>
+          <a:ln/>
+        </p:spPr>
+        <p:txBody>
+          <a:bodyPr wrap="square" lIns="0" tIns="0" rIns="0" bIns="0" rtlCol="0" anchor="ctr"/>
+          <a:lstStyle/>
+          <a:p>
+            <a:pPr algn="ctr" indent="0" marL="0">
+              <a:buNone/>
+            </a:pPr>
+            <a:r>
+              <a:rPr lang="en-US" sz="1600" b="1" dirty="0">
+                <a:solidFill>
+                  <a:srgbClr val="0D9488"/>
+                </a:solidFill>
+                <a:latin typeface="Trebuchet MS" pitchFamily="34" charset="0"/>
+                <a:ea typeface="Trebuchet MS" pitchFamily="34" charset="-122"/>
+                <a:cs typeface="Trebuchet MS" pitchFamily="34" charset="-120"/>
+              </a:rPr>
+              <a:t>·</a:t>
+            </a:r>
+            <a:endParaRPr lang="en-US" sz="1600" dirty="0"/>
+          </a:p>
+        </p:txBody>
+      </p:sp>
+      <p:sp>
+        <p:nvSpPr>
+          <p:cNvPr id="33" name="Shape 31"/>
+          <p:cNvSpPr/>
+          <p:nvPr/>
+        </p:nvSpPr>
+        <p:spPr>
+          <a:xfrm>
+            <a:off x="5230368" y="3364992"/>
+            <a:ext cx="1554480" cy="475488"/>
+          </a:xfrm>
+          <a:prstGeom prst="rect">
+            <a:avLst>
+              <a:gd name="adj" fmla="val 9615"/>
+            </a:avLst>
+          </a:prstGeom>
+          <a:solidFill>
+            <a:srgbClr val="FFFFFF"/>
+          </a:solidFill>
+          <a:ln w="12700">
+            <a:solidFill>
+              <a:srgbClr val="0D9488"/>
+            </a:solidFill>
+            <a:prstDash val="solid"/>
+          </a:ln>
+        </p:spPr>
+      </p:sp>
+      <p:sp>
+        <p:nvSpPr>
+          <p:cNvPr id="34" name="Text 32"/>
+          <p:cNvSpPr/>
+          <p:nvPr/>
+        </p:nvSpPr>
+        <p:spPr>
+          <a:xfrm>
+            <a:off x="5230368" y="3364992"/>
+            <a:ext cx="1554480" cy="475488"/>
+          </a:xfrm>
+          <a:prstGeom prst="rect">
+            <a:avLst/>
+          </a:prstGeom>
+          <a:noFill/>
+          <a:ln/>
+        </p:spPr>
+        <p:txBody>
+          <a:bodyPr wrap="square" lIns="0" tIns="0" rIns="0" bIns="0" rtlCol="0" anchor="ctr"/>
+          <a:lstStyle/>
+          <a:p>
+            <a:pPr algn="ctr" indent="0" marL="0">
+              <a:buNone/>
+            </a:pPr>
+            <a:r>
+              <a:rPr lang="en-US" sz="1400" b="1" dirty="0">
+                <a:solidFill>
+                  <a:srgbClr val="0D9488"/>
+                </a:solidFill>
+                <a:latin typeface="Trebuchet MS" pitchFamily="34" charset="0"/>
+                <a:ea typeface="Trebuchet MS" pitchFamily="34" charset="-122"/>
+                <a:cs typeface="Trebuchet MS" pitchFamily="34" charset="-120"/>
+              </a:rPr>
+              <a:t>la</a:t>
+            </a:r>
+            <a:endParaRPr lang="en-US" sz="1400" dirty="0"/>
+          </a:p>
+        </p:txBody>
+      </p:sp>
+      <p:sp>
+        <p:nvSpPr>
+          <p:cNvPr id="35" name="Text 33"/>
+          <p:cNvSpPr/>
+          <p:nvPr/>
+        </p:nvSpPr>
+        <p:spPr>
+          <a:xfrm>
+            <a:off x="6784848" y="3364992"/>
+            <a:ext cx="73152" cy="475488"/>
+          </a:xfrm>
+          <a:prstGeom prst="rect">
+            <a:avLst/>
+          </a:prstGeom>
+          <a:noFill/>
+          <a:ln/>
+        </p:spPr>
+        <p:txBody>
+          <a:bodyPr wrap="square" lIns="0" tIns="0" rIns="0" bIns="0" rtlCol="0" anchor="ctr"/>
+          <a:lstStyle/>
+          <a:p>
+            <a:pPr algn="ctr" indent="0" marL="0">
+              <a:buNone/>
+            </a:pPr>
+            <a:r>
+              <a:rPr lang="en-US" sz="1600" b="1" dirty="0">
+                <a:solidFill>
+                  <a:srgbClr val="0D9488"/>
+                </a:solidFill>
+                <a:latin typeface="Trebuchet MS" pitchFamily="34" charset="0"/>
+                <a:ea typeface="Trebuchet MS" pitchFamily="34" charset="-122"/>
+                <a:cs typeface="Trebuchet MS" pitchFamily="34" charset="-120"/>
+              </a:rPr>
+              <a:t>·</a:t>
+            </a:r>
+            <a:endParaRPr lang="en-US" sz="1600" dirty="0"/>
+          </a:p>
+        </p:txBody>
+      </p:sp>
+      <p:sp>
+        <p:nvSpPr>
+          <p:cNvPr id="36" name="Shape 34"/>
+          <p:cNvSpPr/>
+          <p:nvPr/>
+        </p:nvSpPr>
+        <p:spPr>
+          <a:xfrm>
+            <a:off x="6858000" y="3364992"/>
+            <a:ext cx="1554480" cy="475488"/>
+          </a:xfrm>
+          <a:prstGeom prst="rect">
+            <a:avLst>
+              <a:gd name="adj" fmla="val 9615"/>
+            </a:avLst>
+          </a:prstGeom>
+          <a:solidFill>
+            <a:srgbClr val="FFFFFF"/>
+          </a:solidFill>
+          <a:ln w="12700">
+            <a:solidFill>
+              <a:srgbClr val="0D9488"/>
+            </a:solidFill>
+            <a:prstDash val="solid"/>
+          </a:ln>
+        </p:spPr>
+      </p:sp>
+      <p:sp>
+        <p:nvSpPr>
+          <p:cNvPr id="37" name="Text 35"/>
+          <p:cNvSpPr/>
+          <p:nvPr/>
+        </p:nvSpPr>
+        <p:spPr>
+          <a:xfrm>
+            <a:off x="6858000" y="3364992"/>
+            <a:ext cx="1554480" cy="475488"/>
+          </a:xfrm>
+          <a:prstGeom prst="rect">
+            <a:avLst/>
+          </a:prstGeom>
+          <a:noFill/>
+          <a:ln/>
+        </p:spPr>
+        <p:txBody>
+          <a:bodyPr wrap="square" lIns="0" tIns="0" rIns="0" bIns="0" rtlCol="0" anchor="ctr"/>
+          <a:lstStyle/>
+          <a:p>
+            <a:pPr algn="ctr" indent="0" marL="0">
+              <a:buNone/>
+            </a:pPr>
+            <a:r>
+              <a:rPr lang="en-US" sz="1400" b="1" dirty="0">
+                <a:solidFill>
+                  <a:srgbClr val="0D9488"/>
+                </a:solidFill>
+                <a:latin typeface="Trebuchet MS" pitchFamily="34" charset="0"/>
+                <a:ea typeface="Trebuchet MS" pitchFamily="34" charset="-122"/>
+                <a:cs typeface="Trebuchet MS" pitchFamily="34" charset="-120"/>
+              </a:rPr>
+              <a:t>tion</a:t>
+            </a:r>
+            <a:endParaRPr lang="en-US" sz="1400" dirty="0"/>
+          </a:p>
+        </p:txBody>
+      </p:sp>
+      <p:sp>
+        <p:nvSpPr>
+          <p:cNvPr id="38" name="Shape 36"/>
+          <p:cNvSpPr/>
+          <p:nvPr/>
+        </p:nvSpPr>
+        <p:spPr>
+          <a:xfrm>
+            <a:off x="365760" y="4096512"/>
+            <a:ext cx="1371600" cy="804672"/>
+          </a:xfrm>
+          <a:prstGeom prst="rect">
+            <a:avLst>
+              <a:gd name="adj" fmla="val 6818"/>
+            </a:avLst>
+          </a:prstGeom>
+          <a:solidFill>
+            <a:srgbClr val="E2E8F0"/>
+          </a:solidFill>
+          <a:ln w="12700">
+            <a:solidFill>
+              <a:srgbClr val="E2E8F0"/>
+            </a:solidFill>
+            <a:prstDash val="solid"/>
+          </a:ln>
+        </p:spPr>
+      </p:sp>
+      <p:sp>
+        <p:nvSpPr>
+          <p:cNvPr id="39" name="Text 37"/>
+          <p:cNvSpPr/>
+          <p:nvPr/>
+        </p:nvSpPr>
+        <p:spPr>
+          <a:xfrm>
+            <a:off x="365760" y="4096512"/>
+            <a:ext cx="1371600" cy="804672"/>
+          </a:xfrm>
+          <a:prstGeom prst="rect">
+            <a:avLst/>
+          </a:prstGeom>
+          <a:noFill/>
+          <a:ln/>
+        </p:spPr>
+        <p:txBody>
+          <a:bodyPr wrap="square" lIns="0" tIns="0" rIns="0" bIns="0" rtlCol="0" anchor="ctr"/>
+          <a:lstStyle/>
+          <a:p>
+            <a:pPr algn="ctr" indent="0" marL="0">
+              <a:buNone/>
+            </a:pPr>
+            <a:r>
+              <a:rPr lang="en-US" sz="1100" b="1" dirty="0">
+                <a:solidFill>
+                  <a:srgbClr val="475569"/>
+                </a:solidFill>
+                <a:latin typeface="Trebuchet MS" pitchFamily="34" charset="0"/>
+                <a:ea typeface="Trebuchet MS" pitchFamily="34" charset="-122"/>
+                <a:cs typeface="Trebuchet MS" pitchFamily="34" charset="-120"/>
+              </a:rPr>
+              <a:t>Phonemes</a:t>
+            </a:r>
+            <a:endParaRPr lang="en-US" sz="1100" dirty="0"/>
+          </a:p>
+        </p:txBody>
+      </p:sp>
+      <p:sp>
+        <p:nvSpPr>
+          <p:cNvPr id="40" name="Shape 38"/>
+          <p:cNvSpPr/>
+          <p:nvPr/>
+        </p:nvSpPr>
+        <p:spPr>
+          <a:xfrm>
+            <a:off x="1874520" y="4096512"/>
+            <a:ext cx="6903720" cy="804672"/>
+          </a:xfrm>
+          <a:prstGeom prst="rect">
+            <a:avLst>
+              <a:gd name="adj" fmla="val 6818"/>
+            </a:avLst>
+          </a:prstGeom>
+          <a:solidFill>
+            <a:srgbClr val="FCE7F3"/>
+          </a:solidFill>
+          <a:ln w="12700">
+            <a:solidFill>
+              <a:srgbClr val="DB2777"/>
+            </a:solidFill>
+            <a:prstDash val="solid"/>
+          </a:ln>
+        </p:spPr>
+      </p:sp>
+      <p:sp>
+        <p:nvSpPr>
+          <p:cNvPr id="41" name="Shape 39"/>
+          <p:cNvSpPr/>
+          <p:nvPr/>
+        </p:nvSpPr>
+        <p:spPr>
+          <a:xfrm>
+            <a:off x="1951330" y="4169664"/>
+            <a:ext cx="676656" cy="384048"/>
+          </a:xfrm>
+          <a:prstGeom prst="rect">
+            <a:avLst>
+              <a:gd name="adj" fmla="val 9524"/>
+            </a:avLst>
+          </a:prstGeom>
+          <a:solidFill>
+            <a:srgbClr val="FFFFFF"/>
+          </a:solidFill>
+          <a:ln w="12700">
+            <a:solidFill>
+              <a:srgbClr val="DB2777"/>
+            </a:solidFill>
+            <a:prstDash val="solid"/>
+          </a:ln>
+        </p:spPr>
+      </p:sp>
+      <p:sp>
+        <p:nvSpPr>
+          <p:cNvPr id="42" name="Text 40"/>
+          <p:cNvSpPr/>
+          <p:nvPr/>
+        </p:nvSpPr>
+        <p:spPr>
+          <a:xfrm>
+            <a:off x="1951330" y="4169664"/>
+            <a:ext cx="676656" cy="384048"/>
+          </a:xfrm>
+          <a:prstGeom prst="rect">
+            <a:avLst/>
+          </a:prstGeom>
+          <a:noFill/>
+          <a:ln/>
+        </p:spPr>
+        <p:txBody>
+          <a:bodyPr wrap="square" lIns="0" tIns="0" rIns="0" bIns="0" rtlCol="0" anchor="ctr"/>
+          <a:lstStyle/>
+          <a:p>
+            <a:pPr algn="ctr" indent="0" marL="0">
+              <a:buNone/>
+            </a:pPr>
+            <a:r>
+              <a:rPr lang="en-US" sz="900" b="1" dirty="0">
+                <a:solidFill>
+                  <a:srgbClr val="9D174D"/>
+                </a:solidFill>
+                <a:latin typeface="Trebuchet MS" pitchFamily="34" charset="0"/>
+                <a:ea typeface="Trebuchet MS" pitchFamily="34" charset="-122"/>
+                <a:cs typeface="Trebuchet MS" pitchFamily="34" charset="-120"/>
+              </a:rPr>
+              <a:t>r</a:t>
+            </a:r>
+            <a:endParaRPr lang="en-US" sz="900" dirty="0"/>
+          </a:p>
+        </p:txBody>
+      </p:sp>
+      <p:sp>
+        <p:nvSpPr>
+          <p:cNvPr id="43" name="Shape 41"/>
+          <p:cNvSpPr/>
+          <p:nvPr/>
+        </p:nvSpPr>
+        <p:spPr>
+          <a:xfrm>
+            <a:off x="2677363" y="4169664"/>
+            <a:ext cx="676656" cy="384048"/>
+          </a:xfrm>
+          <a:prstGeom prst="rect">
+            <a:avLst>
+              <a:gd name="adj" fmla="val 9524"/>
+            </a:avLst>
+          </a:prstGeom>
+          <a:solidFill>
+            <a:srgbClr val="FFFFFF"/>
+          </a:solidFill>
+          <a:ln w="12700">
+            <a:solidFill>
+              <a:srgbClr val="DB2777"/>
+            </a:solidFill>
+            <a:prstDash val="solid"/>
+          </a:ln>
+        </p:spPr>
+      </p:sp>
+      <p:sp>
+        <p:nvSpPr>
+          <p:cNvPr id="44" name="Text 42"/>
+          <p:cNvSpPr/>
+          <p:nvPr/>
+        </p:nvSpPr>
+        <p:spPr>
+          <a:xfrm>
+            <a:off x="2677363" y="4169664"/>
+            <a:ext cx="676656" cy="384048"/>
+          </a:xfrm>
+          <a:prstGeom prst="rect">
+            <a:avLst/>
+          </a:prstGeom>
+          <a:noFill/>
+          <a:ln/>
+        </p:spPr>
+        <p:txBody>
+          <a:bodyPr wrap="square" lIns="0" tIns="0" rIns="0" bIns="0" rtlCol="0" anchor="ctr"/>
+          <a:lstStyle/>
+          <a:p>
+            <a:pPr algn="ctr" indent="0" marL="0">
+              <a:buNone/>
+            </a:pPr>
+            <a:r>
+              <a:rPr lang="en-US" sz="900" b="1" dirty="0">
+                <a:solidFill>
+                  <a:srgbClr val="9D174D"/>
+                </a:solidFill>
+                <a:latin typeface="Trebuchet MS" pitchFamily="34" charset="0"/>
+                <a:ea typeface="Trebuchet MS" pitchFamily="34" charset="-122"/>
+                <a:cs typeface="Trebuchet MS" pitchFamily="34" charset="-120"/>
+              </a:rPr>
+              <a:t>e</a:t>
+            </a:r>
+            <a:endParaRPr lang="en-US" sz="900" dirty="0"/>
+          </a:p>
+        </p:txBody>
+      </p:sp>
+      <p:sp>
+        <p:nvSpPr>
+          <p:cNvPr id="45" name="Shape 43"/>
+          <p:cNvSpPr/>
+          <p:nvPr/>
+        </p:nvSpPr>
+        <p:spPr>
+          <a:xfrm>
+            <a:off x="3403397" y="4169664"/>
+            <a:ext cx="676656" cy="384048"/>
+          </a:xfrm>
+          <a:prstGeom prst="rect">
+            <a:avLst>
+              <a:gd name="adj" fmla="val 9524"/>
+            </a:avLst>
+          </a:prstGeom>
+          <a:solidFill>
+            <a:srgbClr val="FFFFFF"/>
+          </a:solidFill>
+          <a:ln w="12700">
+            <a:solidFill>
+              <a:srgbClr val="DB2777"/>
+            </a:solidFill>
+            <a:prstDash val="solid"/>
+          </a:ln>
+        </p:spPr>
+      </p:sp>
+      <p:sp>
+        <p:nvSpPr>
+          <p:cNvPr id="46" name="Text 44"/>
+          <p:cNvSpPr/>
+          <p:nvPr/>
+        </p:nvSpPr>
+        <p:spPr>
+          <a:xfrm>
+            <a:off x="3403397" y="4169664"/>
+            <a:ext cx="676656" cy="384048"/>
+          </a:xfrm>
+          <a:prstGeom prst="rect">
+            <a:avLst/>
+          </a:prstGeom>
+          <a:noFill/>
+          <a:ln/>
+        </p:spPr>
+        <p:txBody>
+          <a:bodyPr wrap="square" lIns="0" tIns="0" rIns="0" bIns="0" rtlCol="0" anchor="ctr"/>
+          <a:lstStyle/>
+          <a:p>
+            <a:pPr algn="ctr" indent="0" marL="0">
+              <a:buNone/>
+            </a:pPr>
+            <a:r>
+              <a:rPr lang="en-US" sz="900" b="1" dirty="0">
+                <a:solidFill>
+                  <a:srgbClr val="9D174D"/>
+                </a:solidFill>
+                <a:latin typeface="Trebuchet MS" pitchFamily="34" charset="0"/>
+                <a:ea typeface="Trebuchet MS" pitchFamily="34" charset="-122"/>
+                <a:cs typeface="Trebuchet MS" pitchFamily="34" charset="-120"/>
+              </a:rPr>
+              <a:t>v</a:t>
+            </a:r>
+            <a:endParaRPr lang="en-US" sz="900" dirty="0"/>
+          </a:p>
+        </p:txBody>
+      </p:sp>
+      <p:sp>
+        <p:nvSpPr>
+          <p:cNvPr id="47" name="Shape 45"/>
+          <p:cNvSpPr/>
+          <p:nvPr/>
+        </p:nvSpPr>
+        <p:spPr>
+          <a:xfrm>
+            <a:off x="4129430" y="4169664"/>
+            <a:ext cx="676656" cy="384048"/>
+          </a:xfrm>
+          <a:prstGeom prst="rect">
+            <a:avLst>
+              <a:gd name="adj" fmla="val 9524"/>
+            </a:avLst>
+          </a:prstGeom>
+          <a:solidFill>
+            <a:srgbClr val="FFFFFF"/>
+          </a:solidFill>
+          <a:ln w="12700">
+            <a:solidFill>
+              <a:srgbClr val="DB2777"/>
+            </a:solidFill>
+            <a:prstDash val="solid"/>
+          </a:ln>
+        </p:spPr>
+      </p:sp>
+      <p:sp>
+        <p:nvSpPr>
+          <p:cNvPr id="48" name="Text 46"/>
+          <p:cNvSpPr/>
+          <p:nvPr/>
+        </p:nvSpPr>
+        <p:spPr>
+          <a:xfrm>
+            <a:off x="4129430" y="4169664"/>
+            <a:ext cx="676656" cy="384048"/>
+          </a:xfrm>
+          <a:prstGeom prst="rect">
+            <a:avLst/>
+          </a:prstGeom>
+          <a:noFill/>
+          <a:ln/>
+        </p:spPr>
+        <p:txBody>
+          <a:bodyPr wrap="square" lIns="0" tIns="0" rIns="0" bIns="0" rtlCol="0" anchor="ctr"/>
+          <a:lstStyle/>
+          <a:p>
+            <a:pPr algn="ctr" indent="0" marL="0">
+              <a:buNone/>
+            </a:pPr>
+            <a:r>
+              <a:rPr lang="en-US" sz="900" b="1" dirty="0">
+                <a:solidFill>
+                  <a:srgbClr val="9D174D"/>
+                </a:solidFill>
+                <a:latin typeface="Trebuchet MS" pitchFamily="34" charset="0"/>
+                <a:ea typeface="Trebuchet MS" pitchFamily="34" charset="-122"/>
+                <a:cs typeface="Trebuchet MS" pitchFamily="34" charset="-120"/>
+              </a:rPr>
+              <a:t>e</a:t>
+            </a:r>
+            <a:endParaRPr lang="en-US" sz="900" dirty="0"/>
+          </a:p>
+        </p:txBody>
+      </p:sp>
+      <p:sp>
+        <p:nvSpPr>
+          <p:cNvPr id="49" name="Shape 47"/>
+          <p:cNvSpPr/>
+          <p:nvPr/>
+        </p:nvSpPr>
+        <p:spPr>
+          <a:xfrm>
+            <a:off x="4855464" y="4169664"/>
+            <a:ext cx="676656" cy="384048"/>
+          </a:xfrm>
+          <a:prstGeom prst="rect">
+            <a:avLst>
+              <a:gd name="adj" fmla="val 9524"/>
+            </a:avLst>
+          </a:prstGeom>
+          <a:solidFill>
+            <a:srgbClr val="FFFFFF"/>
+          </a:solidFill>
+          <a:ln w="12700">
+            <a:solidFill>
+              <a:srgbClr val="DB2777"/>
+            </a:solidFill>
+            <a:prstDash val="solid"/>
+          </a:ln>
+        </p:spPr>
+      </p:sp>
+      <p:sp>
+        <p:nvSpPr>
+          <p:cNvPr id="50" name="Text 48"/>
+          <p:cNvSpPr/>
+          <p:nvPr/>
+        </p:nvSpPr>
+        <p:spPr>
+          <a:xfrm>
+            <a:off x="4855464" y="4169664"/>
+            <a:ext cx="676656" cy="384048"/>
+          </a:xfrm>
+          <a:prstGeom prst="rect">
+            <a:avLst/>
+          </a:prstGeom>
+          <a:noFill/>
+          <a:ln/>
+        </p:spPr>
+        <p:txBody>
+          <a:bodyPr wrap="square" lIns="0" tIns="0" rIns="0" bIns="0" rtlCol="0" anchor="ctr"/>
+          <a:lstStyle/>
+          <a:p>
+            <a:pPr algn="ctr" indent="0" marL="0">
+              <a:buNone/>
+            </a:pPr>
+            <a:r>
+              <a:rPr lang="en-US" sz="900" b="1" dirty="0">
+                <a:solidFill>
+                  <a:srgbClr val="9D174D"/>
+                </a:solidFill>
+                <a:latin typeface="Trebuchet MS" pitchFamily="34" charset="0"/>
+                <a:ea typeface="Trebuchet MS" pitchFamily="34" charset="-122"/>
+                <a:cs typeface="Trebuchet MS" pitchFamily="34" charset="-120"/>
+              </a:rPr>
+              <a:t>l</a:t>
+            </a:r>
+            <a:endParaRPr lang="en-US" sz="900" dirty="0"/>
+          </a:p>
+        </p:txBody>
+      </p:sp>
+      <p:sp>
+        <p:nvSpPr>
+          <p:cNvPr id="51" name="Shape 49"/>
+          <p:cNvSpPr/>
+          <p:nvPr/>
+        </p:nvSpPr>
+        <p:spPr>
+          <a:xfrm>
+            <a:off x="5581498" y="4169664"/>
+            <a:ext cx="676656" cy="384048"/>
+          </a:xfrm>
+          <a:prstGeom prst="rect">
+            <a:avLst>
+              <a:gd name="adj" fmla="val 9524"/>
+            </a:avLst>
+          </a:prstGeom>
+          <a:solidFill>
+            <a:srgbClr val="FFFFFF"/>
+          </a:solidFill>
+          <a:ln w="12700">
+            <a:solidFill>
+              <a:srgbClr val="DB2777"/>
+            </a:solidFill>
+            <a:prstDash val="solid"/>
+          </a:ln>
+        </p:spPr>
+      </p:sp>
+      <p:sp>
+        <p:nvSpPr>
+          <p:cNvPr id="52" name="Text 50"/>
+          <p:cNvSpPr/>
+          <p:nvPr/>
+        </p:nvSpPr>
+        <p:spPr>
+          <a:xfrm>
+            <a:off x="5581498" y="4169664"/>
+            <a:ext cx="676656" cy="384048"/>
+          </a:xfrm>
+          <a:prstGeom prst="rect">
+            <a:avLst/>
+          </a:prstGeom>
+          <a:noFill/>
+          <a:ln/>
+        </p:spPr>
+        <p:txBody>
+          <a:bodyPr wrap="square" lIns="0" tIns="0" rIns="0" bIns="0" rtlCol="0" anchor="ctr"/>
+          <a:lstStyle/>
+          <a:p>
+            <a:pPr algn="ctr" indent="0" marL="0">
+              <a:buNone/>
+            </a:pPr>
+            <a:r>
+              <a:rPr lang="en-US" sz="900" b="1" dirty="0">
+                <a:solidFill>
+                  <a:srgbClr val="9D174D"/>
+                </a:solidFill>
+                <a:latin typeface="Trebuchet MS" pitchFamily="34" charset="0"/>
+                <a:ea typeface="Trebuchet MS" pitchFamily="34" charset="-122"/>
+                <a:cs typeface="Trebuchet MS" pitchFamily="34" charset="-120"/>
+              </a:rPr>
+              <a:t>a</a:t>
+            </a:r>
+            <a:endParaRPr lang="en-US" sz="900" dirty="0"/>
+          </a:p>
+        </p:txBody>
+      </p:sp>
+      <p:sp>
+        <p:nvSpPr>
+          <p:cNvPr id="53" name="Shape 51"/>
+          <p:cNvSpPr/>
+          <p:nvPr/>
+        </p:nvSpPr>
+        <p:spPr>
+          <a:xfrm>
+            <a:off x="6307531" y="4169664"/>
+            <a:ext cx="676656" cy="384048"/>
+          </a:xfrm>
+          <a:prstGeom prst="rect">
+            <a:avLst>
+              <a:gd name="adj" fmla="val 9524"/>
+            </a:avLst>
+          </a:prstGeom>
+          <a:solidFill>
+            <a:srgbClr val="FFFFFF"/>
+          </a:solidFill>
+          <a:ln w="12700">
+            <a:solidFill>
+              <a:srgbClr val="DB2777"/>
+            </a:solidFill>
+            <a:prstDash val="solid"/>
+          </a:ln>
+        </p:spPr>
+      </p:sp>
+      <p:sp>
+        <p:nvSpPr>
+          <p:cNvPr id="54" name="Text 52"/>
+          <p:cNvSpPr/>
+          <p:nvPr/>
+        </p:nvSpPr>
+        <p:spPr>
+          <a:xfrm>
+            <a:off x="6307531" y="4169664"/>
+            <a:ext cx="676656" cy="384048"/>
+          </a:xfrm>
+          <a:prstGeom prst="rect">
+            <a:avLst/>
+          </a:prstGeom>
+          <a:noFill/>
+          <a:ln/>
+        </p:spPr>
+        <p:txBody>
+          <a:bodyPr wrap="square" lIns="0" tIns="0" rIns="0" bIns="0" rtlCol="0" anchor="ctr"/>
+          <a:lstStyle/>
+          <a:p>
+            <a:pPr algn="ctr" indent="0" marL="0">
+              <a:buNone/>
+            </a:pPr>
+            <a:r>
+              <a:rPr lang="en-US" sz="900" b="1" dirty="0">
+                <a:solidFill>
+                  <a:srgbClr val="9D174D"/>
+                </a:solidFill>
+                <a:latin typeface="Trebuchet MS" pitchFamily="34" charset="0"/>
+                <a:ea typeface="Trebuchet MS" pitchFamily="34" charset="-122"/>
+                <a:cs typeface="Trebuchet MS" pitchFamily="34" charset="-120"/>
+              </a:rPr>
+              <a:t>t</a:t>
+            </a:r>
+            <a:endParaRPr lang="en-US" sz="900" dirty="0"/>
+          </a:p>
+        </p:txBody>
+      </p:sp>
+      <p:sp>
+        <p:nvSpPr>
+          <p:cNvPr id="55" name="Text 53"/>
+          <p:cNvSpPr/>
+          <p:nvPr/>
+        </p:nvSpPr>
+        <p:spPr>
+          <a:xfrm>
+            <a:off x="6307531" y="4572000"/>
+            <a:ext cx="676656" cy="219456"/>
           </a:xfrm>
           <a:prstGeom prst="rect">
             <a:avLst/>
@@ -15385,980 +16522,149 @@
               <a:buNone/>
             </a:pPr>
             <a:r>
-              <a:rPr lang="en-US" sz="850" dirty="0">
-                <a:solidFill>
-                  <a:srgbClr val="475569"/>
+              <a:rPr lang="en-US" sz="750" i="1" dirty="0">
+                <a:solidFill>
+                  <a:srgbClr val="94A3B8"/>
                 </a:solidFill>
                 <a:latin typeface="Calibri" pitchFamily="34" charset="0"/>
                 <a:ea typeface="Calibri" pitchFamily="34" charset="-122"/>
                 <a:cs typeface="Calibri" pitchFamily="34" charset="-120"/>
               </a:rPr>
-              <a:t>past tense or completed action</a:t>
-            </a:r>
-            <a:endParaRPr lang="en-US" sz="850" dirty="0"/>
-          </a:p>
-        </p:txBody>
-      </p:sp>
-      <p:sp>
-        <p:nvSpPr>
-          <p:cNvPr id="25" name="Shape 23"/>
-          <p:cNvSpPr/>
-          <p:nvPr/>
-        </p:nvSpPr>
-        <p:spPr>
-          <a:xfrm>
-            <a:off x="365760" y="3273552"/>
-            <a:ext cx="1371600" cy="658368"/>
+              <a:t>/sh/</a:t>
+            </a:r>
+            <a:endParaRPr lang="en-US" sz="750" dirty="0"/>
+          </a:p>
+        </p:txBody>
+      </p:sp>
+      <p:sp>
+        <p:nvSpPr>
+          <p:cNvPr id="56" name="Shape 54"/>
+          <p:cNvSpPr/>
+          <p:nvPr/>
+        </p:nvSpPr>
+        <p:spPr>
+          <a:xfrm>
+            <a:off x="7033565" y="4169664"/>
+            <a:ext cx="676656" cy="384048"/>
           </a:xfrm>
           <a:prstGeom prst="rect">
             <a:avLst>
-              <a:gd name="adj" fmla="val 8333"/>
+              <a:gd name="adj" fmla="val 9524"/>
             </a:avLst>
           </a:prstGeom>
           <a:solidFill>
-            <a:srgbClr val="E2E8F0"/>
-          </a:solidFill>
-          <a:ln w="12700">
-            <a:solidFill>
-              <a:srgbClr val="E2E8F0"/>
-            </a:solidFill>
-            <a:prstDash val="solid"/>
-          </a:ln>
-        </p:spPr>
-      </p:sp>
-      <p:sp>
-        <p:nvSpPr>
-          <p:cNvPr id="26" name="Text 24"/>
-          <p:cNvSpPr/>
-          <p:nvPr/>
-        </p:nvSpPr>
-        <p:spPr>
-          <a:xfrm>
-            <a:off x="365760" y="3273552"/>
-            <a:ext cx="1371600" cy="658368"/>
-          </a:xfrm>
-          <a:prstGeom prst="rect">
-            <a:avLst/>
-          </a:prstGeom>
-          <a:noFill/>
-          <a:ln/>
-        </p:spPr>
-        <p:txBody>
-          <a:bodyPr wrap="square" lIns="0" tIns="0" rIns="0" bIns="0" rtlCol="0" anchor="ctr"/>
-          <a:lstStyle/>
-          <a:p>
-            <a:pPr algn="ctr" indent="0" marL="0">
-              <a:buNone/>
-            </a:pPr>
-            <a:r>
-              <a:rPr lang="en-US" sz="1100" b="1" dirty="0">
-                <a:solidFill>
-                  <a:srgbClr val="475569"/>
+            <a:srgbClr val="FFFFFF"/>
+          </a:solidFill>
+          <a:ln w="12700">
+            <a:solidFill>
+              <a:srgbClr val="DB2777"/>
+            </a:solidFill>
+            <a:prstDash val="solid"/>
+          </a:ln>
+        </p:spPr>
+      </p:sp>
+      <p:sp>
+        <p:nvSpPr>
+          <p:cNvPr id="57" name="Text 55"/>
+          <p:cNvSpPr/>
+          <p:nvPr/>
+        </p:nvSpPr>
+        <p:spPr>
+          <a:xfrm>
+            <a:off x="7033565" y="4169664"/>
+            <a:ext cx="676656" cy="384048"/>
+          </a:xfrm>
+          <a:prstGeom prst="rect">
+            <a:avLst/>
+          </a:prstGeom>
+          <a:noFill/>
+          <a:ln/>
+        </p:spPr>
+        <p:txBody>
+          <a:bodyPr wrap="square" lIns="0" tIns="0" rIns="0" bIns="0" rtlCol="0" anchor="ctr"/>
+          <a:lstStyle/>
+          <a:p>
+            <a:pPr algn="ctr" indent="0" marL="0">
+              <a:buNone/>
+            </a:pPr>
+            <a:r>
+              <a:rPr lang="en-US" sz="900" b="1" dirty="0">
+                <a:solidFill>
+                  <a:srgbClr val="9D174D"/>
                 </a:solidFill>
                 <a:latin typeface="Trebuchet MS" pitchFamily="34" charset="0"/>
                 <a:ea typeface="Trebuchet MS" pitchFamily="34" charset="-122"/>
                 <a:cs typeface="Trebuchet MS" pitchFamily="34" charset="-120"/>
               </a:rPr>
-              <a:t>Syllables</a:t>
-            </a:r>
-            <a:endParaRPr lang="en-US" sz="1100" dirty="0"/>
-          </a:p>
-        </p:txBody>
-      </p:sp>
-      <p:sp>
-        <p:nvSpPr>
-          <p:cNvPr id="27" name="Shape 25"/>
-          <p:cNvSpPr/>
-          <p:nvPr/>
-        </p:nvSpPr>
-        <p:spPr>
-          <a:xfrm>
-            <a:off x="1874520" y="3273552"/>
-            <a:ext cx="6903720" cy="658368"/>
+              <a:t>io</a:t>
+            </a:r>
+            <a:endParaRPr lang="en-US" sz="900" dirty="0"/>
+          </a:p>
+        </p:txBody>
+      </p:sp>
+      <p:sp>
+        <p:nvSpPr>
+          <p:cNvPr id="58" name="Shape 56"/>
+          <p:cNvSpPr/>
+          <p:nvPr/>
+        </p:nvSpPr>
+        <p:spPr>
+          <a:xfrm>
+            <a:off x="7759598" y="4169664"/>
+            <a:ext cx="676656" cy="384048"/>
           </a:xfrm>
           <a:prstGeom prst="rect">
             <a:avLst>
-              <a:gd name="adj" fmla="val 8333"/>
+              <a:gd name="adj" fmla="val 9524"/>
             </a:avLst>
           </a:prstGeom>
           <a:solidFill>
-            <a:srgbClr val="CCFBF1"/>
-          </a:solidFill>
-          <a:ln w="12700">
-            <a:solidFill>
-              <a:srgbClr val="0D9488"/>
-            </a:solidFill>
-            <a:prstDash val="solid"/>
-          </a:ln>
-        </p:spPr>
-      </p:sp>
-      <p:sp>
-        <p:nvSpPr>
-          <p:cNvPr id="28" name="Shape 26"/>
-          <p:cNvSpPr/>
-          <p:nvPr/>
-        </p:nvSpPr>
-        <p:spPr>
-          <a:xfrm>
-            <a:off x="2313432" y="3364992"/>
-            <a:ext cx="1645920" cy="475488"/>
-          </a:xfrm>
-          <a:prstGeom prst="rect">
-            <a:avLst>
-              <a:gd name="adj" fmla="val 9615"/>
-            </a:avLst>
-          </a:prstGeom>
-          <a:solidFill>
             <a:srgbClr val="FFFFFF"/>
           </a:solidFill>
           <a:ln w="12700">
             <a:solidFill>
-              <a:srgbClr val="0D9488"/>
-            </a:solidFill>
-            <a:prstDash val="solid"/>
-          </a:ln>
-        </p:spPr>
-      </p:sp>
-      <p:sp>
-        <p:nvSpPr>
-          <p:cNvPr id="29" name="Text 27"/>
-          <p:cNvSpPr/>
-          <p:nvPr/>
-        </p:nvSpPr>
-        <p:spPr>
-          <a:xfrm>
-            <a:off x="2313432" y="3364992"/>
-            <a:ext cx="1645920" cy="475488"/>
-          </a:xfrm>
-          <a:prstGeom prst="rect">
-            <a:avLst/>
-          </a:prstGeom>
-          <a:noFill/>
-          <a:ln/>
-        </p:spPr>
-        <p:txBody>
-          <a:bodyPr wrap="square" lIns="0" tIns="0" rIns="0" bIns="0" rtlCol="0" anchor="ctr"/>
-          <a:lstStyle/>
-          <a:p>
-            <a:pPr algn="ctr" indent="0" marL="0">
-              <a:buNone/>
-            </a:pPr>
-            <a:r>
-              <a:rPr lang="en-US" sz="1400" b="1" dirty="0">
-                <a:solidFill>
-                  <a:srgbClr val="0D9488"/>
+              <a:srgbClr val="DB2777"/>
+            </a:solidFill>
+            <a:prstDash val="solid"/>
+          </a:ln>
+        </p:spPr>
+      </p:sp>
+      <p:sp>
+        <p:nvSpPr>
+          <p:cNvPr id="59" name="Text 57"/>
+          <p:cNvSpPr/>
+          <p:nvPr/>
+        </p:nvSpPr>
+        <p:spPr>
+          <a:xfrm>
+            <a:off x="7759598" y="4169664"/>
+            <a:ext cx="676656" cy="384048"/>
+          </a:xfrm>
+          <a:prstGeom prst="rect">
+            <a:avLst/>
+          </a:prstGeom>
+          <a:noFill/>
+          <a:ln/>
+        </p:spPr>
+        <p:txBody>
+          <a:bodyPr wrap="square" lIns="0" tIns="0" rIns="0" bIns="0" rtlCol="0" anchor="ctr"/>
+          <a:lstStyle/>
+          <a:p>
+            <a:pPr algn="ctr" indent="0" marL="0">
+              <a:buNone/>
+            </a:pPr>
+            <a:r>
+              <a:rPr lang="en-US" sz="900" b="1" dirty="0">
+                <a:solidFill>
+                  <a:srgbClr val="9D174D"/>
                 </a:solidFill>
                 <a:latin typeface="Trebuchet MS" pitchFamily="34" charset="0"/>
                 <a:ea typeface="Trebuchet MS" pitchFamily="34" charset="-122"/>
                 <a:cs typeface="Trebuchet MS" pitchFamily="34" charset="-120"/>
               </a:rPr>
-              <a:t>un</a:t>
-            </a:r>
-            <a:endParaRPr lang="en-US" sz="1400" dirty="0"/>
-          </a:p>
-        </p:txBody>
-      </p:sp>
-      <p:sp>
-        <p:nvSpPr>
-          <p:cNvPr id="30" name="Text 28"/>
-          <p:cNvSpPr/>
-          <p:nvPr/>
-        </p:nvSpPr>
-        <p:spPr>
-          <a:xfrm>
-            <a:off x="3959352" y="3364992"/>
-            <a:ext cx="411480" cy="475488"/>
-          </a:xfrm>
-          <a:prstGeom prst="rect">
-            <a:avLst/>
-          </a:prstGeom>
-          <a:noFill/>
-          <a:ln/>
-        </p:spPr>
-        <p:txBody>
-          <a:bodyPr wrap="square" lIns="0" tIns="0" rIns="0" bIns="0" rtlCol="0" anchor="ctr"/>
-          <a:lstStyle/>
-          <a:p>
-            <a:pPr algn="ctr" indent="0" marL="0">
-              <a:buNone/>
-            </a:pPr>
-            <a:r>
-              <a:rPr lang="en-US" sz="1600" b="1" dirty="0">
-                <a:solidFill>
-                  <a:srgbClr val="0D9488"/>
-                </a:solidFill>
-                <a:latin typeface="Trebuchet MS" pitchFamily="34" charset="0"/>
-                <a:ea typeface="Trebuchet MS" pitchFamily="34" charset="-122"/>
-                <a:cs typeface="Trebuchet MS" pitchFamily="34" charset="-120"/>
-              </a:rPr>
-              <a:t>·</a:t>
-            </a:r>
-            <a:endParaRPr lang="en-US" sz="1600" dirty="0"/>
-          </a:p>
-        </p:txBody>
-      </p:sp>
-      <p:sp>
-        <p:nvSpPr>
-          <p:cNvPr id="31" name="Shape 29"/>
-          <p:cNvSpPr/>
-          <p:nvPr/>
-        </p:nvSpPr>
-        <p:spPr>
-          <a:xfrm>
-            <a:off x="4370832" y="3364992"/>
-            <a:ext cx="1645920" cy="475488"/>
-          </a:xfrm>
-          <a:prstGeom prst="rect">
-            <a:avLst>
-              <a:gd name="adj" fmla="val 9615"/>
-            </a:avLst>
-          </a:prstGeom>
-          <a:solidFill>
-            <a:srgbClr val="FFFFFF"/>
-          </a:solidFill>
-          <a:ln w="12700">
-            <a:solidFill>
-              <a:srgbClr val="0D9488"/>
-            </a:solidFill>
-            <a:prstDash val="solid"/>
-          </a:ln>
-        </p:spPr>
-      </p:sp>
-      <p:sp>
-        <p:nvSpPr>
-          <p:cNvPr id="32" name="Text 30"/>
-          <p:cNvSpPr/>
-          <p:nvPr/>
-        </p:nvSpPr>
-        <p:spPr>
-          <a:xfrm>
-            <a:off x="4370832" y="3364992"/>
-            <a:ext cx="1645920" cy="475488"/>
-          </a:xfrm>
-          <a:prstGeom prst="rect">
-            <a:avLst/>
-          </a:prstGeom>
-          <a:noFill/>
-          <a:ln/>
-        </p:spPr>
-        <p:txBody>
-          <a:bodyPr wrap="square" lIns="0" tIns="0" rIns="0" bIns="0" rtlCol="0" anchor="ctr"/>
-          <a:lstStyle/>
-          <a:p>
-            <a:pPr algn="ctr" indent="0" marL="0">
-              <a:buNone/>
-            </a:pPr>
-            <a:r>
-              <a:rPr lang="en-US" sz="1400" b="1" dirty="0">
-                <a:solidFill>
-                  <a:srgbClr val="0D9488"/>
-                </a:solidFill>
-                <a:latin typeface="Trebuchet MS" pitchFamily="34" charset="0"/>
-                <a:ea typeface="Trebuchet MS" pitchFamily="34" charset="-122"/>
-                <a:cs typeface="Trebuchet MS" pitchFamily="34" charset="-120"/>
-              </a:rPr>
-              <a:t>re</a:t>
-            </a:r>
-            <a:endParaRPr lang="en-US" sz="1400" dirty="0"/>
-          </a:p>
-        </p:txBody>
-      </p:sp>
-      <p:sp>
-        <p:nvSpPr>
-          <p:cNvPr id="33" name="Text 31"/>
-          <p:cNvSpPr/>
-          <p:nvPr/>
-        </p:nvSpPr>
-        <p:spPr>
-          <a:xfrm>
-            <a:off x="6016752" y="3364992"/>
-            <a:ext cx="411480" cy="475488"/>
-          </a:xfrm>
-          <a:prstGeom prst="rect">
-            <a:avLst/>
-          </a:prstGeom>
-          <a:noFill/>
-          <a:ln/>
-        </p:spPr>
-        <p:txBody>
-          <a:bodyPr wrap="square" lIns="0" tIns="0" rIns="0" bIns="0" rtlCol="0" anchor="ctr"/>
-          <a:lstStyle/>
-          <a:p>
-            <a:pPr algn="ctr" indent="0" marL="0">
-              <a:buNone/>
-            </a:pPr>
-            <a:r>
-              <a:rPr lang="en-US" sz="1600" b="1" dirty="0">
-                <a:solidFill>
-                  <a:srgbClr val="0D9488"/>
-                </a:solidFill>
-                <a:latin typeface="Trebuchet MS" pitchFamily="34" charset="0"/>
-                <a:ea typeface="Trebuchet MS" pitchFamily="34" charset="-122"/>
-                <a:cs typeface="Trebuchet MS" pitchFamily="34" charset="-120"/>
-              </a:rPr>
-              <a:t>·</a:t>
-            </a:r>
-            <a:endParaRPr lang="en-US" sz="1600" dirty="0"/>
-          </a:p>
-        </p:txBody>
-      </p:sp>
-      <p:sp>
-        <p:nvSpPr>
-          <p:cNvPr id="34" name="Shape 32"/>
-          <p:cNvSpPr/>
-          <p:nvPr/>
-        </p:nvSpPr>
-        <p:spPr>
-          <a:xfrm>
-            <a:off x="6428232" y="3364992"/>
-            <a:ext cx="1645920" cy="475488"/>
-          </a:xfrm>
-          <a:prstGeom prst="rect">
-            <a:avLst>
-              <a:gd name="adj" fmla="val 9615"/>
-            </a:avLst>
-          </a:prstGeom>
-          <a:solidFill>
-            <a:srgbClr val="FFFFFF"/>
-          </a:solidFill>
-          <a:ln w="12700">
-            <a:solidFill>
-              <a:srgbClr val="0D9488"/>
-            </a:solidFill>
-            <a:prstDash val="solid"/>
-          </a:ln>
-        </p:spPr>
-      </p:sp>
-      <p:sp>
-        <p:nvSpPr>
-          <p:cNvPr id="35" name="Text 33"/>
-          <p:cNvSpPr/>
-          <p:nvPr/>
-        </p:nvSpPr>
-        <p:spPr>
-          <a:xfrm>
-            <a:off x="6428232" y="3364992"/>
-            <a:ext cx="1645920" cy="475488"/>
-          </a:xfrm>
-          <a:prstGeom prst="rect">
-            <a:avLst/>
-          </a:prstGeom>
-          <a:noFill/>
-          <a:ln/>
-        </p:spPr>
-        <p:txBody>
-          <a:bodyPr wrap="square" lIns="0" tIns="0" rIns="0" bIns="0" rtlCol="0" anchor="ctr"/>
-          <a:lstStyle/>
-          <a:p>
-            <a:pPr algn="ctr" indent="0" marL="0">
-              <a:buNone/>
-            </a:pPr>
-            <a:r>
-              <a:rPr lang="en-US" sz="1400" b="1" dirty="0">
-                <a:solidFill>
-                  <a:srgbClr val="0D9488"/>
-                </a:solidFill>
-                <a:latin typeface="Trebuchet MS" pitchFamily="34" charset="0"/>
-                <a:ea typeface="Trebuchet MS" pitchFamily="34" charset="-122"/>
-                <a:cs typeface="Trebuchet MS" pitchFamily="34" charset="-120"/>
-              </a:rPr>
-              <a:t>vealed</a:t>
-            </a:r>
-            <a:endParaRPr lang="en-US" sz="1400" dirty="0"/>
-          </a:p>
-        </p:txBody>
-      </p:sp>
-      <p:sp>
-        <p:nvSpPr>
-          <p:cNvPr id="36" name="Shape 34"/>
-          <p:cNvSpPr/>
-          <p:nvPr/>
-        </p:nvSpPr>
-        <p:spPr>
-          <a:xfrm>
-            <a:off x="365760" y="4096512"/>
-            <a:ext cx="1371600" cy="804672"/>
-          </a:xfrm>
-          <a:prstGeom prst="rect">
-            <a:avLst>
-              <a:gd name="adj" fmla="val 6818"/>
-            </a:avLst>
-          </a:prstGeom>
-          <a:solidFill>
-            <a:srgbClr val="E2E8F0"/>
-          </a:solidFill>
-          <a:ln w="12700">
-            <a:solidFill>
-              <a:srgbClr val="E2E8F0"/>
-            </a:solidFill>
-            <a:prstDash val="solid"/>
-          </a:ln>
-        </p:spPr>
-      </p:sp>
-      <p:sp>
-        <p:nvSpPr>
-          <p:cNvPr id="37" name="Text 35"/>
-          <p:cNvSpPr/>
-          <p:nvPr/>
-        </p:nvSpPr>
-        <p:spPr>
-          <a:xfrm>
-            <a:off x="365760" y="4096512"/>
-            <a:ext cx="1371600" cy="804672"/>
-          </a:xfrm>
-          <a:prstGeom prst="rect">
-            <a:avLst/>
-          </a:prstGeom>
-          <a:noFill/>
-          <a:ln/>
-        </p:spPr>
-        <p:txBody>
-          <a:bodyPr wrap="square" lIns="0" tIns="0" rIns="0" bIns="0" rtlCol="0" anchor="ctr"/>
-          <a:lstStyle/>
-          <a:p>
-            <a:pPr algn="ctr" indent="0" marL="0">
-              <a:buNone/>
-            </a:pPr>
-            <a:r>
-              <a:rPr lang="en-US" sz="1100" b="1" dirty="0">
-                <a:solidFill>
-                  <a:srgbClr val="475569"/>
-                </a:solidFill>
-                <a:latin typeface="Trebuchet MS" pitchFamily="34" charset="0"/>
-                <a:ea typeface="Trebuchet MS" pitchFamily="34" charset="-122"/>
-                <a:cs typeface="Trebuchet MS" pitchFamily="34" charset="-120"/>
-              </a:rPr>
-              <a:t>Phonemes</a:t>
-            </a:r>
-            <a:endParaRPr lang="en-US" sz="1100" dirty="0"/>
-          </a:p>
-        </p:txBody>
-      </p:sp>
-      <p:sp>
-        <p:nvSpPr>
-          <p:cNvPr id="38" name="Shape 36"/>
-          <p:cNvSpPr/>
-          <p:nvPr/>
-        </p:nvSpPr>
-        <p:spPr>
-          <a:xfrm>
-            <a:off x="1874520" y="4096512"/>
-            <a:ext cx="6903720" cy="804672"/>
-          </a:xfrm>
-          <a:prstGeom prst="rect">
-            <a:avLst>
-              <a:gd name="adj" fmla="val 6818"/>
-            </a:avLst>
-          </a:prstGeom>
-          <a:solidFill>
-            <a:srgbClr val="FCE7F3"/>
-          </a:solidFill>
-          <a:ln w="12700">
-            <a:solidFill>
-              <a:srgbClr val="DB2777"/>
-            </a:solidFill>
-            <a:prstDash val="solid"/>
-          </a:ln>
-        </p:spPr>
-      </p:sp>
-      <p:sp>
-        <p:nvSpPr>
-          <p:cNvPr id="39" name="Shape 37"/>
-          <p:cNvSpPr/>
-          <p:nvPr/>
-        </p:nvSpPr>
-        <p:spPr>
-          <a:xfrm>
-            <a:off x="2124837" y="4169664"/>
-            <a:ext cx="685800" cy="384048"/>
-          </a:xfrm>
-          <a:prstGeom prst="rect">
-            <a:avLst>
-              <a:gd name="adj" fmla="val 9524"/>
-            </a:avLst>
-          </a:prstGeom>
-          <a:solidFill>
-            <a:srgbClr val="FFFFFF"/>
-          </a:solidFill>
-          <a:ln w="12700">
-            <a:solidFill>
-              <a:srgbClr val="DB2777"/>
-            </a:solidFill>
-            <a:prstDash val="solid"/>
-          </a:ln>
-        </p:spPr>
-      </p:sp>
-      <p:sp>
-        <p:nvSpPr>
-          <p:cNvPr id="40" name="Text 38"/>
-          <p:cNvSpPr/>
-          <p:nvPr/>
-        </p:nvSpPr>
-        <p:spPr>
-          <a:xfrm>
-            <a:off x="2124837" y="4169664"/>
-            <a:ext cx="685800" cy="384048"/>
-          </a:xfrm>
-          <a:prstGeom prst="rect">
-            <a:avLst/>
-          </a:prstGeom>
-          <a:noFill/>
-          <a:ln/>
-        </p:spPr>
-        <p:txBody>
-          <a:bodyPr wrap="square" lIns="0" tIns="0" rIns="0" bIns="0" rtlCol="0" anchor="ctr"/>
-          <a:lstStyle/>
-          <a:p>
-            <a:pPr algn="ctr" indent="0" marL="0">
-              <a:buNone/>
-            </a:pPr>
-            <a:r>
-              <a:rPr lang="en-US" sz="900" b="1" dirty="0">
-                <a:solidFill>
-                  <a:srgbClr val="9D174D"/>
-                </a:solidFill>
-                <a:latin typeface="Trebuchet MS" pitchFamily="34" charset="0"/>
-                <a:ea typeface="Trebuchet MS" pitchFamily="34" charset="-122"/>
-                <a:cs typeface="Trebuchet MS" pitchFamily="34" charset="-120"/>
-              </a:rPr>
-              <a:t>u</a:t>
+              <a:t>n</a:t>
             </a:r>
             <a:endParaRPr lang="en-US" sz="900" dirty="0"/>
-          </a:p>
-        </p:txBody>
-      </p:sp>
-      <p:sp>
-        <p:nvSpPr>
-          <p:cNvPr id="41" name="Shape 39"/>
-          <p:cNvSpPr/>
-          <p:nvPr/>
-        </p:nvSpPr>
-        <p:spPr>
-          <a:xfrm>
-            <a:off x="3033522" y="4169664"/>
-            <a:ext cx="685800" cy="384048"/>
-          </a:xfrm>
-          <a:prstGeom prst="rect">
-            <a:avLst>
-              <a:gd name="adj" fmla="val 9524"/>
-            </a:avLst>
-          </a:prstGeom>
-          <a:solidFill>
-            <a:srgbClr val="FFFFFF"/>
-          </a:solidFill>
-          <a:ln w="12700">
-            <a:solidFill>
-              <a:srgbClr val="DB2777"/>
-            </a:solidFill>
-            <a:prstDash val="solid"/>
-          </a:ln>
-        </p:spPr>
-      </p:sp>
-      <p:sp>
-        <p:nvSpPr>
-          <p:cNvPr id="42" name="Text 40"/>
-          <p:cNvSpPr/>
-          <p:nvPr/>
-        </p:nvSpPr>
-        <p:spPr>
-          <a:xfrm>
-            <a:off x="3033522" y="4169664"/>
-            <a:ext cx="685800" cy="384048"/>
-          </a:xfrm>
-          <a:prstGeom prst="rect">
-            <a:avLst/>
-          </a:prstGeom>
-          <a:noFill/>
-          <a:ln/>
-        </p:spPr>
-        <p:txBody>
-          <a:bodyPr wrap="square" lIns="0" tIns="0" rIns="0" bIns="0" rtlCol="0" anchor="ctr"/>
-          <a:lstStyle/>
-          <a:p>
-            <a:pPr algn="ctr" indent="0" marL="0">
-              <a:buNone/>
-            </a:pPr>
-            <a:r>
-              <a:rPr lang="en-US" sz="900" b="1" dirty="0">
-                <a:solidFill>
-                  <a:srgbClr val="9D174D"/>
-                </a:solidFill>
-                <a:latin typeface="Trebuchet MS" pitchFamily="34" charset="0"/>
-                <a:ea typeface="Trebuchet MS" pitchFamily="34" charset="-122"/>
-                <a:cs typeface="Trebuchet MS" pitchFamily="34" charset="-120"/>
-              </a:rPr>
-              <a:t>n</a:t>
-            </a:r>
-            <a:endParaRPr lang="en-US" sz="900" dirty="0"/>
-          </a:p>
-        </p:txBody>
-      </p:sp>
-      <p:sp>
-        <p:nvSpPr>
-          <p:cNvPr id="43" name="Shape 41"/>
-          <p:cNvSpPr/>
-          <p:nvPr/>
-        </p:nvSpPr>
-        <p:spPr>
-          <a:xfrm>
-            <a:off x="3942207" y="4169664"/>
-            <a:ext cx="685800" cy="384048"/>
-          </a:xfrm>
-          <a:prstGeom prst="rect">
-            <a:avLst>
-              <a:gd name="adj" fmla="val 9524"/>
-            </a:avLst>
-          </a:prstGeom>
-          <a:solidFill>
-            <a:srgbClr val="FFFFFF"/>
-          </a:solidFill>
-          <a:ln w="12700">
-            <a:solidFill>
-              <a:srgbClr val="DB2777"/>
-            </a:solidFill>
-            <a:prstDash val="solid"/>
-          </a:ln>
-        </p:spPr>
-      </p:sp>
-      <p:sp>
-        <p:nvSpPr>
-          <p:cNvPr id="44" name="Text 42"/>
-          <p:cNvSpPr/>
-          <p:nvPr/>
-        </p:nvSpPr>
-        <p:spPr>
-          <a:xfrm>
-            <a:off x="3942207" y="4169664"/>
-            <a:ext cx="685800" cy="384048"/>
-          </a:xfrm>
-          <a:prstGeom prst="rect">
-            <a:avLst/>
-          </a:prstGeom>
-          <a:noFill/>
-          <a:ln/>
-        </p:spPr>
-        <p:txBody>
-          <a:bodyPr wrap="square" lIns="0" tIns="0" rIns="0" bIns="0" rtlCol="0" anchor="ctr"/>
-          <a:lstStyle/>
-          <a:p>
-            <a:pPr algn="ctr" indent="0" marL="0">
-              <a:buNone/>
-            </a:pPr>
-            <a:r>
-              <a:rPr lang="en-US" sz="900" b="1" dirty="0">
-                <a:solidFill>
-                  <a:srgbClr val="9D174D"/>
-                </a:solidFill>
-                <a:latin typeface="Trebuchet MS" pitchFamily="34" charset="0"/>
-                <a:ea typeface="Trebuchet MS" pitchFamily="34" charset="-122"/>
-                <a:cs typeface="Trebuchet MS" pitchFamily="34" charset="-120"/>
-              </a:rPr>
-              <a:t>r</a:t>
-            </a:r>
-            <a:endParaRPr lang="en-US" sz="900" dirty="0"/>
-          </a:p>
-        </p:txBody>
-      </p:sp>
-      <p:sp>
-        <p:nvSpPr>
-          <p:cNvPr id="45" name="Shape 43"/>
-          <p:cNvSpPr/>
-          <p:nvPr/>
-        </p:nvSpPr>
-        <p:spPr>
-          <a:xfrm>
-            <a:off x="4850892" y="4169664"/>
-            <a:ext cx="685800" cy="384048"/>
-          </a:xfrm>
-          <a:prstGeom prst="rect">
-            <a:avLst>
-              <a:gd name="adj" fmla="val 9524"/>
-            </a:avLst>
-          </a:prstGeom>
-          <a:solidFill>
-            <a:srgbClr val="FFFFFF"/>
-          </a:solidFill>
-          <a:ln w="12700">
-            <a:solidFill>
-              <a:srgbClr val="DB2777"/>
-            </a:solidFill>
-            <a:prstDash val="solid"/>
-          </a:ln>
-        </p:spPr>
-      </p:sp>
-      <p:sp>
-        <p:nvSpPr>
-          <p:cNvPr id="46" name="Text 44"/>
-          <p:cNvSpPr/>
-          <p:nvPr/>
-        </p:nvSpPr>
-        <p:spPr>
-          <a:xfrm>
-            <a:off x="4850892" y="4169664"/>
-            <a:ext cx="685800" cy="384048"/>
-          </a:xfrm>
-          <a:prstGeom prst="rect">
-            <a:avLst/>
-          </a:prstGeom>
-          <a:noFill/>
-          <a:ln/>
-        </p:spPr>
-        <p:txBody>
-          <a:bodyPr wrap="square" lIns="0" tIns="0" rIns="0" bIns="0" rtlCol="0" anchor="ctr"/>
-          <a:lstStyle/>
-          <a:p>
-            <a:pPr algn="ctr" indent="0" marL="0">
-              <a:buNone/>
-            </a:pPr>
-            <a:r>
-              <a:rPr lang="en-US" sz="900" b="1" dirty="0">
-                <a:solidFill>
-                  <a:srgbClr val="9D174D"/>
-                </a:solidFill>
-                <a:latin typeface="Trebuchet MS" pitchFamily="34" charset="0"/>
-                <a:ea typeface="Trebuchet MS" pitchFamily="34" charset="-122"/>
-                <a:cs typeface="Trebuchet MS" pitchFamily="34" charset="-120"/>
-              </a:rPr>
-              <a:t>e</a:t>
-            </a:r>
-            <a:endParaRPr lang="en-US" sz="900" dirty="0"/>
-          </a:p>
-        </p:txBody>
-      </p:sp>
-      <p:sp>
-        <p:nvSpPr>
-          <p:cNvPr id="47" name="Shape 45"/>
-          <p:cNvSpPr/>
-          <p:nvPr/>
-        </p:nvSpPr>
-        <p:spPr>
-          <a:xfrm>
-            <a:off x="5759577" y="4169664"/>
-            <a:ext cx="685800" cy="384048"/>
-          </a:xfrm>
-          <a:prstGeom prst="rect">
-            <a:avLst>
-              <a:gd name="adj" fmla="val 9524"/>
-            </a:avLst>
-          </a:prstGeom>
-          <a:solidFill>
-            <a:srgbClr val="FFFFFF"/>
-          </a:solidFill>
-          <a:ln w="12700">
-            <a:solidFill>
-              <a:srgbClr val="DB2777"/>
-            </a:solidFill>
-            <a:prstDash val="solid"/>
-          </a:ln>
-        </p:spPr>
-      </p:sp>
-      <p:sp>
-        <p:nvSpPr>
-          <p:cNvPr id="48" name="Text 46"/>
-          <p:cNvSpPr/>
-          <p:nvPr/>
-        </p:nvSpPr>
-        <p:spPr>
-          <a:xfrm>
-            <a:off x="5759577" y="4169664"/>
-            <a:ext cx="685800" cy="384048"/>
-          </a:xfrm>
-          <a:prstGeom prst="rect">
-            <a:avLst/>
-          </a:prstGeom>
-          <a:noFill/>
-          <a:ln/>
-        </p:spPr>
-        <p:txBody>
-          <a:bodyPr wrap="square" lIns="0" tIns="0" rIns="0" bIns="0" rtlCol="0" anchor="ctr"/>
-          <a:lstStyle/>
-          <a:p>
-            <a:pPr algn="ctr" indent="0" marL="0">
-              <a:buNone/>
-            </a:pPr>
-            <a:r>
-              <a:rPr lang="en-US" sz="900" b="1" dirty="0">
-                <a:solidFill>
-                  <a:srgbClr val="9D174D"/>
-                </a:solidFill>
-                <a:latin typeface="Trebuchet MS" pitchFamily="34" charset="0"/>
-                <a:ea typeface="Trebuchet MS" pitchFamily="34" charset="-122"/>
-                <a:cs typeface="Trebuchet MS" pitchFamily="34" charset="-120"/>
-              </a:rPr>
-              <a:t>v</a:t>
-            </a:r>
-            <a:endParaRPr lang="en-US" sz="900" dirty="0"/>
-          </a:p>
-        </p:txBody>
-      </p:sp>
-      <p:sp>
-        <p:nvSpPr>
-          <p:cNvPr id="49" name="Shape 47"/>
-          <p:cNvSpPr/>
-          <p:nvPr/>
-        </p:nvSpPr>
-        <p:spPr>
-          <a:xfrm>
-            <a:off x="6668262" y="4169664"/>
-            <a:ext cx="685800" cy="384048"/>
-          </a:xfrm>
-          <a:prstGeom prst="rect">
-            <a:avLst>
-              <a:gd name="adj" fmla="val 9524"/>
-            </a:avLst>
-          </a:prstGeom>
-          <a:solidFill>
-            <a:srgbClr val="FFFFFF"/>
-          </a:solidFill>
-          <a:ln w="12700">
-            <a:solidFill>
-              <a:srgbClr val="DB2777"/>
-            </a:solidFill>
-            <a:prstDash val="solid"/>
-          </a:ln>
-        </p:spPr>
-      </p:sp>
-      <p:sp>
-        <p:nvSpPr>
-          <p:cNvPr id="50" name="Text 48"/>
-          <p:cNvSpPr/>
-          <p:nvPr/>
-        </p:nvSpPr>
-        <p:spPr>
-          <a:xfrm>
-            <a:off x="6668262" y="4169664"/>
-            <a:ext cx="685800" cy="384048"/>
-          </a:xfrm>
-          <a:prstGeom prst="rect">
-            <a:avLst/>
-          </a:prstGeom>
-          <a:noFill/>
-          <a:ln/>
-        </p:spPr>
-        <p:txBody>
-          <a:bodyPr wrap="square" lIns="0" tIns="0" rIns="0" bIns="0" rtlCol="0" anchor="ctr"/>
-          <a:lstStyle/>
-          <a:p>
-            <a:pPr algn="ctr" indent="0" marL="0">
-              <a:buNone/>
-            </a:pPr>
-            <a:r>
-              <a:rPr lang="en-US" sz="900" b="1" dirty="0">
-                <a:solidFill>
-                  <a:srgbClr val="9D174D"/>
-                </a:solidFill>
-                <a:latin typeface="Trebuchet MS" pitchFamily="34" charset="0"/>
-                <a:ea typeface="Trebuchet MS" pitchFamily="34" charset="-122"/>
-                <a:cs typeface="Trebuchet MS" pitchFamily="34" charset="-120"/>
-              </a:rPr>
-              <a:t>eal</a:t>
-            </a:r>
-            <a:endParaRPr lang="en-US" sz="900" dirty="0"/>
-          </a:p>
-        </p:txBody>
-      </p:sp>
-      <p:sp>
-        <p:nvSpPr>
-          <p:cNvPr id="51" name="Shape 49"/>
-          <p:cNvSpPr/>
-          <p:nvPr/>
-        </p:nvSpPr>
-        <p:spPr>
-          <a:xfrm>
-            <a:off x="7576947" y="4169664"/>
-            <a:ext cx="685800" cy="384048"/>
-          </a:xfrm>
-          <a:prstGeom prst="rect">
-            <a:avLst>
-              <a:gd name="adj" fmla="val 9524"/>
-            </a:avLst>
-          </a:prstGeom>
-          <a:solidFill>
-            <a:srgbClr val="FFFFFF"/>
-          </a:solidFill>
-          <a:ln w="12700">
-            <a:solidFill>
-              <a:srgbClr val="DB2777"/>
-            </a:solidFill>
-            <a:prstDash val="solid"/>
-          </a:ln>
-        </p:spPr>
-      </p:sp>
-      <p:sp>
-        <p:nvSpPr>
-          <p:cNvPr id="52" name="Text 50"/>
-          <p:cNvSpPr/>
-          <p:nvPr/>
-        </p:nvSpPr>
-        <p:spPr>
-          <a:xfrm>
-            <a:off x="7576947" y="4169664"/>
-            <a:ext cx="685800" cy="384048"/>
-          </a:xfrm>
-          <a:prstGeom prst="rect">
-            <a:avLst/>
-          </a:prstGeom>
-          <a:noFill/>
-          <a:ln/>
-        </p:spPr>
-        <p:txBody>
-          <a:bodyPr wrap="square" lIns="0" tIns="0" rIns="0" bIns="0" rtlCol="0" anchor="ctr"/>
-          <a:lstStyle/>
-          <a:p>
-            <a:pPr algn="ctr" indent="0" marL="0">
-              <a:buNone/>
-            </a:pPr>
-            <a:r>
-              <a:rPr lang="en-US" sz="900" b="1" dirty="0">
-                <a:solidFill>
-                  <a:srgbClr val="9D174D"/>
-                </a:solidFill>
-                <a:latin typeface="Trebuchet MS" pitchFamily="34" charset="0"/>
-                <a:ea typeface="Trebuchet MS" pitchFamily="34" charset="-122"/>
-                <a:cs typeface="Trebuchet MS" pitchFamily="34" charset="-120"/>
-              </a:rPr>
-              <a:t>ed</a:t>
-            </a:r>
-            <a:endParaRPr lang="en-US" sz="900" dirty="0"/>
-          </a:p>
-        </p:txBody>
-      </p:sp>
-      <p:sp>
-        <p:nvSpPr>
-          <p:cNvPr id="53" name="Text 51"/>
-          <p:cNvSpPr/>
-          <p:nvPr/>
-        </p:nvSpPr>
-        <p:spPr>
-          <a:xfrm>
-            <a:off x="7576947" y="4572000"/>
-            <a:ext cx="685800" cy="219456"/>
-          </a:xfrm>
-          <a:prstGeom prst="rect">
-            <a:avLst/>
-          </a:prstGeom>
-          <a:noFill/>
-          <a:ln/>
-        </p:spPr>
-        <p:txBody>
-          <a:bodyPr wrap="square" lIns="0" tIns="0" rIns="0" bIns="0" rtlCol="0" anchor="t"/>
-          <a:lstStyle/>
-          <a:p>
-            <a:pPr algn="ctr" indent="0" marL="0">
-              <a:buNone/>
-            </a:pPr>
-            <a:r>
-              <a:rPr lang="en-US" sz="750" i="1" dirty="0">
-                <a:solidFill>
-                  <a:srgbClr val="94A3B8"/>
-                </a:solidFill>
-                <a:latin typeface="Calibri" pitchFamily="34" charset="0"/>
-                <a:ea typeface="Calibri" pitchFamily="34" charset="-122"/>
-                <a:cs typeface="Calibri" pitchFamily="34" charset="-120"/>
-              </a:rPr>
-              <a:t>/d/</a:t>
-            </a:r>
-            <a:endParaRPr lang="en-US" sz="750" dirty="0"/>
           </a:p>
         </p:txBody>
       </p:sp>
@@ -16930,7 +17236,7 @@
                 <a:ea typeface="Calibri" pitchFamily="34" charset="-122"/>
                 <a:cs typeface="Calibri" pitchFamily="34" charset="-120"/>
               </a:rPr>
-              <a:t>Word Labs  •  wordlabs.app  •  Root: 'reveal' = uncover or show something hidden</a:t>
+              <a:t>Word Labs  •  wordlabs.app  •  Root: 'reveal' = to uncover or show hidden</a:t>
             </a:r>
             <a:endParaRPr lang="en-US" sz="800" dirty="0"/>
           </a:p>
@@ -17570,7 +17876,7 @@
                 <a:ea typeface="Calibri" pitchFamily="34" charset="-122"/>
                 <a:cs typeface="Calibri" pitchFamily="34" charset="-120"/>
               </a:rPr>
-              <a:t>Word Labs  •  wordlabs.app  •  Root: 'reveal' = uncover or show something hidden</a:t>
+              <a:t>Word Labs  •  wordlabs.app  •  Root: 'reveal' = to uncover or show hidden</a:t>
             </a:r>
             <a:endParaRPr lang="en-US" sz="800" dirty="0"/>
           </a:p>
@@ -17699,7 +18005,7 @@
                 <a:ea typeface="Calibri" pitchFamily="34" charset="-122"/>
                 <a:cs typeface="Calibri" pitchFamily="34" charset="-120"/>
               </a:rPr>
-              <a:t>reveals</a:t>
+              <a:t>revealed</a:t>
             </a:r>
             <a:pPr algn="l" indent="0" marL="0">
               <a:buNone/>
@@ -17713,7 +18019,7 @@
                 <a:ea typeface="Calibri" pitchFamily="34" charset="-122"/>
                 <a:cs typeface="Calibri" pitchFamily="34" charset="-120"/>
               </a:rPr>
-              <a:t> in the story were surprising; the </a:t>
+              <a:t> letter was </a:t>
             </a:r>
             <a:pPr algn="l" indent="0" marL="0">
               <a:buNone/>
@@ -17730,7 +18036,7 @@
                 <a:ea typeface="Calibri" pitchFamily="34" charset="-122"/>
                 <a:cs typeface="Calibri" pitchFamily="34" charset="-120"/>
               </a:rPr>
-              <a:t>revealer</a:t>
+              <a:t>self-revealing</a:t>
             </a:r>
             <a:pPr algn="l" indent="0" marL="0">
               <a:buNone/>
@@ -17744,7 +18050,7 @@
                 <a:ea typeface="Calibri" pitchFamily="34" charset="-122"/>
                 <a:cs typeface="Calibri" pitchFamily="34" charset="-120"/>
               </a:rPr>
-              <a:t> of the secret was </a:t>
+              <a:t>, and the </a:t>
             </a:r>
             <a:pPr algn="l" indent="0" marL="0">
               <a:buNone/>
@@ -17761,7 +18067,7 @@
                 <a:ea typeface="Calibri" pitchFamily="34" charset="-122"/>
                 <a:cs typeface="Calibri" pitchFamily="34" charset="-120"/>
               </a:rPr>
-              <a:t>revealing</a:t>
+              <a:t>revealer</a:t>
             </a:r>
             <a:pPr algn="l" indent="0" marL="0">
               <a:buNone/>
@@ -17775,7 +18081,7 @@
                 <a:ea typeface="Calibri" pitchFamily="34" charset="-122"/>
                 <a:cs typeface="Calibri" pitchFamily="34" charset="-120"/>
               </a:rPr>
-              <a:t> clues all along.</a:t>
+              <a:t> explained its secrets to the whole school.</a:t>
             </a:r>
             <a:endParaRPr lang="en-US" sz="1800" dirty="0"/>
           </a:p>
@@ -17930,7 +18236,7 @@
                 <a:ea typeface="Trebuchet MS" pitchFamily="34" charset="-122"/>
                 <a:cs typeface="Trebuchet MS" pitchFamily="34" charset="-120"/>
               </a:rPr>
-              <a:t>reveals</a:t>
+              <a:t>revealed</a:t>
             </a:r>
             <a:endParaRPr lang="en-US" sz="1400" dirty="0"/>
           </a:p>
@@ -18058,7 +18364,7 @@
                 <a:ea typeface="Trebuchet MS" pitchFamily="34" charset="-122"/>
                 <a:cs typeface="Trebuchet MS" pitchFamily="34" charset="-120"/>
               </a:rPr>
-              <a:t>revealer</a:t>
+              <a:t>self-revealing</a:t>
             </a:r>
             <a:endParaRPr lang="en-US" sz="1400" dirty="0"/>
           </a:p>
@@ -18186,7 +18492,7 @@
                 <a:ea typeface="Trebuchet MS" pitchFamily="34" charset="-122"/>
                 <a:cs typeface="Trebuchet MS" pitchFamily="34" charset="-120"/>
               </a:rPr>
-              <a:t>revealing</a:t>
+              <a:t>revealer</a:t>
             </a:r>
             <a:endParaRPr lang="en-US" sz="1400" dirty="0"/>
           </a:p>
@@ -18517,7 +18823,7 @@
                 <a:ea typeface="Calibri" pitchFamily="34" charset="-122"/>
                 <a:cs typeface="Calibri" pitchFamily="34" charset="-120"/>
               </a:rPr>
-              <a:t>Word Labs  •  wordlabs.app  •  Root: 'reveal' = uncover or show something hidden</a:t>
+              <a:t>Word Labs  •  wordlabs.app  •  Root: 'reveal' = to uncover or show hidden</a:t>
             </a:r>
             <a:endParaRPr lang="en-US" sz="800" dirty="0"/>
           </a:p>
@@ -18656,7 +18962,7 @@
                 <a:ea typeface="Trebuchet MS" pitchFamily="34" charset="-122"/>
                 <a:cs typeface="Trebuchet MS" pitchFamily="34" charset="-120"/>
               </a:rPr>
-              <a:t>reveals</a:t>
+              <a:t>revealed</a:t>
             </a:r>
             <a:endParaRPr lang="en-US" sz="2800" dirty="0"/>
           </a:p>
@@ -19344,7 +19650,7 @@
                 <a:ea typeface="Calibri" pitchFamily="34" charset="-122"/>
                 <a:cs typeface="Calibri" pitchFamily="34" charset="-120"/>
               </a:rPr>
-              <a:t>Word Labs  •  wordlabs.app  •  Root: 'reveal' = uncover or show something hidden</a:t>
+              <a:t>Word Labs  •  wordlabs.app  •  Root: 'reveal' = to uncover or show hidden</a:t>
             </a:r>
             <a:endParaRPr lang="en-US" sz="800" dirty="0"/>
           </a:p>
@@ -19483,7 +19789,7 @@
                 <a:ea typeface="Trebuchet MS" pitchFamily="34" charset="-122"/>
                 <a:cs typeface="Trebuchet MS" pitchFamily="34" charset="-120"/>
               </a:rPr>
-              <a:t>reveals</a:t>
+              <a:t>revealed</a:t>
             </a:r>
             <a:endParaRPr lang="en-US" sz="2800" dirty="0"/>
           </a:p>
@@ -19661,7 +19967,7 @@
                 <a:ea typeface="Calibri" pitchFamily="34" charset="-122"/>
                 <a:cs typeface="Calibri" pitchFamily="34" charset="-120"/>
               </a:rPr>
-              <a:t>uncover or show something hidden</a:t>
+              <a:t>to uncover or show hidden</a:t>
             </a:r>
             <a:endParaRPr lang="en-US" sz="850" dirty="0"/>
           </a:p>
@@ -19734,7 +20040,7 @@
                 <a:ea typeface="Trebuchet MS" pitchFamily="34" charset="-122"/>
                 <a:cs typeface="Trebuchet MS" pitchFamily="34" charset="-120"/>
               </a:rPr>
-              <a:t>s</a:t>
+              <a:t>ed</a:t>
             </a:r>
             <a:endParaRPr lang="en-US" sz="1300" dirty="0"/>
           </a:p>
@@ -19773,7 +20079,7 @@
                 <a:ea typeface="Calibri" pitchFamily="34" charset="-122"/>
                 <a:cs typeface="Calibri" pitchFamily="34" charset="-120"/>
               </a:rPr>
-              <a:t>more than one, or third person singular verb</a:t>
+              <a:t>happened in the past</a:t>
             </a:r>
             <a:endParaRPr lang="en-US" sz="850" dirty="0"/>
           </a:p>
@@ -20329,7 +20635,7 @@
                 <a:ea typeface="Calibri" pitchFamily="34" charset="-122"/>
                 <a:cs typeface="Calibri" pitchFamily="34" charset="-120"/>
               </a:rPr>
-              <a:t>Word Labs  •  wordlabs.app  •  Root: 'reveal' = uncover or show something hidden</a:t>
+              <a:t>Word Labs  •  wordlabs.app  •  Root: 'reveal' = to uncover or show hidden</a:t>
             </a:r>
             <a:endParaRPr lang="en-US" sz="800" dirty="0"/>
           </a:p>
@@ -20468,7 +20774,7 @@
                 <a:ea typeface="Trebuchet MS" pitchFamily="34" charset="-122"/>
                 <a:cs typeface="Trebuchet MS" pitchFamily="34" charset="-120"/>
               </a:rPr>
-              <a:t>reveals</a:t>
+              <a:t>revealed</a:t>
             </a:r>
             <a:endParaRPr lang="en-US" sz="2800" dirty="0"/>
           </a:p>
@@ -20646,7 +20952,7 @@
                 <a:ea typeface="Calibri" pitchFamily="34" charset="-122"/>
                 <a:cs typeface="Calibri" pitchFamily="34" charset="-120"/>
               </a:rPr>
-              <a:t>uncover or show something hidden</a:t>
+              <a:t>to uncover or show hidden</a:t>
             </a:r>
             <a:endParaRPr lang="en-US" sz="850" dirty="0"/>
           </a:p>
@@ -20719,7 +21025,7 @@
                 <a:ea typeface="Trebuchet MS" pitchFamily="34" charset="-122"/>
                 <a:cs typeface="Trebuchet MS" pitchFamily="34" charset="-120"/>
               </a:rPr>
-              <a:t>s</a:t>
+              <a:t>ed</a:t>
             </a:r>
             <a:endParaRPr lang="en-US" sz="1300" dirty="0"/>
           </a:p>
@@ -20758,7 +21064,7 @@
                 <a:ea typeface="Calibri" pitchFamily="34" charset="-122"/>
                 <a:cs typeface="Calibri" pitchFamily="34" charset="-120"/>
               </a:rPr>
-              <a:t>more than one, or third person singular verb</a:t>
+              <a:t>happened in the past</a:t>
             </a:r>
             <a:endParaRPr lang="en-US" sz="850" dirty="0"/>
           </a:p>
@@ -21022,7 +21328,7 @@
                 <a:ea typeface="Trebuchet MS" pitchFamily="34" charset="-122"/>
                 <a:cs typeface="Trebuchet MS" pitchFamily="34" charset="-120"/>
               </a:rPr>
-              <a:t>veals</a:t>
+              <a:t>vealed</a:t>
             </a:r>
             <a:endParaRPr lang="en-US" sz="1400" dirty="0"/>
           </a:p>
@@ -21446,7 +21752,7 @@
                 <a:ea typeface="Calibri" pitchFamily="34" charset="-122"/>
                 <a:cs typeface="Calibri" pitchFamily="34" charset="-120"/>
               </a:rPr>
-              <a:t>Word Labs  •  wordlabs.app  •  Root: 'reveal' = uncover or show something hidden</a:t>
+              <a:t>Word Labs  •  wordlabs.app  •  Root: 'reveal' = to uncover or show hidden</a:t>
             </a:r>
             <a:endParaRPr lang="en-US" sz="800" dirty="0"/>
           </a:p>
@@ -21585,7 +21891,7 @@
                 <a:ea typeface="Trebuchet MS" pitchFamily="34" charset="-122"/>
                 <a:cs typeface="Trebuchet MS" pitchFamily="34" charset="-120"/>
               </a:rPr>
-              <a:t>reveals</a:t>
+              <a:t>revealed</a:t>
             </a:r>
             <a:endParaRPr lang="en-US" sz="2800" dirty="0"/>
           </a:p>
@@ -21763,7 +22069,7 @@
                 <a:ea typeface="Calibri" pitchFamily="34" charset="-122"/>
                 <a:cs typeface="Calibri" pitchFamily="34" charset="-120"/>
               </a:rPr>
-              <a:t>uncover or show something hidden</a:t>
+              <a:t>to uncover or show hidden</a:t>
             </a:r>
             <a:endParaRPr lang="en-US" sz="850" dirty="0"/>
           </a:p>
@@ -21836,7 +22142,7 @@
                 <a:ea typeface="Trebuchet MS" pitchFamily="34" charset="-122"/>
                 <a:cs typeface="Trebuchet MS" pitchFamily="34" charset="-120"/>
               </a:rPr>
-              <a:t>s</a:t>
+              <a:t>ed</a:t>
             </a:r>
             <a:endParaRPr lang="en-US" sz="1300" dirty="0"/>
           </a:p>
@@ -21875,7 +22181,7 @@
                 <a:ea typeface="Calibri" pitchFamily="34" charset="-122"/>
                 <a:cs typeface="Calibri" pitchFamily="34" charset="-120"/>
               </a:rPr>
-              <a:t>more than one, or third person singular verb</a:t>
+              <a:t>happened in the past</a:t>
             </a:r>
             <a:endParaRPr lang="en-US" sz="850" dirty="0"/>
           </a:p>
@@ -22139,7 +22445,7 @@
                 <a:ea typeface="Trebuchet MS" pitchFamily="34" charset="-122"/>
                 <a:cs typeface="Trebuchet MS" pitchFamily="34" charset="-120"/>
               </a:rPr>
-              <a:t>veals</a:t>
+              <a:t>vealed</a:t>
             </a:r>
             <a:endParaRPr lang="en-US" sz="1400" dirty="0"/>
           </a:p>
@@ -22220,11 +22526,11 @@
         <p:spPr>
           <a:xfrm>
             <a:off x="1874520" y="4096512"/>
-            <a:ext cx="6903720" cy="804672"/>
+            <a:ext cx="6903720" cy="658368"/>
           </a:xfrm>
           <a:prstGeom prst="rect">
             <a:avLst>
-              <a:gd name="adj" fmla="val 6818"/>
+              <a:gd name="adj" fmla="val 8333"/>
             </a:avLst>
           </a:prstGeom>
           <a:solidFill>
@@ -22246,12 +22552,12 @@
         </p:nvSpPr>
         <p:spPr>
           <a:xfrm>
-            <a:off x="2427732" y="4169664"/>
-            <a:ext cx="685800" cy="384048"/>
+            <a:off x="2254649" y="4169664"/>
+            <a:ext cx="685800" cy="475488"/>
           </a:xfrm>
           <a:prstGeom prst="rect">
             <a:avLst>
-              <a:gd name="adj" fmla="val 9524"/>
+              <a:gd name="adj" fmla="val 7692"/>
             </a:avLst>
           </a:prstGeom>
           <a:solidFill>
@@ -22273,8 +22579,8 @@
         </p:nvSpPr>
         <p:spPr>
           <a:xfrm>
-            <a:off x="2427732" y="4169664"/>
-            <a:ext cx="685800" cy="384048"/>
+            <a:off x="2254649" y="4169664"/>
+            <a:ext cx="685800" cy="475488"/>
           </a:xfrm>
           <a:prstGeom prst="rect">
             <a:avLst/>
@@ -22312,12 +22618,12 @@
         </p:nvSpPr>
         <p:spPr>
           <a:xfrm>
-            <a:off x="3639312" y="4169664"/>
-            <a:ext cx="685800" cy="384048"/>
+            <a:off x="3293146" y="4169664"/>
+            <a:ext cx="685800" cy="475488"/>
           </a:xfrm>
           <a:prstGeom prst="rect">
             <a:avLst>
-              <a:gd name="adj" fmla="val 9524"/>
+              <a:gd name="adj" fmla="val 7692"/>
             </a:avLst>
           </a:prstGeom>
           <a:solidFill>
@@ -22339,8 +22645,8 @@
         </p:nvSpPr>
         <p:spPr>
           <a:xfrm>
-            <a:off x="3639312" y="4169664"/>
-            <a:ext cx="685800" cy="384048"/>
+            <a:off x="3293146" y="4169664"/>
+            <a:ext cx="685800" cy="475488"/>
           </a:xfrm>
           <a:prstGeom prst="rect">
             <a:avLst/>
@@ -22378,12 +22684,12 @@
         </p:nvSpPr>
         <p:spPr>
           <a:xfrm>
-            <a:off x="4850892" y="4169664"/>
-            <a:ext cx="685800" cy="384048"/>
+            <a:off x="4331643" y="4169664"/>
+            <a:ext cx="685800" cy="475488"/>
           </a:xfrm>
           <a:prstGeom prst="rect">
             <a:avLst>
-              <a:gd name="adj" fmla="val 9524"/>
+              <a:gd name="adj" fmla="val 7692"/>
             </a:avLst>
           </a:prstGeom>
           <a:solidFill>
@@ -22405,8 +22711,8 @@
         </p:nvSpPr>
         <p:spPr>
           <a:xfrm>
-            <a:off x="4850892" y="4169664"/>
-            <a:ext cx="685800" cy="384048"/>
+            <a:off x="4331643" y="4169664"/>
+            <a:ext cx="685800" cy="475488"/>
           </a:xfrm>
           <a:prstGeom prst="rect">
             <a:avLst/>
@@ -22444,12 +22750,12 @@
         </p:nvSpPr>
         <p:spPr>
           <a:xfrm>
-            <a:off x="6062472" y="4169664"/>
-            <a:ext cx="685800" cy="384048"/>
+            <a:off x="5370141" y="4169664"/>
+            <a:ext cx="685800" cy="475488"/>
           </a:xfrm>
           <a:prstGeom prst="rect">
             <a:avLst>
-              <a:gd name="adj" fmla="val 9524"/>
+              <a:gd name="adj" fmla="val 7692"/>
             </a:avLst>
           </a:prstGeom>
           <a:solidFill>
@@ -22471,8 +22777,8 @@
         </p:nvSpPr>
         <p:spPr>
           <a:xfrm>
-            <a:off x="6062472" y="4169664"/>
-            <a:ext cx="685800" cy="384048"/>
+            <a:off x="5370141" y="4169664"/>
+            <a:ext cx="685800" cy="475488"/>
           </a:xfrm>
           <a:prstGeom prst="rect">
             <a:avLst/>
@@ -22496,7 +22802,7 @@
                 <a:ea typeface="Trebuchet MS" pitchFamily="34" charset="-122"/>
                 <a:cs typeface="Trebuchet MS" pitchFamily="34" charset="-120"/>
               </a:rPr>
-              <a:t>eal</a:t>
+              <a:t>ea</a:t>
             </a:r>
             <a:endParaRPr lang="en-US" sz="900" dirty="0"/>
           </a:p>
@@ -22510,12 +22816,12 @@
         </p:nvSpPr>
         <p:spPr>
           <a:xfrm>
-            <a:off x="7274052" y="4169664"/>
-            <a:ext cx="685800" cy="384048"/>
+            <a:off x="6408638" y="4169664"/>
+            <a:ext cx="685800" cy="475488"/>
           </a:xfrm>
           <a:prstGeom prst="rect">
             <a:avLst>
-              <a:gd name="adj" fmla="val 9524"/>
+              <a:gd name="adj" fmla="val 7692"/>
             </a:avLst>
           </a:prstGeom>
           <a:solidFill>
@@ -22537,8 +22843,8 @@
         </p:nvSpPr>
         <p:spPr>
           <a:xfrm>
-            <a:off x="7274052" y="4169664"/>
-            <a:ext cx="685800" cy="384048"/>
+            <a:off x="6408638" y="4169664"/>
+            <a:ext cx="685800" cy="475488"/>
           </a:xfrm>
           <a:prstGeom prst="rect">
             <a:avLst/>
@@ -22562,7 +22868,7 @@
                 <a:ea typeface="Trebuchet MS" pitchFamily="34" charset="-122"/>
                 <a:cs typeface="Trebuchet MS" pitchFamily="34" charset="-120"/>
               </a:rPr>
-              <a:t>s</a:t>
+              <a:t>l</a:t>
             </a:r>
             <a:endParaRPr lang="en-US" sz="900" dirty="0"/>
           </a:p>
@@ -22570,40 +22876,67 @@
       </p:sp>
       <p:sp>
         <p:nvSpPr>
-          <p:cNvPr id="43" name="Text 41"/>
-          <p:cNvSpPr/>
-          <p:nvPr/>
-        </p:nvSpPr>
-        <p:spPr>
-          <a:xfrm>
-            <a:off x="7274052" y="4572000"/>
-            <a:ext cx="685800" cy="219456"/>
-          </a:xfrm>
-          <a:prstGeom prst="rect">
-            <a:avLst/>
-          </a:prstGeom>
-          <a:noFill/>
-          <a:ln/>
-        </p:spPr>
-        <p:txBody>
-          <a:bodyPr wrap="square" lIns="0" tIns="0" rIns="0" bIns="0" rtlCol="0" anchor="t"/>
-          <a:lstStyle/>
-          <a:p>
-            <a:pPr algn="ctr" indent="0" marL="0">
-              <a:buNone/>
-            </a:pPr>
-            <a:r>
-              <a:rPr lang="en-US" sz="750" i="1" dirty="0">
-                <a:solidFill>
-                  <a:srgbClr val="94A3B8"/>
-                </a:solidFill>
-                <a:latin typeface="Calibri" pitchFamily="34" charset="0"/>
-                <a:ea typeface="Calibri" pitchFamily="34" charset="-122"/>
-                <a:cs typeface="Calibri" pitchFamily="34" charset="-120"/>
-              </a:rPr>
-              <a:t>/z/</a:t>
-            </a:r>
-            <a:endParaRPr lang="en-US" sz="750" dirty="0"/>
+          <p:cNvPr id="43" name="Shape 41"/>
+          <p:cNvSpPr/>
+          <p:nvPr/>
+        </p:nvSpPr>
+        <p:spPr>
+          <a:xfrm>
+            <a:off x="7447135" y="4169664"/>
+            <a:ext cx="685800" cy="475488"/>
+          </a:xfrm>
+          <a:prstGeom prst="rect">
+            <a:avLst>
+              <a:gd name="adj" fmla="val 7692"/>
+            </a:avLst>
+          </a:prstGeom>
+          <a:solidFill>
+            <a:srgbClr val="FFFFFF"/>
+          </a:solidFill>
+          <a:ln w="12700">
+            <a:solidFill>
+              <a:srgbClr val="DB2777"/>
+            </a:solidFill>
+            <a:prstDash val="solid"/>
+          </a:ln>
+        </p:spPr>
+      </p:sp>
+      <p:sp>
+        <p:nvSpPr>
+          <p:cNvPr id="44" name="Text 42"/>
+          <p:cNvSpPr/>
+          <p:nvPr/>
+        </p:nvSpPr>
+        <p:spPr>
+          <a:xfrm>
+            <a:off x="7447135" y="4169664"/>
+            <a:ext cx="685800" cy="475488"/>
+          </a:xfrm>
+          <a:prstGeom prst="rect">
+            <a:avLst/>
+          </a:prstGeom>
+          <a:noFill/>
+          <a:ln/>
+        </p:spPr>
+        <p:txBody>
+          <a:bodyPr wrap="square" lIns="0" tIns="0" rIns="0" bIns="0" rtlCol="0" anchor="ctr"/>
+          <a:lstStyle/>
+          <a:p>
+            <a:pPr algn="ctr" indent="0" marL="0">
+              <a:buNone/>
+            </a:pPr>
+            <a:r>
+              <a:rPr lang="en-US" sz="900" b="1" dirty="0">
+                <a:solidFill>
+                  <a:srgbClr val="9D174D"/>
+                </a:solidFill>
+                <a:latin typeface="Trebuchet MS" pitchFamily="34" charset="0"/>
+                <a:ea typeface="Trebuchet MS" pitchFamily="34" charset="-122"/>
+                <a:cs typeface="Trebuchet MS" pitchFamily="34" charset="-120"/>
+              </a:rPr>
+              <a:t>ed</a:t>
+            </a:r>
+            <a:endParaRPr lang="en-US" sz="900" dirty="0"/>
           </a:p>
         </p:txBody>
       </p:sp>
@@ -22893,7 +23226,7 @@
                 <a:ea typeface="Calibri" pitchFamily="34" charset="-122"/>
                 <a:cs typeface="Calibri" pitchFamily="34" charset="-120"/>
               </a:rPr>
-              <a:t>Word Labs  •  wordlabs.app  •  Root: 'reveal' = uncover or show something hidden</a:t>
+              <a:t>Word Labs  •  wordlabs.app  •  Root: 'reveal' = to uncover or show hidden</a:t>
             </a:r>
             <a:endParaRPr lang="en-US" sz="800" dirty="0"/>
           </a:p>
@@ -23032,7 +23365,7 @@
                 <a:ea typeface="Trebuchet MS" pitchFamily="34" charset="-122"/>
                 <a:cs typeface="Trebuchet MS" pitchFamily="34" charset="-120"/>
               </a:rPr>
-              <a:t>revealer</a:t>
+              <a:t>self-revealing</a:t>
             </a:r>
             <a:endParaRPr lang="en-US" sz="2800" dirty="0"/>
           </a:p>
@@ -23720,7 +24053,7 @@
                 <a:ea typeface="Calibri" pitchFamily="34" charset="-122"/>
                 <a:cs typeface="Calibri" pitchFamily="34" charset="-120"/>
               </a:rPr>
-              <a:t>Word Labs  •  wordlabs.app  •  Root: 'reveal' = uncover or show something hidden</a:t>
+              <a:t>Word Labs  •  wordlabs.app  •  Root: 'reveal' = to uncover or show hidden</a:t>
             </a:r>
             <a:endParaRPr lang="en-US" sz="800" dirty="0"/>
           </a:p>
@@ -23859,7 +24192,7 @@
                 <a:ea typeface="Trebuchet MS" pitchFamily="34" charset="-122"/>
                 <a:cs typeface="Trebuchet MS" pitchFamily="34" charset="-120"/>
               </a:rPr>
-              <a:t>revealer</a:t>
+              <a:t>self-revealing</a:t>
             </a:r>
             <a:endParaRPr lang="en-US" sz="2800" dirty="0"/>
           </a:p>
@@ -23939,7 +24272,7 @@
         </p:nvSpPr>
         <p:spPr>
           <a:xfrm>
-            <a:off x="2938272" y="2258568"/>
+            <a:off x="2221992" y="2258568"/>
             <a:ext cx="1828800" cy="292608"/>
           </a:xfrm>
           <a:prstGeom prst="rect">
@@ -23948,11 +24281,11 @@
             </a:avLst>
           </a:prstGeom>
           <a:solidFill>
-            <a:srgbClr val="CCFBF1"/>
+            <a:srgbClr val="DDD6FE"/>
           </a:solidFill>
           <a:ln w="19050">
             <a:solidFill>
-              <a:srgbClr val="0D9488"/>
+              <a:srgbClr val="7C3AED"/>
             </a:solidFill>
             <a:prstDash val="solid"/>
           </a:ln>
@@ -23973,7 +24306,7 @@
         </p:nvSpPr>
         <p:spPr>
           <a:xfrm>
-            <a:off x="2938272" y="2258568"/>
+            <a:off x="2221992" y="2258568"/>
             <a:ext cx="1828800" cy="292608"/>
           </a:xfrm>
           <a:prstGeom prst="rect">
@@ -23992,13 +24325,13 @@
             <a:r>
               <a:rPr lang="en-US" sz="1300" b="1" dirty="0">
                 <a:solidFill>
-                  <a:srgbClr val="0F766E"/>
+                  <a:srgbClr val="4C1D95"/>
                 </a:solidFill>
                 <a:latin typeface="Trebuchet MS" pitchFamily="34" charset="0"/>
                 <a:ea typeface="Trebuchet MS" pitchFamily="34" charset="-122"/>
                 <a:cs typeface="Trebuchet MS" pitchFamily="34" charset="-120"/>
               </a:rPr>
-              <a:t>reveal</a:t>
+              <a:t>self</a:t>
             </a:r>
             <a:endParaRPr lang="en-US" sz="1300" dirty="0"/>
           </a:p>
@@ -24012,7 +24345,7 @@
         </p:nvSpPr>
         <p:spPr>
           <a:xfrm>
-            <a:off x="2938272" y="2569464"/>
+            <a:off x="2221992" y="2569464"/>
             <a:ext cx="1828800" cy="201168"/>
           </a:xfrm>
           <a:prstGeom prst="rect">
@@ -24037,7 +24370,7 @@
                 <a:ea typeface="Calibri" pitchFamily="34" charset="-122"/>
                 <a:cs typeface="Calibri" pitchFamily="34" charset="-120"/>
               </a:rPr>
-              <a:t>uncover or show something hidden</a:t>
+              <a:t>by or about oneself</a:t>
             </a:r>
             <a:endParaRPr lang="en-US" sz="850" dirty="0"/>
           </a:p>
@@ -24051,7 +24384,7 @@
         </p:nvSpPr>
         <p:spPr>
           <a:xfrm>
-            <a:off x="5803392" y="2258568"/>
+            <a:off x="4370832" y="2258568"/>
             <a:ext cx="1828800" cy="292608"/>
           </a:xfrm>
           <a:prstGeom prst="rect">
@@ -24060,11 +24393,11 @@
             </a:avLst>
           </a:prstGeom>
           <a:solidFill>
-            <a:srgbClr val="FCE7F3"/>
+            <a:srgbClr val="CCFBF1"/>
           </a:solidFill>
           <a:ln w="19050">
             <a:solidFill>
-              <a:srgbClr val="DB2777"/>
+              <a:srgbClr val="0D9488"/>
             </a:solidFill>
             <a:prstDash val="solid"/>
           </a:ln>
@@ -24085,7 +24418,7 @@
         </p:nvSpPr>
         <p:spPr>
           <a:xfrm>
-            <a:off x="5803392" y="2258568"/>
+            <a:off x="4370832" y="2258568"/>
             <a:ext cx="1828800" cy="292608"/>
           </a:xfrm>
           <a:prstGeom prst="rect">
@@ -24104,13 +24437,13 @@
             <a:r>
               <a:rPr lang="en-US" sz="1300" b="1" dirty="0">
                 <a:solidFill>
-                  <a:srgbClr val="9D174D"/>
+                  <a:srgbClr val="0F766E"/>
                 </a:solidFill>
                 <a:latin typeface="Trebuchet MS" pitchFamily="34" charset="0"/>
                 <a:ea typeface="Trebuchet MS" pitchFamily="34" charset="-122"/>
                 <a:cs typeface="Trebuchet MS" pitchFamily="34" charset="-120"/>
               </a:rPr>
-              <a:t>er</a:t>
+              <a:t>reveal</a:t>
             </a:r>
             <a:endParaRPr lang="en-US" sz="1300" dirty="0"/>
           </a:p>
@@ -24124,7 +24457,7 @@
         </p:nvSpPr>
         <p:spPr>
           <a:xfrm>
-            <a:off x="5803392" y="2569464"/>
+            <a:off x="4370832" y="2569464"/>
             <a:ext cx="1828800" cy="201168"/>
           </a:xfrm>
           <a:prstGeom prst="rect">
@@ -24149,7 +24482,7 @@
                 <a:ea typeface="Calibri" pitchFamily="34" charset="-122"/>
                 <a:cs typeface="Calibri" pitchFamily="34" charset="-120"/>
               </a:rPr>
-              <a:t>a person or thing that does something</a:t>
+              <a:t>to uncover or show hidden</a:t>
             </a:r>
             <a:endParaRPr lang="en-US" sz="850" dirty="0"/>
           </a:p>
@@ -24158,6 +24491,118 @@
       <p:sp>
         <p:nvSpPr>
           <p:cNvPr id="22" name="Shape 20"/>
+          <p:cNvSpPr/>
+          <p:nvPr/>
+        </p:nvSpPr>
+        <p:spPr>
+          <a:xfrm>
+            <a:off x="6519672" y="2258568"/>
+            <a:ext cx="1828800" cy="292608"/>
+          </a:xfrm>
+          <a:prstGeom prst="rect">
+            <a:avLst>
+              <a:gd name="adj" fmla="val 25000"/>
+            </a:avLst>
+          </a:prstGeom>
+          <a:solidFill>
+            <a:srgbClr val="FCE7F3"/>
+          </a:solidFill>
+          <a:ln w="19050">
+            <a:solidFill>
+              <a:srgbClr val="DB2777"/>
+            </a:solidFill>
+            <a:prstDash val="solid"/>
+          </a:ln>
+          <a:effectLst>
+            <a:outerShdw sx="100000" sy="100000" kx="0" ky="0" algn="bl" rotWithShape="0" blurRad="101600" dist="38100" dir="8100000">
+              <a:srgbClr val="000000">
+                <a:alpha val="12000"/>
+              </a:srgbClr>
+            </a:outerShdw>
+          </a:effectLst>
+        </p:spPr>
+      </p:sp>
+      <p:sp>
+        <p:nvSpPr>
+          <p:cNvPr id="23" name="Text 21"/>
+          <p:cNvSpPr/>
+          <p:nvPr/>
+        </p:nvSpPr>
+        <p:spPr>
+          <a:xfrm>
+            <a:off x="6519672" y="2258568"/>
+            <a:ext cx="1828800" cy="292608"/>
+          </a:xfrm>
+          <a:prstGeom prst="rect">
+            <a:avLst/>
+          </a:prstGeom>
+          <a:noFill/>
+          <a:ln/>
+        </p:spPr>
+        <p:txBody>
+          <a:bodyPr wrap="square" lIns="0" tIns="0" rIns="0" bIns="0" rtlCol="0" anchor="ctr"/>
+          <a:lstStyle/>
+          <a:p>
+            <a:pPr algn="ctr" indent="0" marL="0">
+              <a:buNone/>
+            </a:pPr>
+            <a:r>
+              <a:rPr lang="en-US" sz="1300" b="1" dirty="0">
+                <a:solidFill>
+                  <a:srgbClr val="9D174D"/>
+                </a:solidFill>
+                <a:latin typeface="Trebuchet MS" pitchFamily="34" charset="0"/>
+                <a:ea typeface="Trebuchet MS" pitchFamily="34" charset="-122"/>
+                <a:cs typeface="Trebuchet MS" pitchFamily="34" charset="-120"/>
+              </a:rPr>
+              <a:t>ing</a:t>
+            </a:r>
+            <a:endParaRPr lang="en-US" sz="1300" dirty="0"/>
+          </a:p>
+        </p:txBody>
+      </p:sp>
+      <p:sp>
+        <p:nvSpPr>
+          <p:cNvPr id="24" name="Text 22"/>
+          <p:cNvSpPr/>
+          <p:nvPr/>
+        </p:nvSpPr>
+        <p:spPr>
+          <a:xfrm>
+            <a:off x="6519672" y="2569464"/>
+            <a:ext cx="1828800" cy="201168"/>
+          </a:xfrm>
+          <a:prstGeom prst="rect">
+            <a:avLst/>
+          </a:prstGeom>
+          <a:noFill/>
+          <a:ln/>
+        </p:spPr>
+        <p:txBody>
+          <a:bodyPr wrap="square" lIns="0" tIns="0" rIns="0" bIns="0" rtlCol="0" anchor="t"/>
+          <a:lstStyle/>
+          <a:p>
+            <a:pPr algn="ctr" indent="0" marL="0">
+              <a:buNone/>
+            </a:pPr>
+            <a:r>
+              <a:rPr lang="en-US" sz="850" dirty="0">
+                <a:solidFill>
+                  <a:srgbClr val="475569"/>
+                </a:solidFill>
+                <a:latin typeface="Calibri" pitchFamily="34" charset="0"/>
+                <a:ea typeface="Calibri" pitchFamily="34" charset="-122"/>
+                <a:cs typeface="Calibri" pitchFamily="34" charset="-120"/>
+              </a:rPr>
+              <a:t>action happening now</a:t>
+            </a:r>
+            <a:endParaRPr lang="en-US" sz="850" dirty="0"/>
+          </a:p>
+        </p:txBody>
+      </p:sp>
+      <p:sp>
+        <p:nvSpPr>
+          <p:cNvPr id="25" name="Shape 23"/>
           <p:cNvSpPr/>
           <p:nvPr/>
         </p:nvSpPr>
@@ -24184,7 +24629,7 @@
       </p:sp>
       <p:sp>
         <p:nvSpPr>
-          <p:cNvPr id="23" name="Text 21"/>
+          <p:cNvPr id="26" name="Text 24"/>
           <p:cNvSpPr/>
           <p:nvPr/>
         </p:nvSpPr>
@@ -24223,7 +24668,7 @@
       </p:sp>
       <p:sp>
         <p:nvSpPr>
-          <p:cNvPr id="24" name="Shape 22"/>
+          <p:cNvPr id="27" name="Shape 25"/>
           <p:cNvSpPr/>
           <p:nvPr/>
         </p:nvSpPr>
@@ -24250,7 +24695,7 @@
       </p:sp>
       <p:sp>
         <p:nvSpPr>
-          <p:cNvPr id="25" name="Text 23"/>
+          <p:cNvPr id="28" name="Text 26"/>
           <p:cNvSpPr/>
           <p:nvPr/>
         </p:nvSpPr>
@@ -24289,7 +24734,7 @@
       </p:sp>
       <p:sp>
         <p:nvSpPr>
-          <p:cNvPr id="26" name="Shape 24"/>
+          <p:cNvPr id="29" name="Shape 27"/>
           <p:cNvSpPr/>
           <p:nvPr/>
         </p:nvSpPr>
@@ -24316,7 +24761,7 @@
       </p:sp>
       <p:sp>
         <p:nvSpPr>
-          <p:cNvPr id="27" name="Text 25"/>
+          <p:cNvPr id="30" name="Text 28"/>
           <p:cNvSpPr/>
           <p:nvPr/>
         </p:nvSpPr>
@@ -24355,7 +24800,7 @@
       </p:sp>
       <p:sp>
         <p:nvSpPr>
-          <p:cNvPr id="28" name="Shape 26"/>
+          <p:cNvPr id="31" name="Shape 29"/>
           <p:cNvSpPr/>
           <p:nvPr/>
         </p:nvSpPr>
@@ -24382,7 +24827,7 @@
       </p:sp>
       <p:sp>
         <p:nvSpPr>
-          <p:cNvPr id="29" name="Text 27"/>
+          <p:cNvPr id="32" name="Text 30"/>
           <p:cNvSpPr/>
           <p:nvPr/>
         </p:nvSpPr>
@@ -24705,7 +25150,7 @@
                 <a:ea typeface="Calibri" pitchFamily="34" charset="-122"/>
                 <a:cs typeface="Calibri" pitchFamily="34" charset="-120"/>
               </a:rPr>
-              <a:t>Word Labs  •  wordlabs.app  •  Root: 'reveal' = uncover or show something hidden</a:t>
+              <a:t>Word Labs  •  wordlabs.app  •  Root: 'reveal' = to uncover or show hidden</a:t>
             </a:r>
             <a:endParaRPr lang="en-US" sz="800" dirty="0"/>
           </a:p>
@@ -24778,7 +25223,7 @@
                 <a:ea typeface="Trebuchet MS" pitchFamily="34" charset="-122"/>
                 <a:cs typeface="Trebuchet MS" pitchFamily="34" charset="-120"/>
               </a:rPr>
-              <a:t>We are learning that the root 'reveal' means 'uncover or show something hidden'.</a:t>
+              <a:t>We are learning that the root 'reveal' means 'to uncover or show hidden'.</a:t>
             </a:r>
             <a:endParaRPr lang="en-US" sz="2000" dirty="0"/>
           </a:p>
@@ -25424,7 +25869,7 @@
                 <a:ea typeface="Calibri" pitchFamily="34" charset="-122"/>
                 <a:cs typeface="Calibri" pitchFamily="34" charset="-120"/>
               </a:rPr>
-              <a:t>Word Labs  •  wordlabs.app  •  Root: 'reveal' = uncover or show something hidden</a:t>
+              <a:t>Word Labs  •  wordlabs.app  •  Root: 'reveal' = to uncover or show hidden</a:t>
             </a:r>
             <a:endParaRPr lang="en-US" sz="800" dirty="0"/>
           </a:p>
@@ -25563,7 +26008,7 @@
                 <a:ea typeface="Trebuchet MS" pitchFamily="34" charset="-122"/>
                 <a:cs typeface="Trebuchet MS" pitchFamily="34" charset="-120"/>
               </a:rPr>
-              <a:t>revealer</a:t>
+              <a:t>self-revealing</a:t>
             </a:r>
             <a:endParaRPr lang="en-US" sz="2800" dirty="0"/>
           </a:p>
@@ -25643,7 +26088,7 @@
         </p:nvSpPr>
         <p:spPr>
           <a:xfrm>
-            <a:off x="2938272" y="2258568"/>
+            <a:off x="2221992" y="2258568"/>
             <a:ext cx="1828800" cy="292608"/>
           </a:xfrm>
           <a:prstGeom prst="rect">
@@ -25652,11 +26097,11 @@
             </a:avLst>
           </a:prstGeom>
           <a:solidFill>
-            <a:srgbClr val="CCFBF1"/>
+            <a:srgbClr val="DDD6FE"/>
           </a:solidFill>
           <a:ln w="19050">
             <a:solidFill>
-              <a:srgbClr val="0D9488"/>
+              <a:srgbClr val="7C3AED"/>
             </a:solidFill>
             <a:prstDash val="solid"/>
           </a:ln>
@@ -25677,7 +26122,7 @@
         </p:nvSpPr>
         <p:spPr>
           <a:xfrm>
-            <a:off x="2938272" y="2258568"/>
+            <a:off x="2221992" y="2258568"/>
             <a:ext cx="1828800" cy="292608"/>
           </a:xfrm>
           <a:prstGeom prst="rect">
@@ -25696,13 +26141,13 @@
             <a:r>
               <a:rPr lang="en-US" sz="1300" b="1" dirty="0">
                 <a:solidFill>
-                  <a:srgbClr val="0F766E"/>
+                  <a:srgbClr val="4C1D95"/>
                 </a:solidFill>
                 <a:latin typeface="Trebuchet MS" pitchFamily="34" charset="0"/>
                 <a:ea typeface="Trebuchet MS" pitchFamily="34" charset="-122"/>
                 <a:cs typeface="Trebuchet MS" pitchFamily="34" charset="-120"/>
               </a:rPr>
-              <a:t>reveal</a:t>
+              <a:t>self</a:t>
             </a:r>
             <a:endParaRPr lang="en-US" sz="1300" dirty="0"/>
           </a:p>
@@ -25716,7 +26161,7 @@
         </p:nvSpPr>
         <p:spPr>
           <a:xfrm>
-            <a:off x="2938272" y="2569464"/>
+            <a:off x="2221992" y="2569464"/>
             <a:ext cx="1828800" cy="201168"/>
           </a:xfrm>
           <a:prstGeom prst="rect">
@@ -25741,7 +26186,7 @@
                 <a:ea typeface="Calibri" pitchFamily="34" charset="-122"/>
                 <a:cs typeface="Calibri" pitchFamily="34" charset="-120"/>
               </a:rPr>
-              <a:t>uncover or show something hidden</a:t>
+              <a:t>by or about oneself</a:t>
             </a:r>
             <a:endParaRPr lang="en-US" sz="850" dirty="0"/>
           </a:p>
@@ -25755,7 +26200,7 @@
         </p:nvSpPr>
         <p:spPr>
           <a:xfrm>
-            <a:off x="5803392" y="2258568"/>
+            <a:off x="4370832" y="2258568"/>
             <a:ext cx="1828800" cy="292608"/>
           </a:xfrm>
           <a:prstGeom prst="rect">
@@ -25764,11 +26209,11 @@
             </a:avLst>
           </a:prstGeom>
           <a:solidFill>
-            <a:srgbClr val="FCE7F3"/>
+            <a:srgbClr val="CCFBF1"/>
           </a:solidFill>
           <a:ln w="19050">
             <a:solidFill>
-              <a:srgbClr val="DB2777"/>
+              <a:srgbClr val="0D9488"/>
             </a:solidFill>
             <a:prstDash val="solid"/>
           </a:ln>
@@ -25789,7 +26234,7 @@
         </p:nvSpPr>
         <p:spPr>
           <a:xfrm>
-            <a:off x="5803392" y="2258568"/>
+            <a:off x="4370832" y="2258568"/>
             <a:ext cx="1828800" cy="292608"/>
           </a:xfrm>
           <a:prstGeom prst="rect">
@@ -25808,13 +26253,13 @@
             <a:r>
               <a:rPr lang="en-US" sz="1300" b="1" dirty="0">
                 <a:solidFill>
-                  <a:srgbClr val="9D174D"/>
+                  <a:srgbClr val="0F766E"/>
                 </a:solidFill>
                 <a:latin typeface="Trebuchet MS" pitchFamily="34" charset="0"/>
                 <a:ea typeface="Trebuchet MS" pitchFamily="34" charset="-122"/>
                 <a:cs typeface="Trebuchet MS" pitchFamily="34" charset="-120"/>
               </a:rPr>
-              <a:t>er</a:t>
+              <a:t>reveal</a:t>
             </a:r>
             <a:endParaRPr lang="en-US" sz="1300" dirty="0"/>
           </a:p>
@@ -25828,7 +26273,7 @@
         </p:nvSpPr>
         <p:spPr>
           <a:xfrm>
-            <a:off x="5803392" y="2569464"/>
+            <a:off x="4370832" y="2569464"/>
             <a:ext cx="1828800" cy="201168"/>
           </a:xfrm>
           <a:prstGeom prst="rect">
@@ -25853,7 +26298,7 @@
                 <a:ea typeface="Calibri" pitchFamily="34" charset="-122"/>
                 <a:cs typeface="Calibri" pitchFamily="34" charset="-120"/>
               </a:rPr>
-              <a:t>a person or thing that does something</a:t>
+              <a:t>to uncover or show hidden</a:t>
             </a:r>
             <a:endParaRPr lang="en-US" sz="850" dirty="0"/>
           </a:p>
@@ -25862,6 +26307,118 @@
       <p:sp>
         <p:nvSpPr>
           <p:cNvPr id="22" name="Shape 20"/>
+          <p:cNvSpPr/>
+          <p:nvPr/>
+        </p:nvSpPr>
+        <p:spPr>
+          <a:xfrm>
+            <a:off x="6519672" y="2258568"/>
+            <a:ext cx="1828800" cy="292608"/>
+          </a:xfrm>
+          <a:prstGeom prst="rect">
+            <a:avLst>
+              <a:gd name="adj" fmla="val 25000"/>
+            </a:avLst>
+          </a:prstGeom>
+          <a:solidFill>
+            <a:srgbClr val="FCE7F3"/>
+          </a:solidFill>
+          <a:ln w="19050">
+            <a:solidFill>
+              <a:srgbClr val="DB2777"/>
+            </a:solidFill>
+            <a:prstDash val="solid"/>
+          </a:ln>
+          <a:effectLst>
+            <a:outerShdw sx="100000" sy="100000" kx="0" ky="0" algn="bl" rotWithShape="0" blurRad="101600" dist="38100" dir="8100000">
+              <a:srgbClr val="000000">
+                <a:alpha val="12000"/>
+              </a:srgbClr>
+            </a:outerShdw>
+          </a:effectLst>
+        </p:spPr>
+      </p:sp>
+      <p:sp>
+        <p:nvSpPr>
+          <p:cNvPr id="23" name="Text 21"/>
+          <p:cNvSpPr/>
+          <p:nvPr/>
+        </p:nvSpPr>
+        <p:spPr>
+          <a:xfrm>
+            <a:off x="6519672" y="2258568"/>
+            <a:ext cx="1828800" cy="292608"/>
+          </a:xfrm>
+          <a:prstGeom prst="rect">
+            <a:avLst/>
+          </a:prstGeom>
+          <a:noFill/>
+          <a:ln/>
+        </p:spPr>
+        <p:txBody>
+          <a:bodyPr wrap="square" lIns="0" tIns="0" rIns="0" bIns="0" rtlCol="0" anchor="ctr"/>
+          <a:lstStyle/>
+          <a:p>
+            <a:pPr algn="ctr" indent="0" marL="0">
+              <a:buNone/>
+            </a:pPr>
+            <a:r>
+              <a:rPr lang="en-US" sz="1300" b="1" dirty="0">
+                <a:solidFill>
+                  <a:srgbClr val="9D174D"/>
+                </a:solidFill>
+                <a:latin typeface="Trebuchet MS" pitchFamily="34" charset="0"/>
+                <a:ea typeface="Trebuchet MS" pitchFamily="34" charset="-122"/>
+                <a:cs typeface="Trebuchet MS" pitchFamily="34" charset="-120"/>
+              </a:rPr>
+              <a:t>ing</a:t>
+            </a:r>
+            <a:endParaRPr lang="en-US" sz="1300" dirty="0"/>
+          </a:p>
+        </p:txBody>
+      </p:sp>
+      <p:sp>
+        <p:nvSpPr>
+          <p:cNvPr id="24" name="Text 22"/>
+          <p:cNvSpPr/>
+          <p:nvPr/>
+        </p:nvSpPr>
+        <p:spPr>
+          <a:xfrm>
+            <a:off x="6519672" y="2569464"/>
+            <a:ext cx="1828800" cy="201168"/>
+          </a:xfrm>
+          <a:prstGeom prst="rect">
+            <a:avLst/>
+          </a:prstGeom>
+          <a:noFill/>
+          <a:ln/>
+        </p:spPr>
+        <p:txBody>
+          <a:bodyPr wrap="square" lIns="0" tIns="0" rIns="0" bIns="0" rtlCol="0" anchor="t"/>
+          <a:lstStyle/>
+          <a:p>
+            <a:pPr algn="ctr" indent="0" marL="0">
+              <a:buNone/>
+            </a:pPr>
+            <a:r>
+              <a:rPr lang="en-US" sz="850" dirty="0">
+                <a:solidFill>
+                  <a:srgbClr val="475569"/>
+                </a:solidFill>
+                <a:latin typeface="Calibri" pitchFamily="34" charset="0"/>
+                <a:ea typeface="Calibri" pitchFamily="34" charset="-122"/>
+                <a:cs typeface="Calibri" pitchFamily="34" charset="-120"/>
+              </a:rPr>
+              <a:t>action happening now</a:t>
+            </a:r>
+            <a:endParaRPr lang="en-US" sz="850" dirty="0"/>
+          </a:p>
+        </p:txBody>
+      </p:sp>
+      <p:sp>
+        <p:nvSpPr>
+          <p:cNvPr id="25" name="Shape 23"/>
           <p:cNvSpPr/>
           <p:nvPr/>
         </p:nvSpPr>
@@ -25888,7 +26445,7 @@
       </p:sp>
       <p:sp>
         <p:nvSpPr>
-          <p:cNvPr id="23" name="Text 21"/>
+          <p:cNvPr id="26" name="Text 24"/>
           <p:cNvSpPr/>
           <p:nvPr/>
         </p:nvSpPr>
@@ -25927,7 +26484,7 @@
       </p:sp>
       <p:sp>
         <p:nvSpPr>
-          <p:cNvPr id="24" name="Shape 22"/>
+          <p:cNvPr id="27" name="Shape 25"/>
           <p:cNvSpPr/>
           <p:nvPr/>
         </p:nvSpPr>
@@ -25954,7 +26511,7 @@
       </p:sp>
       <p:sp>
         <p:nvSpPr>
-          <p:cNvPr id="25" name="Shape 23"/>
+          <p:cNvPr id="28" name="Shape 26"/>
           <p:cNvSpPr/>
           <p:nvPr/>
         </p:nvSpPr>
@@ -25981,7 +26538,7 @@
       </p:sp>
       <p:sp>
         <p:nvSpPr>
-          <p:cNvPr id="26" name="Text 24"/>
+          <p:cNvPr id="29" name="Text 27"/>
           <p:cNvSpPr/>
           <p:nvPr/>
         </p:nvSpPr>
@@ -26012,7 +26569,7 @@
                 <a:ea typeface="Trebuchet MS" pitchFamily="34" charset="-122"/>
                 <a:cs typeface="Trebuchet MS" pitchFamily="34" charset="-120"/>
               </a:rPr>
-              <a:t>re</a:t>
+              <a:t>self-re</a:t>
             </a:r>
             <a:endParaRPr lang="en-US" sz="1400" dirty="0"/>
           </a:p>
@@ -26020,7 +26577,7 @@
       </p:sp>
       <p:sp>
         <p:nvSpPr>
-          <p:cNvPr id="27" name="Text 25"/>
+          <p:cNvPr id="30" name="Text 28"/>
           <p:cNvSpPr/>
           <p:nvPr/>
         </p:nvSpPr>
@@ -26059,7 +26616,7 @@
       </p:sp>
       <p:sp>
         <p:nvSpPr>
-          <p:cNvPr id="28" name="Shape 26"/>
+          <p:cNvPr id="31" name="Shape 29"/>
           <p:cNvSpPr/>
           <p:nvPr/>
         </p:nvSpPr>
@@ -26086,7 +26643,7 @@
       </p:sp>
       <p:sp>
         <p:nvSpPr>
-          <p:cNvPr id="29" name="Text 27"/>
+          <p:cNvPr id="32" name="Text 30"/>
           <p:cNvSpPr/>
           <p:nvPr/>
         </p:nvSpPr>
@@ -26125,7 +26682,7 @@
       </p:sp>
       <p:sp>
         <p:nvSpPr>
-          <p:cNvPr id="30" name="Text 28"/>
+          <p:cNvPr id="33" name="Text 31"/>
           <p:cNvSpPr/>
           <p:nvPr/>
         </p:nvSpPr>
@@ -26164,7 +26721,7 @@
       </p:sp>
       <p:sp>
         <p:nvSpPr>
-          <p:cNvPr id="31" name="Shape 29"/>
+          <p:cNvPr id="34" name="Shape 32"/>
           <p:cNvSpPr/>
           <p:nvPr/>
         </p:nvSpPr>
@@ -26191,7 +26748,7 @@
       </p:sp>
       <p:sp>
         <p:nvSpPr>
-          <p:cNvPr id="32" name="Text 30"/>
+          <p:cNvPr id="35" name="Text 33"/>
           <p:cNvSpPr/>
           <p:nvPr/>
         </p:nvSpPr>
@@ -26222,7 +26779,7 @@
                 <a:ea typeface="Trebuchet MS" pitchFamily="34" charset="-122"/>
                 <a:cs typeface="Trebuchet MS" pitchFamily="34" charset="-120"/>
               </a:rPr>
-              <a:t>er</a:t>
+              <a:t>ing</a:t>
             </a:r>
             <a:endParaRPr lang="en-US" sz="1400" dirty="0"/>
           </a:p>
@@ -26230,7 +26787,7 @@
       </p:sp>
       <p:sp>
         <p:nvSpPr>
-          <p:cNvPr id="33" name="Shape 31"/>
+          <p:cNvPr id="36" name="Shape 34"/>
           <p:cNvSpPr/>
           <p:nvPr/>
         </p:nvSpPr>
@@ -26257,7 +26814,7 @@
       </p:sp>
       <p:sp>
         <p:nvSpPr>
-          <p:cNvPr id="34" name="Text 32"/>
+          <p:cNvPr id="37" name="Text 35"/>
           <p:cNvSpPr/>
           <p:nvPr/>
         </p:nvSpPr>
@@ -26296,7 +26853,7 @@
       </p:sp>
       <p:sp>
         <p:nvSpPr>
-          <p:cNvPr id="35" name="Shape 33"/>
+          <p:cNvPr id="38" name="Shape 36"/>
           <p:cNvSpPr/>
           <p:nvPr/>
         </p:nvSpPr>
@@ -26323,7 +26880,7 @@
       </p:sp>
       <p:sp>
         <p:nvSpPr>
-          <p:cNvPr id="36" name="Text 34"/>
+          <p:cNvPr id="39" name="Text 37"/>
           <p:cNvSpPr/>
           <p:nvPr/>
         </p:nvSpPr>
@@ -26646,7 +27203,7 @@
                 <a:ea typeface="Calibri" pitchFamily="34" charset="-122"/>
                 <a:cs typeface="Calibri" pitchFamily="34" charset="-120"/>
               </a:rPr>
-              <a:t>Word Labs  •  wordlabs.app  •  Root: 'reveal' = uncover or show something hidden</a:t>
+              <a:t>Word Labs  •  wordlabs.app  •  Root: 'reveal' = to uncover or show hidden</a:t>
             </a:r>
             <a:endParaRPr lang="en-US" sz="800" dirty="0"/>
           </a:p>
@@ -26785,7 +27342,7 @@
                 <a:ea typeface="Trebuchet MS" pitchFamily="34" charset="-122"/>
                 <a:cs typeface="Trebuchet MS" pitchFamily="34" charset="-120"/>
               </a:rPr>
-              <a:t>revealer</a:t>
+              <a:t>self-revealing</a:t>
             </a:r>
             <a:endParaRPr lang="en-US" sz="2800" dirty="0"/>
           </a:p>
@@ -26865,7 +27422,7 @@
         </p:nvSpPr>
         <p:spPr>
           <a:xfrm>
-            <a:off x="2938272" y="2258568"/>
+            <a:off x="2221992" y="2258568"/>
             <a:ext cx="1828800" cy="292608"/>
           </a:xfrm>
           <a:prstGeom prst="rect">
@@ -26874,11 +27431,11 @@
             </a:avLst>
           </a:prstGeom>
           <a:solidFill>
-            <a:srgbClr val="CCFBF1"/>
+            <a:srgbClr val="DDD6FE"/>
           </a:solidFill>
           <a:ln w="19050">
             <a:solidFill>
-              <a:srgbClr val="0D9488"/>
+              <a:srgbClr val="7C3AED"/>
             </a:solidFill>
             <a:prstDash val="solid"/>
           </a:ln>
@@ -26899,7 +27456,7 @@
         </p:nvSpPr>
         <p:spPr>
           <a:xfrm>
-            <a:off x="2938272" y="2258568"/>
+            <a:off x="2221992" y="2258568"/>
             <a:ext cx="1828800" cy="292608"/>
           </a:xfrm>
           <a:prstGeom prst="rect">
@@ -26918,13 +27475,13 @@
             <a:r>
               <a:rPr lang="en-US" sz="1300" b="1" dirty="0">
                 <a:solidFill>
-                  <a:srgbClr val="0F766E"/>
+                  <a:srgbClr val="4C1D95"/>
                 </a:solidFill>
                 <a:latin typeface="Trebuchet MS" pitchFamily="34" charset="0"/>
                 <a:ea typeface="Trebuchet MS" pitchFamily="34" charset="-122"/>
                 <a:cs typeface="Trebuchet MS" pitchFamily="34" charset="-120"/>
               </a:rPr>
-              <a:t>reveal</a:t>
+              <a:t>self</a:t>
             </a:r>
             <a:endParaRPr lang="en-US" sz="1300" dirty="0"/>
           </a:p>
@@ -26938,7 +27495,7 @@
         </p:nvSpPr>
         <p:spPr>
           <a:xfrm>
-            <a:off x="2938272" y="2569464"/>
+            <a:off x="2221992" y="2569464"/>
             <a:ext cx="1828800" cy="201168"/>
           </a:xfrm>
           <a:prstGeom prst="rect">
@@ -26963,7 +27520,7 @@
                 <a:ea typeface="Calibri" pitchFamily="34" charset="-122"/>
                 <a:cs typeface="Calibri" pitchFamily="34" charset="-120"/>
               </a:rPr>
-              <a:t>uncover or show something hidden</a:t>
+              <a:t>by or about oneself</a:t>
             </a:r>
             <a:endParaRPr lang="en-US" sz="850" dirty="0"/>
           </a:p>
@@ -26977,7 +27534,7 @@
         </p:nvSpPr>
         <p:spPr>
           <a:xfrm>
-            <a:off x="5803392" y="2258568"/>
+            <a:off x="4370832" y="2258568"/>
             <a:ext cx="1828800" cy="292608"/>
           </a:xfrm>
           <a:prstGeom prst="rect">
@@ -26986,11 +27543,11 @@
             </a:avLst>
           </a:prstGeom>
           <a:solidFill>
-            <a:srgbClr val="FCE7F3"/>
+            <a:srgbClr val="CCFBF1"/>
           </a:solidFill>
           <a:ln w="19050">
             <a:solidFill>
-              <a:srgbClr val="DB2777"/>
+              <a:srgbClr val="0D9488"/>
             </a:solidFill>
             <a:prstDash val="solid"/>
           </a:ln>
@@ -27011,7 +27568,7 @@
         </p:nvSpPr>
         <p:spPr>
           <a:xfrm>
-            <a:off x="5803392" y="2258568"/>
+            <a:off x="4370832" y="2258568"/>
             <a:ext cx="1828800" cy="292608"/>
           </a:xfrm>
           <a:prstGeom prst="rect">
@@ -27030,13 +27587,13 @@
             <a:r>
               <a:rPr lang="en-US" sz="1300" b="1" dirty="0">
                 <a:solidFill>
-                  <a:srgbClr val="9D174D"/>
+                  <a:srgbClr val="0F766E"/>
                 </a:solidFill>
                 <a:latin typeface="Trebuchet MS" pitchFamily="34" charset="0"/>
                 <a:ea typeface="Trebuchet MS" pitchFamily="34" charset="-122"/>
                 <a:cs typeface="Trebuchet MS" pitchFamily="34" charset="-120"/>
               </a:rPr>
-              <a:t>er</a:t>
+              <a:t>reveal</a:t>
             </a:r>
             <a:endParaRPr lang="en-US" sz="1300" dirty="0"/>
           </a:p>
@@ -27050,7 +27607,7 @@
         </p:nvSpPr>
         <p:spPr>
           <a:xfrm>
-            <a:off x="5803392" y="2569464"/>
+            <a:off x="4370832" y="2569464"/>
             <a:ext cx="1828800" cy="201168"/>
           </a:xfrm>
           <a:prstGeom prst="rect">
@@ -27075,7 +27632,7 @@
                 <a:ea typeface="Calibri" pitchFamily="34" charset="-122"/>
                 <a:cs typeface="Calibri" pitchFamily="34" charset="-120"/>
               </a:rPr>
-              <a:t>a person or thing that does something</a:t>
+              <a:t>to uncover or show hidden</a:t>
             </a:r>
             <a:endParaRPr lang="en-US" sz="850" dirty="0"/>
           </a:p>
@@ -27084,6 +27641,118 @@
       <p:sp>
         <p:nvSpPr>
           <p:cNvPr id="22" name="Shape 20"/>
+          <p:cNvSpPr/>
+          <p:nvPr/>
+        </p:nvSpPr>
+        <p:spPr>
+          <a:xfrm>
+            <a:off x="6519672" y="2258568"/>
+            <a:ext cx="1828800" cy="292608"/>
+          </a:xfrm>
+          <a:prstGeom prst="rect">
+            <a:avLst>
+              <a:gd name="adj" fmla="val 25000"/>
+            </a:avLst>
+          </a:prstGeom>
+          <a:solidFill>
+            <a:srgbClr val="FCE7F3"/>
+          </a:solidFill>
+          <a:ln w="19050">
+            <a:solidFill>
+              <a:srgbClr val="DB2777"/>
+            </a:solidFill>
+            <a:prstDash val="solid"/>
+          </a:ln>
+          <a:effectLst>
+            <a:outerShdw sx="100000" sy="100000" kx="0" ky="0" algn="bl" rotWithShape="0" blurRad="101600" dist="38100" dir="8100000">
+              <a:srgbClr val="000000">
+                <a:alpha val="12000"/>
+              </a:srgbClr>
+            </a:outerShdw>
+          </a:effectLst>
+        </p:spPr>
+      </p:sp>
+      <p:sp>
+        <p:nvSpPr>
+          <p:cNvPr id="23" name="Text 21"/>
+          <p:cNvSpPr/>
+          <p:nvPr/>
+        </p:nvSpPr>
+        <p:spPr>
+          <a:xfrm>
+            <a:off x="6519672" y="2258568"/>
+            <a:ext cx="1828800" cy="292608"/>
+          </a:xfrm>
+          <a:prstGeom prst="rect">
+            <a:avLst/>
+          </a:prstGeom>
+          <a:noFill/>
+          <a:ln/>
+        </p:spPr>
+        <p:txBody>
+          <a:bodyPr wrap="square" lIns="0" tIns="0" rIns="0" bIns="0" rtlCol="0" anchor="ctr"/>
+          <a:lstStyle/>
+          <a:p>
+            <a:pPr algn="ctr" indent="0" marL="0">
+              <a:buNone/>
+            </a:pPr>
+            <a:r>
+              <a:rPr lang="en-US" sz="1300" b="1" dirty="0">
+                <a:solidFill>
+                  <a:srgbClr val="9D174D"/>
+                </a:solidFill>
+                <a:latin typeface="Trebuchet MS" pitchFamily="34" charset="0"/>
+                <a:ea typeface="Trebuchet MS" pitchFamily="34" charset="-122"/>
+                <a:cs typeface="Trebuchet MS" pitchFamily="34" charset="-120"/>
+              </a:rPr>
+              <a:t>ing</a:t>
+            </a:r>
+            <a:endParaRPr lang="en-US" sz="1300" dirty="0"/>
+          </a:p>
+        </p:txBody>
+      </p:sp>
+      <p:sp>
+        <p:nvSpPr>
+          <p:cNvPr id="24" name="Text 22"/>
+          <p:cNvSpPr/>
+          <p:nvPr/>
+        </p:nvSpPr>
+        <p:spPr>
+          <a:xfrm>
+            <a:off x="6519672" y="2569464"/>
+            <a:ext cx="1828800" cy="201168"/>
+          </a:xfrm>
+          <a:prstGeom prst="rect">
+            <a:avLst/>
+          </a:prstGeom>
+          <a:noFill/>
+          <a:ln/>
+        </p:spPr>
+        <p:txBody>
+          <a:bodyPr wrap="square" lIns="0" tIns="0" rIns="0" bIns="0" rtlCol="0" anchor="t"/>
+          <a:lstStyle/>
+          <a:p>
+            <a:pPr algn="ctr" indent="0" marL="0">
+              <a:buNone/>
+            </a:pPr>
+            <a:r>
+              <a:rPr lang="en-US" sz="850" dirty="0">
+                <a:solidFill>
+                  <a:srgbClr val="475569"/>
+                </a:solidFill>
+                <a:latin typeface="Calibri" pitchFamily="34" charset="0"/>
+                <a:ea typeface="Calibri" pitchFamily="34" charset="-122"/>
+                <a:cs typeface="Calibri" pitchFamily="34" charset="-120"/>
+              </a:rPr>
+              <a:t>action happening now</a:t>
+            </a:r>
+            <a:endParaRPr lang="en-US" sz="850" dirty="0"/>
+          </a:p>
+        </p:txBody>
+      </p:sp>
+      <p:sp>
+        <p:nvSpPr>
+          <p:cNvPr id="25" name="Shape 23"/>
           <p:cNvSpPr/>
           <p:nvPr/>
         </p:nvSpPr>
@@ -27110,7 +27779,7 @@
       </p:sp>
       <p:sp>
         <p:nvSpPr>
-          <p:cNvPr id="23" name="Text 21"/>
+          <p:cNvPr id="26" name="Text 24"/>
           <p:cNvSpPr/>
           <p:nvPr/>
         </p:nvSpPr>
@@ -27149,7 +27818,7 @@
       </p:sp>
       <p:sp>
         <p:nvSpPr>
-          <p:cNvPr id="24" name="Shape 22"/>
+          <p:cNvPr id="27" name="Shape 25"/>
           <p:cNvSpPr/>
           <p:nvPr/>
         </p:nvSpPr>
@@ -27176,7 +27845,7 @@
       </p:sp>
       <p:sp>
         <p:nvSpPr>
-          <p:cNvPr id="25" name="Shape 23"/>
+          <p:cNvPr id="28" name="Shape 26"/>
           <p:cNvSpPr/>
           <p:nvPr/>
         </p:nvSpPr>
@@ -27203,7 +27872,7 @@
       </p:sp>
       <p:sp>
         <p:nvSpPr>
-          <p:cNvPr id="26" name="Text 24"/>
+          <p:cNvPr id="29" name="Text 27"/>
           <p:cNvSpPr/>
           <p:nvPr/>
         </p:nvSpPr>
@@ -27234,7 +27903,7 @@
                 <a:ea typeface="Trebuchet MS" pitchFamily="34" charset="-122"/>
                 <a:cs typeface="Trebuchet MS" pitchFamily="34" charset="-120"/>
               </a:rPr>
-              <a:t>re</a:t>
+              <a:t>self-re</a:t>
             </a:r>
             <a:endParaRPr lang="en-US" sz="1400" dirty="0"/>
           </a:p>
@@ -27242,7 +27911,7 @@
       </p:sp>
       <p:sp>
         <p:nvSpPr>
-          <p:cNvPr id="27" name="Text 25"/>
+          <p:cNvPr id="30" name="Text 28"/>
           <p:cNvSpPr/>
           <p:nvPr/>
         </p:nvSpPr>
@@ -27281,7 +27950,7 @@
       </p:sp>
       <p:sp>
         <p:nvSpPr>
-          <p:cNvPr id="28" name="Shape 26"/>
+          <p:cNvPr id="31" name="Shape 29"/>
           <p:cNvSpPr/>
           <p:nvPr/>
         </p:nvSpPr>
@@ -27308,7 +27977,7 @@
       </p:sp>
       <p:sp>
         <p:nvSpPr>
-          <p:cNvPr id="29" name="Text 27"/>
+          <p:cNvPr id="32" name="Text 30"/>
           <p:cNvSpPr/>
           <p:nvPr/>
         </p:nvSpPr>
@@ -27347,7 +28016,7 @@
       </p:sp>
       <p:sp>
         <p:nvSpPr>
-          <p:cNvPr id="30" name="Text 28"/>
+          <p:cNvPr id="33" name="Text 31"/>
           <p:cNvSpPr/>
           <p:nvPr/>
         </p:nvSpPr>
@@ -27386,7 +28055,7 @@
       </p:sp>
       <p:sp>
         <p:nvSpPr>
-          <p:cNvPr id="31" name="Shape 29"/>
+          <p:cNvPr id="34" name="Shape 32"/>
           <p:cNvSpPr/>
           <p:nvPr/>
         </p:nvSpPr>
@@ -27413,7 +28082,7 @@
       </p:sp>
       <p:sp>
         <p:nvSpPr>
-          <p:cNvPr id="32" name="Text 30"/>
+          <p:cNvPr id="35" name="Text 33"/>
           <p:cNvSpPr/>
           <p:nvPr/>
         </p:nvSpPr>
@@ -27444,7 +28113,7 @@
                 <a:ea typeface="Trebuchet MS" pitchFamily="34" charset="-122"/>
                 <a:cs typeface="Trebuchet MS" pitchFamily="34" charset="-120"/>
               </a:rPr>
-              <a:t>er</a:t>
+              <a:t>ing</a:t>
             </a:r>
             <a:endParaRPr lang="en-US" sz="1400" dirty="0"/>
           </a:p>
@@ -27452,7 +28121,7 @@
       </p:sp>
       <p:sp>
         <p:nvSpPr>
-          <p:cNvPr id="33" name="Shape 31"/>
+          <p:cNvPr id="36" name="Shape 34"/>
           <p:cNvSpPr/>
           <p:nvPr/>
         </p:nvSpPr>
@@ -27479,7 +28148,7 @@
       </p:sp>
       <p:sp>
         <p:nvSpPr>
-          <p:cNvPr id="34" name="Text 32"/>
+          <p:cNvPr id="37" name="Text 35"/>
           <p:cNvSpPr/>
           <p:nvPr/>
         </p:nvSpPr>
@@ -27518,7 +28187,7 @@
       </p:sp>
       <p:sp>
         <p:nvSpPr>
-          <p:cNvPr id="35" name="Shape 33"/>
+          <p:cNvPr id="38" name="Shape 36"/>
           <p:cNvSpPr/>
           <p:nvPr/>
         </p:nvSpPr>
@@ -27545,14 +28214,14 @@
       </p:sp>
       <p:sp>
         <p:nvSpPr>
-          <p:cNvPr id="36" name="Shape 34"/>
-          <p:cNvSpPr/>
-          <p:nvPr/>
-        </p:nvSpPr>
-        <p:spPr>
-          <a:xfrm>
-            <a:off x="2427732" y="4169664"/>
-            <a:ext cx="685800" cy="475488"/>
+          <p:cNvPr id="39" name="Shape 37"/>
+          <p:cNvSpPr/>
+          <p:nvPr/>
+        </p:nvSpPr>
+        <p:spPr>
+          <a:xfrm>
+            <a:off x="1952244" y="4169664"/>
+            <a:ext cx="543652" cy="475488"/>
           </a:xfrm>
           <a:prstGeom prst="rect">
             <a:avLst>
@@ -27572,14 +28241,14 @@
       </p:sp>
       <p:sp>
         <p:nvSpPr>
-          <p:cNvPr id="37" name="Text 35"/>
-          <p:cNvSpPr/>
-          <p:nvPr/>
-        </p:nvSpPr>
-        <p:spPr>
-          <a:xfrm>
-            <a:off x="2427732" y="4169664"/>
-            <a:ext cx="685800" cy="475488"/>
+          <p:cNvPr id="40" name="Text 38"/>
+          <p:cNvSpPr/>
+          <p:nvPr/>
+        </p:nvSpPr>
+        <p:spPr>
+          <a:xfrm>
+            <a:off x="1952244" y="4169664"/>
+            <a:ext cx="543652" cy="475488"/>
           </a:xfrm>
           <a:prstGeom prst="rect">
             <a:avLst/>
@@ -27603,7 +28272,7 @@
                 <a:ea typeface="Trebuchet MS" pitchFamily="34" charset="-122"/>
                 <a:cs typeface="Trebuchet MS" pitchFamily="34" charset="-120"/>
               </a:rPr>
-              <a:t>r</a:t>
+              <a:t>s</a:t>
             </a:r>
             <a:endParaRPr lang="en-US" sz="900" dirty="0"/>
           </a:p>
@@ -27611,14 +28280,14 @@
       </p:sp>
       <p:sp>
         <p:nvSpPr>
-          <p:cNvPr id="38" name="Shape 36"/>
-          <p:cNvSpPr/>
-          <p:nvPr/>
-        </p:nvSpPr>
-        <p:spPr>
-          <a:xfrm>
-            <a:off x="3639312" y="4169664"/>
-            <a:ext cx="685800" cy="475488"/>
+          <p:cNvPr id="41" name="Shape 39"/>
+          <p:cNvSpPr/>
+          <p:nvPr/>
+        </p:nvSpPr>
+        <p:spPr>
+          <a:xfrm>
+            <a:off x="2546188" y="4169664"/>
+            <a:ext cx="543652" cy="475488"/>
           </a:xfrm>
           <a:prstGeom prst="rect">
             <a:avLst>
@@ -27638,14 +28307,14 @@
       </p:sp>
       <p:sp>
         <p:nvSpPr>
-          <p:cNvPr id="39" name="Text 37"/>
-          <p:cNvSpPr/>
-          <p:nvPr/>
-        </p:nvSpPr>
-        <p:spPr>
-          <a:xfrm>
-            <a:off x="3639312" y="4169664"/>
-            <a:ext cx="685800" cy="475488"/>
+          <p:cNvPr id="42" name="Text 40"/>
+          <p:cNvSpPr/>
+          <p:nvPr/>
+        </p:nvSpPr>
+        <p:spPr>
+          <a:xfrm>
+            <a:off x="2546188" y="4169664"/>
+            <a:ext cx="543652" cy="475488"/>
           </a:xfrm>
           <a:prstGeom prst="rect">
             <a:avLst/>
@@ -27677,14 +28346,14 @@
       </p:sp>
       <p:sp>
         <p:nvSpPr>
-          <p:cNvPr id="40" name="Shape 38"/>
-          <p:cNvSpPr/>
-          <p:nvPr/>
-        </p:nvSpPr>
-        <p:spPr>
-          <a:xfrm>
-            <a:off x="4850892" y="4169664"/>
-            <a:ext cx="685800" cy="475488"/>
+          <p:cNvPr id="43" name="Shape 41"/>
+          <p:cNvSpPr/>
+          <p:nvPr/>
+        </p:nvSpPr>
+        <p:spPr>
+          <a:xfrm>
+            <a:off x="3140133" y="4169664"/>
+            <a:ext cx="543652" cy="475488"/>
           </a:xfrm>
           <a:prstGeom prst="rect">
             <a:avLst>
@@ -27704,14 +28373,14 @@
       </p:sp>
       <p:sp>
         <p:nvSpPr>
-          <p:cNvPr id="41" name="Text 39"/>
-          <p:cNvSpPr/>
-          <p:nvPr/>
-        </p:nvSpPr>
-        <p:spPr>
-          <a:xfrm>
-            <a:off x="4850892" y="4169664"/>
-            <a:ext cx="685800" cy="475488"/>
+          <p:cNvPr id="44" name="Text 42"/>
+          <p:cNvSpPr/>
+          <p:nvPr/>
+        </p:nvSpPr>
+        <p:spPr>
+          <a:xfrm>
+            <a:off x="3140133" y="4169664"/>
+            <a:ext cx="543652" cy="475488"/>
           </a:xfrm>
           <a:prstGeom prst="rect">
             <a:avLst/>
@@ -27735,7 +28404,7 @@
                 <a:ea typeface="Trebuchet MS" pitchFamily="34" charset="-122"/>
                 <a:cs typeface="Trebuchet MS" pitchFamily="34" charset="-120"/>
               </a:rPr>
-              <a:t>v</a:t>
+              <a:t>l</a:t>
             </a:r>
             <a:endParaRPr lang="en-US" sz="900" dirty="0"/>
           </a:p>
@@ -27743,14 +28412,14 @@
       </p:sp>
       <p:sp>
         <p:nvSpPr>
-          <p:cNvPr id="42" name="Shape 40"/>
-          <p:cNvSpPr/>
-          <p:nvPr/>
-        </p:nvSpPr>
-        <p:spPr>
-          <a:xfrm>
-            <a:off x="6062472" y="4169664"/>
-            <a:ext cx="685800" cy="475488"/>
+          <p:cNvPr id="45" name="Shape 43"/>
+          <p:cNvSpPr/>
+          <p:nvPr/>
+        </p:nvSpPr>
+        <p:spPr>
+          <a:xfrm>
+            <a:off x="3734077" y="4169664"/>
+            <a:ext cx="543652" cy="475488"/>
           </a:xfrm>
           <a:prstGeom prst="rect">
             <a:avLst>
@@ -27770,14 +28439,14 @@
       </p:sp>
       <p:sp>
         <p:nvSpPr>
-          <p:cNvPr id="43" name="Text 41"/>
-          <p:cNvSpPr/>
-          <p:nvPr/>
-        </p:nvSpPr>
-        <p:spPr>
-          <a:xfrm>
-            <a:off x="6062472" y="4169664"/>
-            <a:ext cx="685800" cy="475488"/>
+          <p:cNvPr id="46" name="Text 44"/>
+          <p:cNvSpPr/>
+          <p:nvPr/>
+        </p:nvSpPr>
+        <p:spPr>
+          <a:xfrm>
+            <a:off x="3734077" y="4169664"/>
+            <a:ext cx="543652" cy="475488"/>
           </a:xfrm>
           <a:prstGeom prst="rect">
             <a:avLst/>
@@ -27801,7 +28470,7 @@
                 <a:ea typeface="Trebuchet MS" pitchFamily="34" charset="-122"/>
                 <a:cs typeface="Trebuchet MS" pitchFamily="34" charset="-120"/>
               </a:rPr>
-              <a:t>eal</a:t>
+              <a:t>f</a:t>
             </a:r>
             <a:endParaRPr lang="en-US" sz="900" dirty="0"/>
           </a:p>
@@ -27809,14 +28478,14 @@
       </p:sp>
       <p:sp>
         <p:nvSpPr>
-          <p:cNvPr id="44" name="Shape 42"/>
-          <p:cNvSpPr/>
-          <p:nvPr/>
-        </p:nvSpPr>
-        <p:spPr>
-          <a:xfrm>
-            <a:off x="7274052" y="4169664"/>
-            <a:ext cx="685800" cy="475488"/>
+          <p:cNvPr id="47" name="Shape 45"/>
+          <p:cNvSpPr/>
+          <p:nvPr/>
+        </p:nvSpPr>
+        <p:spPr>
+          <a:xfrm>
+            <a:off x="4328021" y="4169664"/>
+            <a:ext cx="543652" cy="475488"/>
           </a:xfrm>
           <a:prstGeom prst="rect">
             <a:avLst>
@@ -27836,14 +28505,14 @@
       </p:sp>
       <p:sp>
         <p:nvSpPr>
-          <p:cNvPr id="45" name="Text 43"/>
-          <p:cNvSpPr/>
-          <p:nvPr/>
-        </p:nvSpPr>
-        <p:spPr>
-          <a:xfrm>
-            <a:off x="7274052" y="4169664"/>
-            <a:ext cx="685800" cy="475488"/>
+          <p:cNvPr id="48" name="Text 46"/>
+          <p:cNvSpPr/>
+          <p:nvPr/>
+        </p:nvSpPr>
+        <p:spPr>
+          <a:xfrm>
+            <a:off x="4328021" y="4169664"/>
+            <a:ext cx="543652" cy="475488"/>
           </a:xfrm>
           <a:prstGeom prst="rect">
             <a:avLst/>
@@ -27867,7 +28536,403 @@
                 <a:ea typeface="Trebuchet MS" pitchFamily="34" charset="-122"/>
                 <a:cs typeface="Trebuchet MS" pitchFamily="34" charset="-120"/>
               </a:rPr>
-              <a:t>er</a:t>
+              <a:t>r</a:t>
+            </a:r>
+            <a:endParaRPr lang="en-US" sz="900" dirty="0"/>
+          </a:p>
+        </p:txBody>
+      </p:sp>
+      <p:sp>
+        <p:nvSpPr>
+          <p:cNvPr id="49" name="Shape 47"/>
+          <p:cNvSpPr/>
+          <p:nvPr/>
+        </p:nvSpPr>
+        <p:spPr>
+          <a:xfrm>
+            <a:off x="4921966" y="4169664"/>
+            <a:ext cx="543652" cy="475488"/>
+          </a:xfrm>
+          <a:prstGeom prst="rect">
+            <a:avLst>
+              <a:gd name="adj" fmla="val 7692"/>
+            </a:avLst>
+          </a:prstGeom>
+          <a:solidFill>
+            <a:srgbClr val="FFFFFF"/>
+          </a:solidFill>
+          <a:ln w="12700">
+            <a:solidFill>
+              <a:srgbClr val="DB2777"/>
+            </a:solidFill>
+            <a:prstDash val="solid"/>
+          </a:ln>
+        </p:spPr>
+      </p:sp>
+      <p:sp>
+        <p:nvSpPr>
+          <p:cNvPr id="50" name="Text 48"/>
+          <p:cNvSpPr/>
+          <p:nvPr/>
+        </p:nvSpPr>
+        <p:spPr>
+          <a:xfrm>
+            <a:off x="4921966" y="4169664"/>
+            <a:ext cx="543652" cy="475488"/>
+          </a:xfrm>
+          <a:prstGeom prst="rect">
+            <a:avLst/>
+          </a:prstGeom>
+          <a:noFill/>
+          <a:ln/>
+        </p:spPr>
+        <p:txBody>
+          <a:bodyPr wrap="square" lIns="0" tIns="0" rIns="0" bIns="0" rtlCol="0" anchor="ctr"/>
+          <a:lstStyle/>
+          <a:p>
+            <a:pPr algn="ctr" indent="0" marL="0">
+              <a:buNone/>
+            </a:pPr>
+            <a:r>
+              <a:rPr lang="en-US" sz="900" b="1" dirty="0">
+                <a:solidFill>
+                  <a:srgbClr val="9D174D"/>
+                </a:solidFill>
+                <a:latin typeface="Trebuchet MS" pitchFamily="34" charset="0"/>
+                <a:ea typeface="Trebuchet MS" pitchFamily="34" charset="-122"/>
+                <a:cs typeface="Trebuchet MS" pitchFamily="34" charset="-120"/>
+              </a:rPr>
+              <a:t>e</a:t>
+            </a:r>
+            <a:endParaRPr lang="en-US" sz="900" dirty="0"/>
+          </a:p>
+        </p:txBody>
+      </p:sp>
+      <p:sp>
+        <p:nvSpPr>
+          <p:cNvPr id="51" name="Shape 49"/>
+          <p:cNvSpPr/>
+          <p:nvPr/>
+        </p:nvSpPr>
+        <p:spPr>
+          <a:xfrm>
+            <a:off x="5515910" y="4169664"/>
+            <a:ext cx="543652" cy="475488"/>
+          </a:xfrm>
+          <a:prstGeom prst="rect">
+            <a:avLst>
+              <a:gd name="adj" fmla="val 7692"/>
+            </a:avLst>
+          </a:prstGeom>
+          <a:solidFill>
+            <a:srgbClr val="FFFFFF"/>
+          </a:solidFill>
+          <a:ln w="12700">
+            <a:solidFill>
+              <a:srgbClr val="DB2777"/>
+            </a:solidFill>
+            <a:prstDash val="solid"/>
+          </a:ln>
+        </p:spPr>
+      </p:sp>
+      <p:sp>
+        <p:nvSpPr>
+          <p:cNvPr id="52" name="Text 50"/>
+          <p:cNvSpPr/>
+          <p:nvPr/>
+        </p:nvSpPr>
+        <p:spPr>
+          <a:xfrm>
+            <a:off x="5515910" y="4169664"/>
+            <a:ext cx="543652" cy="475488"/>
+          </a:xfrm>
+          <a:prstGeom prst="rect">
+            <a:avLst/>
+          </a:prstGeom>
+          <a:noFill/>
+          <a:ln/>
+        </p:spPr>
+        <p:txBody>
+          <a:bodyPr wrap="square" lIns="0" tIns="0" rIns="0" bIns="0" rtlCol="0" anchor="ctr"/>
+          <a:lstStyle/>
+          <a:p>
+            <a:pPr algn="ctr" indent="0" marL="0">
+              <a:buNone/>
+            </a:pPr>
+            <a:r>
+              <a:rPr lang="en-US" sz="900" b="1" dirty="0">
+                <a:solidFill>
+                  <a:srgbClr val="9D174D"/>
+                </a:solidFill>
+                <a:latin typeface="Trebuchet MS" pitchFamily="34" charset="0"/>
+                <a:ea typeface="Trebuchet MS" pitchFamily="34" charset="-122"/>
+                <a:cs typeface="Trebuchet MS" pitchFamily="34" charset="-120"/>
+              </a:rPr>
+              <a:t>v</a:t>
+            </a:r>
+            <a:endParaRPr lang="en-US" sz="900" dirty="0"/>
+          </a:p>
+        </p:txBody>
+      </p:sp>
+      <p:sp>
+        <p:nvSpPr>
+          <p:cNvPr id="53" name="Shape 51"/>
+          <p:cNvSpPr/>
+          <p:nvPr/>
+        </p:nvSpPr>
+        <p:spPr>
+          <a:xfrm>
+            <a:off x="6109855" y="4169664"/>
+            <a:ext cx="543652" cy="475488"/>
+          </a:xfrm>
+          <a:prstGeom prst="rect">
+            <a:avLst>
+              <a:gd name="adj" fmla="val 7692"/>
+            </a:avLst>
+          </a:prstGeom>
+          <a:solidFill>
+            <a:srgbClr val="FFFFFF"/>
+          </a:solidFill>
+          <a:ln w="12700">
+            <a:solidFill>
+              <a:srgbClr val="DB2777"/>
+            </a:solidFill>
+            <a:prstDash val="solid"/>
+          </a:ln>
+        </p:spPr>
+      </p:sp>
+      <p:sp>
+        <p:nvSpPr>
+          <p:cNvPr id="54" name="Text 52"/>
+          <p:cNvSpPr/>
+          <p:nvPr/>
+        </p:nvSpPr>
+        <p:spPr>
+          <a:xfrm>
+            <a:off x="6109855" y="4169664"/>
+            <a:ext cx="543652" cy="475488"/>
+          </a:xfrm>
+          <a:prstGeom prst="rect">
+            <a:avLst/>
+          </a:prstGeom>
+          <a:noFill/>
+          <a:ln/>
+        </p:spPr>
+        <p:txBody>
+          <a:bodyPr wrap="square" lIns="0" tIns="0" rIns="0" bIns="0" rtlCol="0" anchor="ctr"/>
+          <a:lstStyle/>
+          <a:p>
+            <a:pPr algn="ctr" indent="0" marL="0">
+              <a:buNone/>
+            </a:pPr>
+            <a:r>
+              <a:rPr lang="en-US" sz="900" b="1" dirty="0">
+                <a:solidFill>
+                  <a:srgbClr val="9D174D"/>
+                </a:solidFill>
+                <a:latin typeface="Trebuchet MS" pitchFamily="34" charset="0"/>
+                <a:ea typeface="Trebuchet MS" pitchFamily="34" charset="-122"/>
+                <a:cs typeface="Trebuchet MS" pitchFamily="34" charset="-120"/>
+              </a:rPr>
+              <a:t>ea</a:t>
+            </a:r>
+            <a:endParaRPr lang="en-US" sz="900" dirty="0"/>
+          </a:p>
+        </p:txBody>
+      </p:sp>
+      <p:sp>
+        <p:nvSpPr>
+          <p:cNvPr id="55" name="Shape 53"/>
+          <p:cNvSpPr/>
+          <p:nvPr/>
+        </p:nvSpPr>
+        <p:spPr>
+          <a:xfrm>
+            <a:off x="6703799" y="4169664"/>
+            <a:ext cx="543652" cy="475488"/>
+          </a:xfrm>
+          <a:prstGeom prst="rect">
+            <a:avLst>
+              <a:gd name="adj" fmla="val 7692"/>
+            </a:avLst>
+          </a:prstGeom>
+          <a:solidFill>
+            <a:srgbClr val="FFFFFF"/>
+          </a:solidFill>
+          <a:ln w="12700">
+            <a:solidFill>
+              <a:srgbClr val="DB2777"/>
+            </a:solidFill>
+            <a:prstDash val="solid"/>
+          </a:ln>
+        </p:spPr>
+      </p:sp>
+      <p:sp>
+        <p:nvSpPr>
+          <p:cNvPr id="56" name="Text 54"/>
+          <p:cNvSpPr/>
+          <p:nvPr/>
+        </p:nvSpPr>
+        <p:spPr>
+          <a:xfrm>
+            <a:off x="6703799" y="4169664"/>
+            <a:ext cx="543652" cy="475488"/>
+          </a:xfrm>
+          <a:prstGeom prst="rect">
+            <a:avLst/>
+          </a:prstGeom>
+          <a:noFill/>
+          <a:ln/>
+        </p:spPr>
+        <p:txBody>
+          <a:bodyPr wrap="square" lIns="0" tIns="0" rIns="0" bIns="0" rtlCol="0" anchor="ctr"/>
+          <a:lstStyle/>
+          <a:p>
+            <a:pPr algn="ctr" indent="0" marL="0">
+              <a:buNone/>
+            </a:pPr>
+            <a:r>
+              <a:rPr lang="en-US" sz="900" b="1" dirty="0">
+                <a:solidFill>
+                  <a:srgbClr val="9D174D"/>
+                </a:solidFill>
+                <a:latin typeface="Trebuchet MS" pitchFamily="34" charset="0"/>
+                <a:ea typeface="Trebuchet MS" pitchFamily="34" charset="-122"/>
+                <a:cs typeface="Trebuchet MS" pitchFamily="34" charset="-120"/>
+              </a:rPr>
+              <a:t>l</a:t>
+            </a:r>
+            <a:endParaRPr lang="en-US" sz="900" dirty="0"/>
+          </a:p>
+        </p:txBody>
+      </p:sp>
+      <p:sp>
+        <p:nvSpPr>
+          <p:cNvPr id="57" name="Shape 55"/>
+          <p:cNvSpPr/>
+          <p:nvPr/>
+        </p:nvSpPr>
+        <p:spPr>
+          <a:xfrm>
+            <a:off x="7297743" y="4169664"/>
+            <a:ext cx="543652" cy="475488"/>
+          </a:xfrm>
+          <a:prstGeom prst="rect">
+            <a:avLst>
+              <a:gd name="adj" fmla="val 7692"/>
+            </a:avLst>
+          </a:prstGeom>
+          <a:solidFill>
+            <a:srgbClr val="FFFFFF"/>
+          </a:solidFill>
+          <a:ln w="12700">
+            <a:solidFill>
+              <a:srgbClr val="DB2777"/>
+            </a:solidFill>
+            <a:prstDash val="solid"/>
+          </a:ln>
+        </p:spPr>
+      </p:sp>
+      <p:sp>
+        <p:nvSpPr>
+          <p:cNvPr id="58" name="Text 56"/>
+          <p:cNvSpPr/>
+          <p:nvPr/>
+        </p:nvSpPr>
+        <p:spPr>
+          <a:xfrm>
+            <a:off x="7297743" y="4169664"/>
+            <a:ext cx="543652" cy="475488"/>
+          </a:xfrm>
+          <a:prstGeom prst="rect">
+            <a:avLst/>
+          </a:prstGeom>
+          <a:noFill/>
+          <a:ln/>
+        </p:spPr>
+        <p:txBody>
+          <a:bodyPr wrap="square" lIns="0" tIns="0" rIns="0" bIns="0" rtlCol="0" anchor="ctr"/>
+          <a:lstStyle/>
+          <a:p>
+            <a:pPr algn="ctr" indent="0" marL="0">
+              <a:buNone/>
+            </a:pPr>
+            <a:r>
+              <a:rPr lang="en-US" sz="900" b="1" dirty="0">
+                <a:solidFill>
+                  <a:srgbClr val="9D174D"/>
+                </a:solidFill>
+                <a:latin typeface="Trebuchet MS" pitchFamily="34" charset="0"/>
+                <a:ea typeface="Trebuchet MS" pitchFamily="34" charset="-122"/>
+                <a:cs typeface="Trebuchet MS" pitchFamily="34" charset="-120"/>
+              </a:rPr>
+              <a:t>i</a:t>
+            </a:r>
+            <a:endParaRPr lang="en-US" sz="900" dirty="0"/>
+          </a:p>
+        </p:txBody>
+      </p:sp>
+      <p:sp>
+        <p:nvSpPr>
+          <p:cNvPr id="59" name="Shape 57"/>
+          <p:cNvSpPr/>
+          <p:nvPr/>
+        </p:nvSpPr>
+        <p:spPr>
+          <a:xfrm>
+            <a:off x="7891688" y="4169664"/>
+            <a:ext cx="543652" cy="475488"/>
+          </a:xfrm>
+          <a:prstGeom prst="rect">
+            <a:avLst>
+              <a:gd name="adj" fmla="val 7692"/>
+            </a:avLst>
+          </a:prstGeom>
+          <a:solidFill>
+            <a:srgbClr val="FFFFFF"/>
+          </a:solidFill>
+          <a:ln w="12700">
+            <a:solidFill>
+              <a:srgbClr val="DB2777"/>
+            </a:solidFill>
+            <a:prstDash val="solid"/>
+          </a:ln>
+        </p:spPr>
+      </p:sp>
+      <p:sp>
+        <p:nvSpPr>
+          <p:cNvPr id="60" name="Text 58"/>
+          <p:cNvSpPr/>
+          <p:nvPr/>
+        </p:nvSpPr>
+        <p:spPr>
+          <a:xfrm>
+            <a:off x="7891688" y="4169664"/>
+            <a:ext cx="543652" cy="475488"/>
+          </a:xfrm>
+          <a:prstGeom prst="rect">
+            <a:avLst/>
+          </a:prstGeom>
+          <a:noFill/>
+          <a:ln/>
+        </p:spPr>
+        <p:txBody>
+          <a:bodyPr wrap="square" lIns="0" tIns="0" rIns="0" bIns="0" rtlCol="0" anchor="ctr"/>
+          <a:lstStyle/>
+          <a:p>
+            <a:pPr algn="ctr" indent="0" marL="0">
+              <a:buNone/>
+            </a:pPr>
+            <a:r>
+              <a:rPr lang="en-US" sz="900" b="1" dirty="0">
+                <a:solidFill>
+                  <a:srgbClr val="9D174D"/>
+                </a:solidFill>
+                <a:latin typeface="Trebuchet MS" pitchFamily="34" charset="0"/>
+                <a:ea typeface="Trebuchet MS" pitchFamily="34" charset="-122"/>
+                <a:cs typeface="Trebuchet MS" pitchFamily="34" charset="-120"/>
+              </a:rPr>
+              <a:t>ng</a:t>
             </a:r>
             <a:endParaRPr lang="en-US" sz="900" dirty="0"/>
           </a:p>
@@ -28159,7 +29224,7 @@
                 <a:ea typeface="Calibri" pitchFamily="34" charset="-122"/>
                 <a:cs typeface="Calibri" pitchFamily="34" charset="-120"/>
               </a:rPr>
-              <a:t>Word Labs  •  wordlabs.app  •  Root: 'reveal' = uncover or show something hidden</a:t>
+              <a:t>Word Labs  •  wordlabs.app  •  Root: 'reveal' = to uncover or show hidden</a:t>
             </a:r>
             <a:endParaRPr lang="en-US" sz="800" dirty="0"/>
           </a:p>
@@ -28298,7 +29363,7 @@
                 <a:ea typeface="Trebuchet MS" pitchFamily="34" charset="-122"/>
                 <a:cs typeface="Trebuchet MS" pitchFamily="34" charset="-120"/>
               </a:rPr>
-              <a:t>revealing</a:t>
+              <a:t>revealer</a:t>
             </a:r>
             <a:endParaRPr lang="en-US" sz="2800" dirty="0"/>
           </a:p>
@@ -28986,7 +30051,7 @@
                 <a:ea typeface="Calibri" pitchFamily="34" charset="-122"/>
                 <a:cs typeface="Calibri" pitchFamily="34" charset="-120"/>
               </a:rPr>
-              <a:t>Word Labs  •  wordlabs.app  •  Root: 'reveal' = uncover or show something hidden</a:t>
+              <a:t>Word Labs  •  wordlabs.app  •  Root: 'reveal' = to uncover or show hidden</a:t>
             </a:r>
             <a:endParaRPr lang="en-US" sz="800" dirty="0"/>
           </a:p>
@@ -29125,7 +30190,7 @@
                 <a:ea typeface="Trebuchet MS" pitchFamily="34" charset="-122"/>
                 <a:cs typeface="Trebuchet MS" pitchFamily="34" charset="-120"/>
               </a:rPr>
-              <a:t>revealing</a:t>
+              <a:t>revealer</a:t>
             </a:r>
             <a:endParaRPr lang="en-US" sz="2800" dirty="0"/>
           </a:p>
@@ -29303,7 +30368,7 @@
                 <a:ea typeface="Calibri" pitchFamily="34" charset="-122"/>
                 <a:cs typeface="Calibri" pitchFamily="34" charset="-120"/>
               </a:rPr>
-              <a:t>uncover or show something hidden</a:t>
+              <a:t>to uncover or show hidden</a:t>
             </a:r>
             <a:endParaRPr lang="en-US" sz="850" dirty="0"/>
           </a:p>
@@ -29376,7 +30441,7 @@
                 <a:ea typeface="Trebuchet MS" pitchFamily="34" charset="-122"/>
                 <a:cs typeface="Trebuchet MS" pitchFamily="34" charset="-120"/>
               </a:rPr>
-              <a:t>ing</a:t>
+              <a:t>er</a:t>
             </a:r>
             <a:endParaRPr lang="en-US" sz="1300" dirty="0"/>
           </a:p>
@@ -29415,7 +30480,7 @@
                 <a:ea typeface="Calibri" pitchFamily="34" charset="-122"/>
                 <a:cs typeface="Calibri" pitchFamily="34" charset="-120"/>
               </a:rPr>
-              <a:t>ongoing action (present participle)</a:t>
+              <a:t>a person or thing that does something</a:t>
             </a:r>
             <a:endParaRPr lang="en-US" sz="850" dirty="0"/>
           </a:p>
@@ -29971,7 +31036,7 @@
                 <a:ea typeface="Calibri" pitchFamily="34" charset="-122"/>
                 <a:cs typeface="Calibri" pitchFamily="34" charset="-120"/>
               </a:rPr>
-              <a:t>Word Labs  •  wordlabs.app  •  Root: 'reveal' = uncover or show something hidden</a:t>
+              <a:t>Word Labs  •  wordlabs.app  •  Root: 'reveal' = to uncover or show hidden</a:t>
             </a:r>
             <a:endParaRPr lang="en-US" sz="800" dirty="0"/>
           </a:p>
@@ -30110,7 +31175,7 @@
                 <a:ea typeface="Trebuchet MS" pitchFamily="34" charset="-122"/>
                 <a:cs typeface="Trebuchet MS" pitchFamily="34" charset="-120"/>
               </a:rPr>
-              <a:t>revealing</a:t>
+              <a:t>revealer</a:t>
             </a:r>
             <a:endParaRPr lang="en-US" sz="2800" dirty="0"/>
           </a:p>
@@ -30288,7 +31353,7 @@
                 <a:ea typeface="Calibri" pitchFamily="34" charset="-122"/>
                 <a:cs typeface="Calibri" pitchFamily="34" charset="-120"/>
               </a:rPr>
-              <a:t>uncover or show something hidden</a:t>
+              <a:t>to uncover or show hidden</a:t>
             </a:r>
             <a:endParaRPr lang="en-US" sz="850" dirty="0"/>
           </a:p>
@@ -30361,7 +31426,7 @@
                 <a:ea typeface="Trebuchet MS" pitchFamily="34" charset="-122"/>
                 <a:cs typeface="Trebuchet MS" pitchFamily="34" charset="-120"/>
               </a:rPr>
-              <a:t>ing</a:t>
+              <a:t>er</a:t>
             </a:r>
             <a:endParaRPr lang="en-US" sz="1300" dirty="0"/>
           </a:p>
@@ -30400,7 +31465,7 @@
                 <a:ea typeface="Calibri" pitchFamily="34" charset="-122"/>
                 <a:cs typeface="Calibri" pitchFamily="34" charset="-120"/>
               </a:rPr>
-              <a:t>ongoing action (present participle)</a:t>
+              <a:t>a person or thing that does something</a:t>
             </a:r>
             <a:endParaRPr lang="en-US" sz="850" dirty="0"/>
           </a:p>
@@ -30769,7 +31834,7 @@
                 <a:ea typeface="Trebuchet MS" pitchFamily="34" charset="-122"/>
                 <a:cs typeface="Trebuchet MS" pitchFamily="34" charset="-120"/>
               </a:rPr>
-              <a:t>ing</a:t>
+              <a:t>er</a:t>
             </a:r>
             <a:endParaRPr lang="en-US" sz="1400" dirty="0"/>
           </a:p>
@@ -31193,7 +32258,7 @@
                 <a:ea typeface="Calibri" pitchFamily="34" charset="-122"/>
                 <a:cs typeface="Calibri" pitchFamily="34" charset="-120"/>
               </a:rPr>
-              <a:t>Word Labs  •  wordlabs.app  •  Root: 'reveal' = uncover or show something hidden</a:t>
+              <a:t>Word Labs  •  wordlabs.app  •  Root: 'reveal' = to uncover or show hidden</a:t>
             </a:r>
             <a:endParaRPr lang="en-US" sz="800" dirty="0"/>
           </a:p>
@@ -31332,7 +32397,7 @@
                 <a:ea typeface="Trebuchet MS" pitchFamily="34" charset="-122"/>
                 <a:cs typeface="Trebuchet MS" pitchFamily="34" charset="-120"/>
               </a:rPr>
-              <a:t>revealing</a:t>
+              <a:t>revealer</a:t>
             </a:r>
             <a:endParaRPr lang="en-US" sz="2800" dirty="0"/>
           </a:p>
@@ -31510,7 +32575,7 @@
                 <a:ea typeface="Calibri" pitchFamily="34" charset="-122"/>
                 <a:cs typeface="Calibri" pitchFamily="34" charset="-120"/>
               </a:rPr>
-              <a:t>uncover or show something hidden</a:t>
+              <a:t>to uncover or show hidden</a:t>
             </a:r>
             <a:endParaRPr lang="en-US" sz="850" dirty="0"/>
           </a:p>
@@ -31583,7 +32648,7 @@
                 <a:ea typeface="Trebuchet MS" pitchFamily="34" charset="-122"/>
                 <a:cs typeface="Trebuchet MS" pitchFamily="34" charset="-120"/>
               </a:rPr>
-              <a:t>ing</a:t>
+              <a:t>er</a:t>
             </a:r>
             <a:endParaRPr lang="en-US" sz="1300" dirty="0"/>
           </a:p>
@@ -31622,7 +32687,7 @@
                 <a:ea typeface="Calibri" pitchFamily="34" charset="-122"/>
                 <a:cs typeface="Calibri" pitchFamily="34" charset="-120"/>
               </a:rPr>
-              <a:t>ongoing action (present participle)</a:t>
+              <a:t>a person or thing that does something</a:t>
             </a:r>
             <a:endParaRPr lang="en-US" sz="850" dirty="0"/>
           </a:p>
@@ -31991,7 +33056,7 @@
                 <a:ea typeface="Trebuchet MS" pitchFamily="34" charset="-122"/>
                 <a:cs typeface="Trebuchet MS" pitchFamily="34" charset="-120"/>
               </a:rPr>
-              <a:t>ing</a:t>
+              <a:t>er</a:t>
             </a:r>
             <a:endParaRPr lang="en-US" sz="1400" dirty="0"/>
           </a:p>
@@ -32348,7 +33413,7 @@
                 <a:ea typeface="Trebuchet MS" pitchFamily="34" charset="-122"/>
                 <a:cs typeface="Trebuchet MS" pitchFamily="34" charset="-120"/>
               </a:rPr>
-              <a:t>eal</a:t>
+              <a:t>ea</a:t>
             </a:r>
             <a:endParaRPr lang="en-US" sz="900" dirty="0"/>
           </a:p>
@@ -32414,7 +33479,7 @@
                 <a:ea typeface="Trebuchet MS" pitchFamily="34" charset="-122"/>
                 <a:cs typeface="Trebuchet MS" pitchFamily="34" charset="-120"/>
               </a:rPr>
-              <a:t>i</a:t>
+              <a:t>l</a:t>
             </a:r>
             <a:endParaRPr lang="en-US" sz="900" dirty="0"/>
           </a:p>
@@ -32480,7 +33545,7 @@
                 <a:ea typeface="Trebuchet MS" pitchFamily="34" charset="-122"/>
                 <a:cs typeface="Trebuchet MS" pitchFamily="34" charset="-120"/>
               </a:rPr>
-              <a:t>ng</a:t>
+              <a:t>er</a:t>
             </a:r>
             <a:endParaRPr lang="en-US" sz="900" dirty="0"/>
           </a:p>
@@ -32772,7 +33837,7 @@
                 <a:ea typeface="Calibri" pitchFamily="34" charset="-122"/>
                 <a:cs typeface="Calibri" pitchFamily="34" charset="-120"/>
               </a:rPr>
-              <a:t>Word Labs  •  wordlabs.app  •  Root: 'reveal' = uncover or show something hidden</a:t>
+              <a:t>Word Labs  •  wordlabs.app  •  Root: 'reveal' = to uncover or show hidden</a:t>
             </a:r>
             <a:endParaRPr lang="en-US" sz="800" dirty="0"/>
           </a:p>
@@ -33941,7 +35006,7 @@
                 <a:ea typeface="Calibri" pitchFamily="34" charset="-122"/>
                 <a:cs typeface="Calibri" pitchFamily="34" charset="-120"/>
               </a:rPr>
-              <a:t>Word Labs  •  wordlabs.app  •  Root: 'reveal' = uncover or show something hidden</a:t>
+              <a:t>Word Labs  •  wordlabs.app  •  Root: 'reveal' = to uncover or show hidden</a:t>
             </a:r>
             <a:endParaRPr lang="en-US" sz="800" dirty="0"/>
           </a:p>
@@ -34829,7 +35894,7 @@
                 <a:ea typeface="Trebuchet MS" pitchFamily="34" charset="-122"/>
                 <a:cs typeface="Trebuchet MS" pitchFamily="34" charset="-120"/>
               </a:rPr>
-              <a:t>-s</a:t>
+              <a:t>-ingly</a:t>
             </a:r>
             <a:endParaRPr lang="en-US" sz="1300" dirty="0"/>
           </a:p>
@@ -34982,7 +36047,7 @@
                 <a:ea typeface="Trebuchet MS" pitchFamily="34" charset="-122"/>
                 <a:cs typeface="Trebuchet MS" pitchFamily="34" charset="-120"/>
               </a:rPr>
-              <a:t>-ingly</a:t>
+              <a:t>-ation</a:t>
             </a:r>
             <a:endParaRPr lang="en-US" sz="1300" dirty="0"/>
           </a:p>
@@ -35285,7 +36350,7 @@
                 <a:ea typeface="Trebuchet MS" pitchFamily="34" charset="-122"/>
                 <a:cs typeface="Trebuchet MS" pitchFamily="34" charset="-120"/>
               </a:rPr>
-              <a:t>reveals</a:t>
+              <a:t>revealer</a:t>
             </a:r>
             <a:endParaRPr lang="en-US" sz="1200" dirty="0"/>
           </a:p>
@@ -35351,7 +36416,7 @@
                 <a:ea typeface="Trebuchet MS" pitchFamily="34" charset="-122"/>
                 <a:cs typeface="Trebuchet MS" pitchFamily="34" charset="-120"/>
               </a:rPr>
-              <a:t>revealer</a:t>
+              <a:t>revealingly</a:t>
             </a:r>
             <a:endParaRPr lang="en-US" sz="1200" dirty="0"/>
           </a:p>
@@ -35417,7 +36482,7 @@
                 <a:ea typeface="Trebuchet MS" pitchFamily="34" charset="-122"/>
                 <a:cs typeface="Trebuchet MS" pitchFamily="34" charset="-120"/>
               </a:rPr>
-              <a:t>revealingly</a:t>
+              <a:t>revelation</a:t>
             </a:r>
             <a:endParaRPr lang="en-US" sz="1200" dirty="0"/>
           </a:p>
@@ -35483,7 +36548,7 @@
                 <a:ea typeface="Trebuchet MS" pitchFamily="34" charset="-122"/>
                 <a:cs typeface="Trebuchet MS" pitchFamily="34" charset="-120"/>
               </a:rPr>
-              <a:t>self-revealing</a:t>
+              <a:t>revelations</a:t>
             </a:r>
             <a:endParaRPr lang="en-US" sz="1200" dirty="0"/>
           </a:p>
@@ -35549,7 +36614,7 @@
                 <a:ea typeface="Trebuchet MS" pitchFamily="34" charset="-122"/>
                 <a:cs typeface="Trebuchet MS" pitchFamily="34" charset="-120"/>
               </a:rPr>
-              <a:t>unrevealed</a:t>
+              <a:t>self-revealing</a:t>
             </a:r>
             <a:endParaRPr lang="en-US" sz="1200" dirty="0"/>
           </a:p>
@@ -35841,7 +36906,7 @@
                 <a:ea typeface="Calibri" pitchFamily="34" charset="-122"/>
                 <a:cs typeface="Calibri" pitchFamily="34" charset="-120"/>
               </a:rPr>
-              <a:t>Word Labs  •  wordlabs.app  •  Root: 'reveal' = uncover or show something hidden</a:t>
+              <a:t>Word Labs  •  wordlabs.app  •  Root: 'reveal' = to uncover or show hidden</a:t>
             </a:r>
             <a:endParaRPr lang="en-US" sz="800" dirty="0"/>
           </a:p>
@@ -36005,7 +37070,7 @@
                 <a:ea typeface="Calibri" pitchFamily="34" charset="-122"/>
                 <a:cs typeface="Calibri" pitchFamily="34" charset="-120"/>
               </a:rPr>
-              <a:t>The core part of a word carrying its basic meaning. For example, 'reveal' means 'uncover or show something hidden'.</a:t>
+              <a:t>The core part of a word carrying its basic meaning. For example, 'reveal' means 'to uncover or show hidden'.</a:t>
             </a:r>
             <a:endParaRPr lang="en-US" sz="1350" dirty="0"/>
           </a:p>
@@ -36625,7 +37690,7 @@
                 <a:ea typeface="Calibri" pitchFamily="34" charset="-122"/>
                 <a:cs typeface="Calibri" pitchFamily="34" charset="-120"/>
               </a:rPr>
-              <a:t>Word Labs  •  wordlabs.app  •  Root: 'reveal' = uncover or show something hidden</a:t>
+              <a:t>Word Labs  •  wordlabs.app  •  Root: 'reveal' = to uncover or show hidden</a:t>
             </a:r>
             <a:endParaRPr lang="en-US" sz="800" dirty="0"/>
           </a:p>
@@ -36737,7 +37802,7 @@
                 <a:ea typeface="Calibri" pitchFamily="34" charset="-122"/>
                 <a:cs typeface="Calibri" pitchFamily="34" charset="-120"/>
               </a:rPr>
-              <a:t>1.  The word 'reveal' comes from a Latin word meaning to uncover or lift a veil.</a:t>
+              <a:t>1.  The word 'revealed' has no suffix added to the root 'reveal'.</a:t>
             </a:r>
             <a:endParaRPr lang="en-US" sz="1300" dirty="0"/>
           </a:p>
@@ -36760,11 +37825,11 @@
             </a:avLst>
           </a:prstGeom>
           <a:solidFill>
-            <a:srgbClr val="DCFCE7"/>
-          </a:solidFill>
-          <a:ln w="12700">
-            <a:solidFill>
-              <a:srgbClr val="16A34A"/>
+            <a:srgbClr val="FEE2E2"/>
+          </a:solidFill>
+          <a:ln w="12700">
+            <a:solidFill>
+              <a:srgbClr val="DC2626"/>
             </a:solidFill>
             <a:prstDash val="solid"/>
           </a:ln>
@@ -36797,13 +37862,13 @@
             <a:r>
               <a:rPr lang="en-US" sz="1100" b="1" dirty="0">
                 <a:solidFill>
-                  <a:srgbClr val="16A34A"/>
+                  <a:srgbClr val="DC2626"/>
                 </a:solidFill>
                 <a:latin typeface="Trebuchet MS" pitchFamily="34" charset="0"/>
                 <a:ea typeface="Trebuchet MS" pitchFamily="34" charset="-122"/>
                 <a:cs typeface="Trebuchet MS" pitchFamily="34" charset="-120"/>
               </a:rPr>
-              <a:t>TRUE</a:t>
+              <a:t>FALSE</a:t>
             </a:r>
             <a:endParaRPr lang="en-US" sz="1100" dirty="0"/>
           </a:p>
@@ -36876,7 +37941,7 @@
                 <a:ea typeface="Calibri" pitchFamily="34" charset="-122"/>
                 <a:cs typeface="Calibri" pitchFamily="34" charset="-120"/>
               </a:rPr>
-              <a:t>2.  The word 'unrevealed' means something that has already been shown to everyone.</a:t>
+              <a:t>2.  'Revealing' is formed by adding the suffix '-ing' to 'reveal'.</a:t>
             </a:r>
             <a:endParaRPr lang="en-US" sz="1300" dirty="0"/>
           </a:p>
@@ -36899,11 +37964,11 @@
             </a:avLst>
           </a:prstGeom>
           <a:solidFill>
-            <a:srgbClr val="FEE2E2"/>
-          </a:solidFill>
-          <a:ln w="12700">
-            <a:solidFill>
-              <a:srgbClr val="DC2626"/>
+            <a:srgbClr val="DCFCE7"/>
+          </a:solidFill>
+          <a:ln w="12700">
+            <a:solidFill>
+              <a:srgbClr val="16A34A"/>
             </a:solidFill>
             <a:prstDash val="solid"/>
           </a:ln>
@@ -36936,13 +38001,13 @@
             <a:r>
               <a:rPr lang="en-US" sz="1100" b="1" dirty="0">
                 <a:solidFill>
-                  <a:srgbClr val="DC2626"/>
+                  <a:srgbClr val="16A34A"/>
                 </a:solidFill>
                 <a:latin typeface="Trebuchet MS" pitchFamily="34" charset="0"/>
                 <a:ea typeface="Trebuchet MS" pitchFamily="34" charset="-122"/>
                 <a:cs typeface="Trebuchet MS" pitchFamily="34" charset="-120"/>
               </a:rPr>
-              <a:t>FALSE</a:t>
+              <a:t>TRUE</a:t>
             </a:r>
             <a:endParaRPr lang="en-US" sz="1100" dirty="0"/>
           </a:p>
@@ -37015,7 +38080,7 @@
                 <a:ea typeface="Calibri" pitchFamily="34" charset="-122"/>
                 <a:cs typeface="Calibri" pitchFamily="34" charset="-120"/>
               </a:rPr>
-              <a:t>3.  Adding the suffix '-ing' to 'reveal' makes the word 'revealing'.</a:t>
+              <a:t>3.  A 'revelation' is a surprising discovery where hidden information is uncovered.</a:t>
             </a:r>
             <a:endParaRPr lang="en-US" sz="1300" dirty="0"/>
           </a:p>
@@ -37154,7 +38219,7 @@
                 <a:ea typeface="Calibri" pitchFamily="34" charset="-122"/>
                 <a:cs typeface="Calibri" pitchFamily="34" charset="-120"/>
               </a:rPr>
-              <a:t>4.  The prefix 're-' in 'reveal' comes from Latin and relates to uncovering.</a:t>
+              <a:t>4.  The word 'reveal' comes from a Latin word meaning to uncover.</a:t>
             </a:r>
             <a:endParaRPr lang="en-US" sz="1300" dirty="0"/>
           </a:p>
@@ -37293,7 +38358,7 @@
                 <a:ea typeface="Calibri" pitchFamily="34" charset="-122"/>
                 <a:cs typeface="Calibri" pitchFamily="34" charset="-120"/>
               </a:rPr>
-              <a:t>5.  The word 'revealingly' is a noun because it ends in '-ly'.</a:t>
+              <a:t>5.  The root 'reveal' comes from a Greek word meaning to see.</a:t>
             </a:r>
             <a:endParaRPr lang="en-US" sz="1300" dirty="0"/>
           </a:p>
@@ -37651,7 +38716,7 @@
                 <a:ea typeface="Calibri" pitchFamily="34" charset="-122"/>
                 <a:cs typeface="Calibri" pitchFamily="34" charset="-120"/>
               </a:rPr>
-              <a:t>Word Labs  •  wordlabs.app  •  Root: 'reveal' = uncover or show something hidden</a:t>
+              <a:t>Word Labs  •  wordlabs.app  •  Root: 'reveal' = to uncover or show hidden</a:t>
             </a:r>
             <a:endParaRPr lang="en-US" sz="800" dirty="0"/>
           </a:p>
@@ -37788,7 +38853,7 @@
                 <a:ea typeface="Trebuchet MS" pitchFamily="34" charset="-122"/>
                 <a:cs typeface="Trebuchet MS" pitchFamily="34" charset="-120"/>
               </a:rPr>
-              <a:t>uncover or show something hidden</a:t>
+              <a:t>to uncover or show hidden</a:t>
             </a:r>
             <a:endParaRPr lang="en-US" sz="2000" dirty="0"/>
           </a:p>
@@ -38130,7 +39195,7 @@
                 <a:ea typeface="Trebuchet MS" pitchFamily="34" charset="-122"/>
                 <a:cs typeface="Trebuchet MS" pitchFamily="34" charset="-120"/>
               </a:rPr>
-              <a:t>reveals</a:t>
+              <a:t>revealer</a:t>
             </a:r>
             <a:endParaRPr lang="en-US" sz="1300" dirty="0"/>
           </a:p>
@@ -38196,7 +39261,7 @@
                 <a:ea typeface="Trebuchet MS" pitchFamily="34" charset="-122"/>
                 <a:cs typeface="Trebuchet MS" pitchFamily="34" charset="-120"/>
               </a:rPr>
-              <a:t>revealer</a:t>
+              <a:t>revealingly</a:t>
             </a:r>
             <a:endParaRPr lang="en-US" sz="1300" dirty="0"/>
           </a:p>
@@ -38262,7 +39327,7 @@
                 <a:ea typeface="Trebuchet MS" pitchFamily="34" charset="-122"/>
                 <a:cs typeface="Trebuchet MS" pitchFamily="34" charset="-120"/>
               </a:rPr>
-              <a:t>revealingly</a:t>
+              <a:t>revelation</a:t>
             </a:r>
             <a:endParaRPr lang="en-US" sz="1300" dirty="0"/>
           </a:p>
@@ -38328,7 +39393,7 @@
                 <a:ea typeface="Trebuchet MS" pitchFamily="34" charset="-122"/>
                 <a:cs typeface="Trebuchet MS" pitchFamily="34" charset="-120"/>
               </a:rPr>
-              <a:t>self-revealing</a:t>
+              <a:t>revelations</a:t>
             </a:r>
             <a:endParaRPr lang="en-US" sz="1300" dirty="0"/>
           </a:p>
@@ -38620,7 +39685,7 @@
                 <a:ea typeface="Calibri" pitchFamily="34" charset="-122"/>
                 <a:cs typeface="Calibri" pitchFamily="34" charset="-120"/>
               </a:rPr>
-              <a:t>Word Labs  •  wordlabs.app  •  Root: 'reveal' = uncover or show something hidden</a:t>
+              <a:t>Word Labs  •  wordlabs.app  •  Root: 'reveal' = to uncover or show hidden</a:t>
             </a:r>
             <a:endParaRPr lang="en-US" sz="800" dirty="0"/>
           </a:p>
@@ -39508,7 +40573,7 @@
                 <a:ea typeface="Trebuchet MS" pitchFamily="34" charset="-122"/>
                 <a:cs typeface="Trebuchet MS" pitchFamily="34" charset="-120"/>
               </a:rPr>
-              <a:t>-s</a:t>
+              <a:t>-ingly</a:t>
             </a:r>
             <a:endParaRPr lang="en-US" sz="1300" dirty="0"/>
           </a:p>
@@ -39661,7 +40726,7 @@
                 <a:ea typeface="Trebuchet MS" pitchFamily="34" charset="-122"/>
                 <a:cs typeface="Trebuchet MS" pitchFamily="34" charset="-120"/>
               </a:rPr>
-              <a:t>-ingly</a:t>
+              <a:t>-ation</a:t>
             </a:r>
             <a:endParaRPr lang="en-US" sz="1300" dirty="0"/>
           </a:p>
@@ -40394,7 +41459,7 @@
                 <a:ea typeface="Calibri" pitchFamily="34" charset="-122"/>
                 <a:cs typeface="Calibri" pitchFamily="34" charset="-120"/>
               </a:rPr>
-              <a:t>Word Labs  •  wordlabs.app  •  Root: 'reveal' = uncover or show something hidden</a:t>
+              <a:t>Word Labs  •  wordlabs.app  •  Root: 'reveal' = to uncover or show hidden</a:t>
             </a:r>
             <a:endParaRPr lang="en-US" sz="800" dirty="0"/>
           </a:p>
@@ -40572,7 +41637,7 @@
                 <a:ea typeface="Calibri" pitchFamily="34" charset="-122"/>
                 <a:cs typeface="Calibri" pitchFamily="34" charset="-120"/>
               </a:rPr>
-              <a:t>A person or thing that uncovers hidden information.</a:t>
+              <a:t>In a way that shows or uncovers something important.</a:t>
             </a:r>
             <a:endParaRPr lang="en-US" sz="1200" dirty="0"/>
           </a:p>
@@ -40711,7 +41776,7 @@
                 <a:ea typeface="Calibri" pitchFamily="34" charset="-122"/>
                 <a:cs typeface="Calibri" pitchFamily="34" charset="-120"/>
               </a:rPr>
-              <a:t>Shows or uncovers hidden information or things.</a:t>
+              <a:t>A person or thing that uncovers hidden information.</a:t>
             </a:r>
             <a:endParaRPr lang="en-US" sz="1200" dirty="0"/>
           </a:p>
@@ -40850,7 +41915,7 @@
                 <a:ea typeface="Calibri" pitchFamily="34" charset="-122"/>
                 <a:cs typeface="Calibri" pitchFamily="34" charset="-120"/>
               </a:rPr>
-              <a:t>Showing or uncovering something that was hidden or surprising.</a:t>
+              <a:t>Showing or uncovering something interesting or hidden.</a:t>
             </a:r>
             <a:endParaRPr lang="en-US" sz="1200" dirty="0"/>
           </a:p>
@@ -40923,7 +41988,7 @@
                 <a:ea typeface="Trebuchet MS" pitchFamily="34" charset="-122"/>
                 <a:cs typeface="Trebuchet MS" pitchFamily="34" charset="-120"/>
               </a:rPr>
-              <a:t>reveals</a:t>
+              <a:t>revealer</a:t>
             </a:r>
             <a:endParaRPr lang="en-US" sz="1200" dirty="0"/>
           </a:p>
@@ -40989,7 +42054,7 @@
                 <a:ea typeface="Calibri" pitchFamily="34" charset="-122"/>
                 <a:cs typeface="Calibri" pitchFamily="34" charset="-120"/>
               </a:rPr>
-              <a:t>Showing or sharing things about yourself without being asked.</a:t>
+              <a:t>More than one surprising discovery or uncovering of hidden facts.</a:t>
             </a:r>
             <a:endParaRPr lang="en-US" sz="1200" dirty="0"/>
           </a:p>
@@ -41062,7 +42127,7 @@
                 <a:ea typeface="Trebuchet MS" pitchFamily="34" charset="-122"/>
                 <a:cs typeface="Trebuchet MS" pitchFamily="34" charset="-120"/>
               </a:rPr>
-              <a:t>revealer</a:t>
+              <a:t>revealingly</a:t>
             </a:r>
             <a:endParaRPr lang="en-US" sz="1200" dirty="0"/>
           </a:p>
@@ -41201,7 +42266,7 @@
                 <a:ea typeface="Trebuchet MS" pitchFamily="34" charset="-122"/>
                 <a:cs typeface="Trebuchet MS" pitchFamily="34" charset="-120"/>
               </a:rPr>
-              <a:t>revealingly</a:t>
+              <a:t>revelation</a:t>
             </a:r>
             <a:endParaRPr lang="en-US" sz="1200" dirty="0"/>
           </a:p>
@@ -41267,7 +42332,7 @@
                 <a:ea typeface="Calibri" pitchFamily="34" charset="-122"/>
                 <a:cs typeface="Calibri" pitchFamily="34" charset="-120"/>
               </a:rPr>
-              <a:t>In a way that shows or uncovers something important or surprising.</a:t>
+              <a:t>A surprising piece of information that is suddenly made known.</a:t>
             </a:r>
             <a:endParaRPr lang="en-US" sz="1200" dirty="0"/>
           </a:p>
@@ -41340,7 +42405,7 @@
                 <a:ea typeface="Trebuchet MS" pitchFamily="34" charset="-122"/>
                 <a:cs typeface="Trebuchet MS" pitchFamily="34" charset="-120"/>
               </a:rPr>
-              <a:t>self-revealing</a:t>
+              <a:t>revelations</a:t>
             </a:r>
             <a:endParaRPr lang="en-US" sz="1200" dirty="0"/>
           </a:p>
@@ -41406,7 +42471,7 @@
                 <a:ea typeface="Calibri" pitchFamily="34" charset="-122"/>
                 <a:cs typeface="Calibri" pitchFamily="34" charset="-120"/>
               </a:rPr>
-              <a:t>Showed or uncovered something that was hidden.</a:t>
+              <a:t>Something that was shown or uncovered in the past.</a:t>
             </a:r>
             <a:endParaRPr lang="en-US" sz="1200" dirty="0"/>
           </a:p>
@@ -41698,7 +42763,7 @@
                 <a:ea typeface="Calibri" pitchFamily="34" charset="-122"/>
                 <a:cs typeface="Calibri" pitchFamily="34" charset="-120"/>
               </a:rPr>
-              <a:t>Word Labs  •  wordlabs.app  •  Root: 'reveal' = uncover or show something hidden</a:t>
+              <a:t>Word Labs  •  wordlabs.app  •  Root: 'reveal' = to uncover or show hidden</a:t>
             </a:r>
             <a:endParaRPr lang="en-US" sz="800" dirty="0"/>
           </a:p>
@@ -41901,7 +42966,7 @@
                 <a:ea typeface="Calibri" pitchFamily="34" charset="-122"/>
                 <a:cs typeface="Calibri" pitchFamily="34" charset="-120"/>
               </a:rPr>
-              <a:t>The magician was revealing his secret trick to the amazed audience.</a:t>
+              <a:t>The scientist was revealing the results of her experiment to the excited class.</a:t>
             </a:r>
             <a:endParaRPr lang="en-US" sz="1500" dirty="0"/>
           </a:p>
@@ -42065,7 +43130,7 @@
                 <a:ea typeface="Calibri" pitchFamily="34" charset="-122"/>
                 <a:cs typeface="Calibri" pitchFamily="34" charset="-120"/>
               </a:rPr>
-              <a:t>The explorer revealed a hidden cave behind the waterfall.</a:t>
+              <a:t>At the end of the story, the author made a stunning revelation about who had taken the treasure.</a:t>
             </a:r>
             <a:endParaRPr lang="en-US" sz="1500" dirty="0"/>
           </a:p>
@@ -42229,7 +43294,7 @@
                 <a:ea typeface="Calibri" pitchFamily="34" charset="-122"/>
                 <a:cs typeface="Calibri" pitchFamily="34" charset="-120"/>
               </a:rPr>
-              <a:t>The teacher asked the students to look for clues that might reveal the answer.</a:t>
+              <a:t>The magician slowly revealed the rabbit hiding beneath the silk scarf.</a:t>
             </a:r>
             <a:endParaRPr lang="en-US" sz="1500" dirty="0"/>
           </a:p>

--- a/output/wordlabs-reveal-3day.pptx
+++ b/output/wordlabs-reveal-3day.pptx
@@ -28220,8 +28220,8 @@
         </p:nvSpPr>
         <p:spPr>
           <a:xfrm>
-            <a:off x="1952244" y="4169664"/>
-            <a:ext cx="543652" cy="475488"/>
+            <a:off x="1952596" y="4169664"/>
+            <a:ext cx="493776" cy="475488"/>
           </a:xfrm>
           <a:prstGeom prst="rect">
             <a:avLst>
@@ -28247,8 +28247,8 @@
         </p:nvSpPr>
         <p:spPr>
           <a:xfrm>
-            <a:off x="1952244" y="4169664"/>
-            <a:ext cx="543652" cy="475488"/>
+            <a:off x="1952596" y="4169664"/>
+            <a:ext cx="493776" cy="475488"/>
           </a:xfrm>
           <a:prstGeom prst="rect">
             <a:avLst/>
@@ -28286,8 +28286,8 @@
         </p:nvSpPr>
         <p:spPr>
           <a:xfrm>
-            <a:off x="2546188" y="4169664"/>
-            <a:ext cx="543652" cy="475488"/>
+            <a:off x="2497015" y="4169664"/>
+            <a:ext cx="493776" cy="475488"/>
           </a:xfrm>
           <a:prstGeom prst="rect">
             <a:avLst>
@@ -28313,8 +28313,8 @@
         </p:nvSpPr>
         <p:spPr>
           <a:xfrm>
-            <a:off x="2546188" y="4169664"/>
-            <a:ext cx="543652" cy="475488"/>
+            <a:off x="2497015" y="4169664"/>
+            <a:ext cx="493776" cy="475488"/>
           </a:xfrm>
           <a:prstGeom prst="rect">
             <a:avLst/>
@@ -28352,8 +28352,8 @@
         </p:nvSpPr>
         <p:spPr>
           <a:xfrm>
-            <a:off x="3140133" y="4169664"/>
-            <a:ext cx="543652" cy="475488"/>
+            <a:off x="3041435" y="4169664"/>
+            <a:ext cx="493776" cy="475488"/>
           </a:xfrm>
           <a:prstGeom prst="rect">
             <a:avLst>
@@ -28379,8 +28379,8 @@
         </p:nvSpPr>
         <p:spPr>
           <a:xfrm>
-            <a:off x="3140133" y="4169664"/>
-            <a:ext cx="543652" cy="475488"/>
+            <a:off x="3041435" y="4169664"/>
+            <a:ext cx="493776" cy="475488"/>
           </a:xfrm>
           <a:prstGeom prst="rect">
             <a:avLst/>
@@ -28418,8 +28418,8 @@
         </p:nvSpPr>
         <p:spPr>
           <a:xfrm>
-            <a:off x="3734077" y="4169664"/>
-            <a:ext cx="543652" cy="475488"/>
+            <a:off x="3585855" y="4169664"/>
+            <a:ext cx="493776" cy="475488"/>
           </a:xfrm>
           <a:prstGeom prst="rect">
             <a:avLst>
@@ -28445,8 +28445,8 @@
         </p:nvSpPr>
         <p:spPr>
           <a:xfrm>
-            <a:off x="3734077" y="4169664"/>
-            <a:ext cx="543652" cy="475488"/>
+            <a:off x="3585855" y="4169664"/>
+            <a:ext cx="493776" cy="475488"/>
           </a:xfrm>
           <a:prstGeom prst="rect">
             <a:avLst/>
@@ -28484,8 +28484,8 @@
         </p:nvSpPr>
         <p:spPr>
           <a:xfrm>
-            <a:off x="4328021" y="4169664"/>
-            <a:ext cx="543652" cy="475488"/>
+            <a:off x="4130274" y="4169664"/>
+            <a:ext cx="493776" cy="475488"/>
           </a:xfrm>
           <a:prstGeom prst="rect">
             <a:avLst>
@@ -28511,8 +28511,8 @@
         </p:nvSpPr>
         <p:spPr>
           <a:xfrm>
-            <a:off x="4328021" y="4169664"/>
-            <a:ext cx="543652" cy="475488"/>
+            <a:off x="4130274" y="4169664"/>
+            <a:ext cx="493776" cy="475488"/>
           </a:xfrm>
           <a:prstGeom prst="rect">
             <a:avLst/>
@@ -28536,7 +28536,7 @@
                 <a:ea typeface="Trebuchet MS" pitchFamily="34" charset="-122"/>
                 <a:cs typeface="Trebuchet MS" pitchFamily="34" charset="-120"/>
               </a:rPr>
-              <a:t>r</a:t>
+              <a:t>-</a:t>
             </a:r>
             <a:endParaRPr lang="en-US" sz="900" dirty="0"/>
           </a:p>
@@ -28550,8 +28550,8 @@
         </p:nvSpPr>
         <p:spPr>
           <a:xfrm>
-            <a:off x="4921966" y="4169664"/>
-            <a:ext cx="543652" cy="475488"/>
+            <a:off x="4674694" y="4169664"/>
+            <a:ext cx="493776" cy="475488"/>
           </a:xfrm>
           <a:prstGeom prst="rect">
             <a:avLst>
@@ -28577,8 +28577,8 @@
         </p:nvSpPr>
         <p:spPr>
           <a:xfrm>
-            <a:off x="4921966" y="4169664"/>
-            <a:ext cx="543652" cy="475488"/>
+            <a:off x="4674694" y="4169664"/>
+            <a:ext cx="493776" cy="475488"/>
           </a:xfrm>
           <a:prstGeom prst="rect">
             <a:avLst/>
@@ -28602,7 +28602,7 @@
                 <a:ea typeface="Trebuchet MS" pitchFamily="34" charset="-122"/>
                 <a:cs typeface="Trebuchet MS" pitchFamily="34" charset="-120"/>
               </a:rPr>
-              <a:t>e</a:t>
+              <a:t>r</a:t>
             </a:r>
             <a:endParaRPr lang="en-US" sz="900" dirty="0"/>
           </a:p>
@@ -28616,8 +28616,8 @@
         </p:nvSpPr>
         <p:spPr>
           <a:xfrm>
-            <a:off x="5515910" y="4169664"/>
-            <a:ext cx="543652" cy="475488"/>
+            <a:off x="5219114" y="4169664"/>
+            <a:ext cx="493776" cy="475488"/>
           </a:xfrm>
           <a:prstGeom prst="rect">
             <a:avLst>
@@ -28643,8 +28643,8 @@
         </p:nvSpPr>
         <p:spPr>
           <a:xfrm>
-            <a:off x="5515910" y="4169664"/>
-            <a:ext cx="543652" cy="475488"/>
+            <a:off x="5219114" y="4169664"/>
+            <a:ext cx="493776" cy="475488"/>
           </a:xfrm>
           <a:prstGeom prst="rect">
             <a:avLst/>
@@ -28668,7 +28668,7 @@
                 <a:ea typeface="Trebuchet MS" pitchFamily="34" charset="-122"/>
                 <a:cs typeface="Trebuchet MS" pitchFamily="34" charset="-120"/>
               </a:rPr>
-              <a:t>v</a:t>
+              <a:t>e</a:t>
             </a:r>
             <a:endParaRPr lang="en-US" sz="900" dirty="0"/>
           </a:p>
@@ -28682,8 +28682,8 @@
         </p:nvSpPr>
         <p:spPr>
           <a:xfrm>
-            <a:off x="6109855" y="4169664"/>
-            <a:ext cx="543652" cy="475488"/>
+            <a:off x="5763534" y="4169664"/>
+            <a:ext cx="493776" cy="475488"/>
           </a:xfrm>
           <a:prstGeom prst="rect">
             <a:avLst>
@@ -28709,8 +28709,8 @@
         </p:nvSpPr>
         <p:spPr>
           <a:xfrm>
-            <a:off x="6109855" y="4169664"/>
-            <a:ext cx="543652" cy="475488"/>
+            <a:off x="5763534" y="4169664"/>
+            <a:ext cx="493776" cy="475488"/>
           </a:xfrm>
           <a:prstGeom prst="rect">
             <a:avLst/>
@@ -28734,7 +28734,7 @@
                 <a:ea typeface="Trebuchet MS" pitchFamily="34" charset="-122"/>
                 <a:cs typeface="Trebuchet MS" pitchFamily="34" charset="-120"/>
               </a:rPr>
-              <a:t>ea</a:t>
+              <a:t>v</a:t>
             </a:r>
             <a:endParaRPr lang="en-US" sz="900" dirty="0"/>
           </a:p>
@@ -28748,8 +28748,8 @@
         </p:nvSpPr>
         <p:spPr>
           <a:xfrm>
-            <a:off x="6703799" y="4169664"/>
-            <a:ext cx="543652" cy="475488"/>
+            <a:off x="6307953" y="4169664"/>
+            <a:ext cx="493776" cy="475488"/>
           </a:xfrm>
           <a:prstGeom prst="rect">
             <a:avLst>
@@ -28775,8 +28775,8 @@
         </p:nvSpPr>
         <p:spPr>
           <a:xfrm>
-            <a:off x="6703799" y="4169664"/>
-            <a:ext cx="543652" cy="475488"/>
+            <a:off x="6307953" y="4169664"/>
+            <a:ext cx="493776" cy="475488"/>
           </a:xfrm>
           <a:prstGeom prst="rect">
             <a:avLst/>
@@ -28800,7 +28800,7 @@
                 <a:ea typeface="Trebuchet MS" pitchFamily="34" charset="-122"/>
                 <a:cs typeface="Trebuchet MS" pitchFamily="34" charset="-120"/>
               </a:rPr>
-              <a:t>l</a:t>
+              <a:t>ea</a:t>
             </a:r>
             <a:endParaRPr lang="en-US" sz="900" dirty="0"/>
           </a:p>
@@ -28814,8 +28814,8 @@
         </p:nvSpPr>
         <p:spPr>
           <a:xfrm>
-            <a:off x="7297743" y="4169664"/>
-            <a:ext cx="543652" cy="475488"/>
+            <a:off x="6852373" y="4169664"/>
+            <a:ext cx="493776" cy="475488"/>
           </a:xfrm>
           <a:prstGeom prst="rect">
             <a:avLst>
@@ -28841,8 +28841,8 @@
         </p:nvSpPr>
         <p:spPr>
           <a:xfrm>
-            <a:off x="7297743" y="4169664"/>
-            <a:ext cx="543652" cy="475488"/>
+            <a:off x="6852373" y="4169664"/>
+            <a:ext cx="493776" cy="475488"/>
           </a:xfrm>
           <a:prstGeom prst="rect">
             <a:avLst/>
@@ -28866,7 +28866,7 @@
                 <a:ea typeface="Trebuchet MS" pitchFamily="34" charset="-122"/>
                 <a:cs typeface="Trebuchet MS" pitchFamily="34" charset="-120"/>
               </a:rPr>
-              <a:t>i</a:t>
+              <a:t>l</a:t>
             </a:r>
             <a:endParaRPr lang="en-US" sz="900" dirty="0"/>
           </a:p>
@@ -28880,8 +28880,8 @@
         </p:nvSpPr>
         <p:spPr>
           <a:xfrm>
-            <a:off x="7891688" y="4169664"/>
-            <a:ext cx="543652" cy="475488"/>
+            <a:off x="7396793" y="4169664"/>
+            <a:ext cx="493776" cy="475488"/>
           </a:xfrm>
           <a:prstGeom prst="rect">
             <a:avLst>
@@ -28907,8 +28907,74 @@
         </p:nvSpPr>
         <p:spPr>
           <a:xfrm>
-            <a:off x="7891688" y="4169664"/>
-            <a:ext cx="543652" cy="475488"/>
+            <a:off x="7396793" y="4169664"/>
+            <a:ext cx="493776" cy="475488"/>
+          </a:xfrm>
+          <a:prstGeom prst="rect">
+            <a:avLst/>
+          </a:prstGeom>
+          <a:noFill/>
+          <a:ln/>
+        </p:spPr>
+        <p:txBody>
+          <a:bodyPr wrap="square" lIns="0" tIns="0" rIns="0" bIns="0" rtlCol="0" anchor="ctr"/>
+          <a:lstStyle/>
+          <a:p>
+            <a:pPr algn="ctr" indent="0" marL="0">
+              <a:buNone/>
+            </a:pPr>
+            <a:r>
+              <a:rPr lang="en-US" sz="900" b="1" dirty="0">
+                <a:solidFill>
+                  <a:srgbClr val="9D174D"/>
+                </a:solidFill>
+                <a:latin typeface="Trebuchet MS" pitchFamily="34" charset="0"/>
+                <a:ea typeface="Trebuchet MS" pitchFamily="34" charset="-122"/>
+                <a:cs typeface="Trebuchet MS" pitchFamily="34" charset="-120"/>
+              </a:rPr>
+              <a:t>i</a:t>
+            </a:r>
+            <a:endParaRPr lang="en-US" sz="900" dirty="0"/>
+          </a:p>
+        </p:txBody>
+      </p:sp>
+      <p:sp>
+        <p:nvSpPr>
+          <p:cNvPr id="61" name="Shape 59"/>
+          <p:cNvSpPr/>
+          <p:nvPr/>
+        </p:nvSpPr>
+        <p:spPr>
+          <a:xfrm>
+            <a:off x="7941212" y="4169664"/>
+            <a:ext cx="493776" cy="475488"/>
+          </a:xfrm>
+          <a:prstGeom prst="rect">
+            <a:avLst>
+              <a:gd name="adj" fmla="val 7692"/>
+            </a:avLst>
+          </a:prstGeom>
+          <a:solidFill>
+            <a:srgbClr val="FFFFFF"/>
+          </a:solidFill>
+          <a:ln w="12700">
+            <a:solidFill>
+              <a:srgbClr val="DB2777"/>
+            </a:solidFill>
+            <a:prstDash val="solid"/>
+          </a:ln>
+        </p:spPr>
+      </p:sp>
+      <p:sp>
+        <p:nvSpPr>
+          <p:cNvPr id="62" name="Text 60"/>
+          <p:cNvSpPr/>
+          <p:nvPr/>
+        </p:nvSpPr>
+        <p:spPr>
+          <a:xfrm>
+            <a:off x="7941212" y="4169664"/>
+            <a:ext cx="493776" cy="475488"/>
           </a:xfrm>
           <a:prstGeom prst="rect">
             <a:avLst/>
@@ -37941,7 +38007,7 @@
                 <a:ea typeface="Calibri" pitchFamily="34" charset="-122"/>
                 <a:cs typeface="Calibri" pitchFamily="34" charset="-120"/>
               </a:rPr>
-              <a:t>2.  'Revealing' is formed by adding the suffix '-ing' to 'reveal'.</a:t>
+              <a:t>2.  The root 'reveal' comes from a Greek word meaning to see.</a:t>
             </a:r>
             <a:endParaRPr lang="en-US" sz="1300" dirty="0"/>
           </a:p>
@@ -37964,11 +38030,11 @@
             </a:avLst>
           </a:prstGeom>
           <a:solidFill>
-            <a:srgbClr val="DCFCE7"/>
-          </a:solidFill>
-          <a:ln w="12700">
-            <a:solidFill>
-              <a:srgbClr val="16A34A"/>
+            <a:srgbClr val="FEE2E2"/>
+          </a:solidFill>
+          <a:ln w="12700">
+            <a:solidFill>
+              <a:srgbClr val="DC2626"/>
             </a:solidFill>
             <a:prstDash val="solid"/>
           </a:ln>
@@ -38001,13 +38067,13 @@
             <a:r>
               <a:rPr lang="en-US" sz="1100" b="1" dirty="0">
                 <a:solidFill>
-                  <a:srgbClr val="16A34A"/>
+                  <a:srgbClr val="DC2626"/>
                 </a:solidFill>
                 <a:latin typeface="Trebuchet MS" pitchFamily="34" charset="0"/>
                 <a:ea typeface="Trebuchet MS" pitchFamily="34" charset="-122"/>
                 <a:cs typeface="Trebuchet MS" pitchFamily="34" charset="-120"/>
               </a:rPr>
-              <a:t>TRUE</a:t>
+              <a:t>FALSE</a:t>
             </a:r>
             <a:endParaRPr lang="en-US" sz="1100" dirty="0"/>
           </a:p>
@@ -38080,7 +38146,7 @@
                 <a:ea typeface="Calibri" pitchFamily="34" charset="-122"/>
                 <a:cs typeface="Calibri" pitchFamily="34" charset="-120"/>
               </a:rPr>
-              <a:t>3.  A 'revelation' is a surprising discovery where hidden information is uncovered.</a:t>
+              <a:t>3.  'Revealing' is formed by adding the suffix '-ing' to 'reveal'.</a:t>
             </a:r>
             <a:endParaRPr lang="en-US" sz="1300" dirty="0"/>
           </a:p>
@@ -38219,7 +38285,7 @@
                 <a:ea typeface="Calibri" pitchFamily="34" charset="-122"/>
                 <a:cs typeface="Calibri" pitchFamily="34" charset="-120"/>
               </a:rPr>
-              <a:t>4.  The word 'reveal' comes from a Latin word meaning to uncover.</a:t>
+              <a:t>4.  A 'revelation' is a surprising discovery where hidden information is uncovered.</a:t>
             </a:r>
             <a:endParaRPr lang="en-US" sz="1300" dirty="0"/>
           </a:p>
@@ -38358,7 +38424,7 @@
                 <a:ea typeface="Calibri" pitchFamily="34" charset="-122"/>
                 <a:cs typeface="Calibri" pitchFamily="34" charset="-120"/>
               </a:rPr>
-              <a:t>5.  The root 'reveal' comes from a Greek word meaning to see.</a:t>
+              <a:t>5.  The word 'reveal' comes from a Latin word meaning to uncover.</a:t>
             </a:r>
             <a:endParaRPr lang="en-US" sz="1300" dirty="0"/>
           </a:p>
@@ -38381,11 +38447,11 @@
             </a:avLst>
           </a:prstGeom>
           <a:solidFill>
-            <a:srgbClr val="FEE2E2"/>
-          </a:solidFill>
-          <a:ln w="12700">
-            <a:solidFill>
-              <a:srgbClr val="DC2626"/>
+            <a:srgbClr val="DCFCE7"/>
+          </a:solidFill>
+          <a:ln w="12700">
+            <a:solidFill>
+              <a:srgbClr val="16A34A"/>
             </a:solidFill>
             <a:prstDash val="solid"/>
           </a:ln>
@@ -38418,13 +38484,13 @@
             <a:r>
               <a:rPr lang="en-US" sz="1100" b="1" dirty="0">
                 <a:solidFill>
-                  <a:srgbClr val="DC2626"/>
+                  <a:srgbClr val="16A34A"/>
                 </a:solidFill>
                 <a:latin typeface="Trebuchet MS" pitchFamily="34" charset="0"/>
                 <a:ea typeface="Trebuchet MS" pitchFamily="34" charset="-122"/>
                 <a:cs typeface="Trebuchet MS" pitchFamily="34" charset="-120"/>
               </a:rPr>
-              <a:t>FALSE</a:t>
+              <a:t>TRUE</a:t>
             </a:r>
             <a:endParaRPr lang="en-US" sz="1100" dirty="0"/>
           </a:p>
